--- a/src/test/resources/presale-test-automation-selection-presenttation/Presales_Testautomatisierungswerkzeuge.pptx
+++ b/src/test/resources/presale-test-automation-selection-presenttation/Presales_Testautomatisierungswerkzeuge.pptx
@@ -4889,7 +4889,7 @@
         <p:spPr>
           <a:xfrm>
             <a:off x="822960" y="1508760"/>
-            <a:ext cx="10515600" cy="4754880"/>
+            <a:ext cx="10515600" cy="1277273"/>
           </a:xfrm>
           <a:prstGeom prst="rect">
             <a:avLst/>
@@ -4911,8 +4911,58 @@
               </a:defRPr>
             </a:pPr>
             <a:r>
-              <a:t>• Ziel: Gemeinsam eine passende, nachhaltige Automatisierungsstrategie entwickeln</a:t>
-            </a:r>
+              <a:rPr dirty="0"/>
+              <a:t>• Ziel: </a:t>
+            </a:r>
+            <a:r>
+              <a:rPr dirty="0" err="1"/>
+              <a:t>Gemeinsam</a:t>
+            </a:r>
+            <a:r>
+              <a:rPr dirty="0"/>
+              <a:t> </a:t>
+            </a:r>
+            <a:r>
+              <a:rPr dirty="0" err="1"/>
+              <a:t>eine</a:t>
+            </a:r>
+            <a:r>
+              <a:rPr dirty="0"/>
+              <a:t> </a:t>
+            </a:r>
+            <a:r>
+              <a:rPr dirty="0" err="1"/>
+              <a:t>passende</a:t>
+            </a:r>
+            <a:r>
+              <a:rPr dirty="0"/>
+              <a:t>, </a:t>
+            </a:r>
+            <a:r>
+              <a:rPr dirty="0" err="1"/>
+              <a:t>nachhaltige</a:t>
+            </a:r>
+            <a:r>
+              <a:rPr dirty="0"/>
+              <a:t> </a:t>
+            </a:r>
+            <a:r>
+              <a:rPr dirty="0" err="1"/>
+              <a:t>Automatisierungsstrategie</a:t>
+            </a:r>
+            <a:r>
+              <a:rPr dirty="0"/>
+              <a:t> </a:t>
+            </a:r>
+            <a:r>
+              <a:rPr lang="de-DE" dirty="0"/>
+              <a:t>zu </a:t>
+            </a:r>
+            <a:r>
+              <a:rPr dirty="0" err="1"/>
+              <a:t>entwickeln</a:t>
+            </a:r>
+            <a:endParaRPr dirty="0"/>
           </a:p>
           <a:p>
             <a:pPr>
@@ -4924,8 +4974,38 @@
               </a:defRPr>
             </a:pPr>
             <a:r>
-              <a:t>• Fokus: Anforderungen, Technologie, Team, Budget und langfristiger Betrieb</a:t>
-            </a:r>
+              <a:rPr dirty="0"/>
+              <a:t>• </a:t>
+            </a:r>
+            <a:r>
+              <a:rPr dirty="0" err="1"/>
+              <a:t>Fokus</a:t>
+            </a:r>
+            <a:r>
+              <a:rPr dirty="0"/>
+              <a:t>: </a:t>
+            </a:r>
+            <a:r>
+              <a:rPr dirty="0" err="1"/>
+              <a:t>Anforderungen</a:t>
+            </a:r>
+            <a:r>
+              <a:rPr dirty="0"/>
+              <a:t>, Technologie, Team, Budget und </a:t>
+            </a:r>
+            <a:r>
+              <a:rPr dirty="0" err="1"/>
+              <a:t>langfristiger</a:t>
+            </a:r>
+            <a:r>
+              <a:rPr dirty="0"/>
+              <a:t> </a:t>
+            </a:r>
+            <a:r>
+              <a:rPr dirty="0" err="1"/>
+              <a:t>Betrieb</a:t>
+            </a:r>
+            <a:endParaRPr dirty="0"/>
           </a:p>
           <a:p>
             <a:pPr>
@@ -4937,8 +5017,46 @@
               </a:defRPr>
             </a:pPr>
             <a:r>
-              <a:t>• Vorgehen: Erst verstehen → dann bewerten → Pilot durchführen → skalieren</a:t>
-            </a:r>
+              <a:rPr dirty="0"/>
+              <a:t>• </a:t>
+            </a:r>
+            <a:r>
+              <a:rPr dirty="0" err="1"/>
+              <a:t>Vorgehen</a:t>
+            </a:r>
+            <a:r>
+              <a:rPr dirty="0"/>
+              <a:t>: Erst verstehen → </a:t>
+            </a:r>
+            <a:r>
+              <a:rPr dirty="0" err="1"/>
+              <a:t>dann</a:t>
+            </a:r>
+            <a:r>
+              <a:rPr dirty="0"/>
+              <a:t> </a:t>
+            </a:r>
+            <a:r>
+              <a:rPr dirty="0" err="1"/>
+              <a:t>bewerten</a:t>
+            </a:r>
+            <a:r>
+              <a:rPr dirty="0"/>
+              <a:t> → Pilot </a:t>
+            </a:r>
+            <a:r>
+              <a:rPr dirty="0" err="1"/>
+              <a:t>durchführen</a:t>
+            </a:r>
+            <a:r>
+              <a:rPr dirty="0"/>
+              <a:t> → </a:t>
+            </a:r>
+            <a:r>
+              <a:rPr dirty="0" err="1"/>
+              <a:t>skalieren</a:t>
+            </a:r>
+            <a:endParaRPr dirty="0"/>
           </a:p>
         </p:txBody>
       </p:sp>
@@ -6060,7 +6178,7 @@
         <p:spPr>
           <a:xfrm>
             <a:off x="822960" y="1508760"/>
-            <a:ext cx="10515600" cy="4754880"/>
+            <a:ext cx="10515600" cy="2616101"/>
           </a:xfrm>
           <a:prstGeom prst="rect">
             <a:avLst/>
@@ -6082,7 +6200,56 @@
               </a:defRPr>
             </a:pPr>
             <a:r>
-              <a:t>• Welche Produkte und Technologien sollen getestet werden?</a:t>
+              <a:rPr dirty="0"/>
+              <a:t>• </a:t>
+            </a:r>
+            <a:r>
+              <a:rPr dirty="0" err="1"/>
+              <a:t>Welche</a:t>
+            </a:r>
+            <a:r>
+              <a:rPr dirty="0"/>
+              <a:t> </a:t>
+            </a:r>
+            <a:r>
+              <a:rPr dirty="0" err="1"/>
+              <a:t>Produkte</a:t>
+            </a:r>
+            <a:r>
+              <a:rPr dirty="0"/>
+              <a:t> und </a:t>
+            </a:r>
+            <a:r>
+              <a:rPr dirty="0" err="1"/>
+              <a:t>Technologien</a:t>
+            </a:r>
+            <a:r>
+              <a:rPr dirty="0"/>
+              <a:t> </a:t>
+            </a:r>
+            <a:r>
+              <a:rPr dirty="0" err="1"/>
+              <a:t>sollen</a:t>
+            </a:r>
+            <a:r>
+              <a:rPr dirty="0"/>
+              <a:t> </a:t>
+            </a:r>
+            <a:r>
+              <a:rPr dirty="0" err="1"/>
+              <a:t>getestet</a:t>
+            </a:r>
+            <a:r>
+              <a:rPr dirty="0"/>
+              <a:t> </a:t>
+            </a:r>
+            <a:r>
+              <a:rPr dirty="0" err="1"/>
+              <a:t>werden</a:t>
+            </a:r>
+            <a:r>
+              <a:rPr dirty="0"/>
+              <a:t>?</a:t>
             </a:r>
           </a:p>
           <a:p>
@@ -6095,7 +6262,48 @@
               </a:defRPr>
             </a:pPr>
             <a:r>
-              <a:t>• Welche Geschäftsprozesse sind besonders kritisch?</a:t>
+              <a:rPr dirty="0"/>
+              <a:t>• </a:t>
+            </a:r>
+            <a:r>
+              <a:rPr dirty="0" err="1"/>
+              <a:t>Welche</a:t>
+            </a:r>
+            <a:r>
+              <a:rPr dirty="0"/>
+              <a:t> </a:t>
+            </a:r>
+            <a:r>
+              <a:rPr dirty="0" err="1"/>
+              <a:t>Geschäftsprozesse</a:t>
+            </a:r>
+            <a:r>
+              <a:rPr dirty="0"/>
+              <a:t> </a:t>
+            </a:r>
+            <a:r>
+              <a:rPr dirty="0" err="1"/>
+              <a:t>sind</a:t>
+            </a:r>
+            <a:r>
+              <a:rPr dirty="0"/>
+              <a:t> </a:t>
+            </a:r>
+            <a:r>
+              <a:rPr dirty="0" err="1"/>
+              <a:t>besonders</a:t>
+            </a:r>
+            <a:r>
+              <a:rPr dirty="0"/>
+              <a:t> </a:t>
+            </a:r>
+            <a:r>
+              <a:rPr dirty="0" err="1"/>
+              <a:t>kritisch</a:t>
+            </a:r>
+            <a:r>
+              <a:rPr dirty="0"/>
+              <a:t>?</a:t>
             </a:r>
           </a:p>
           <a:p>
@@ -6108,7 +6316,48 @@
               </a:defRPr>
             </a:pPr>
             <a:r>
-              <a:t>• Wer soll die Tests entwickeln und langfristig warten?</a:t>
+              <a:rPr dirty="0"/>
+              <a:t>• </a:t>
+            </a:r>
+            <a:r>
+              <a:rPr dirty="0" err="1"/>
+              <a:t>Wer</a:t>
+            </a:r>
+            <a:r>
+              <a:rPr dirty="0"/>
+              <a:t> </a:t>
+            </a:r>
+            <a:r>
+              <a:rPr dirty="0" err="1"/>
+              <a:t>soll</a:t>
+            </a:r>
+            <a:r>
+              <a:rPr dirty="0"/>
+              <a:t> die Tests </a:t>
+            </a:r>
+            <a:r>
+              <a:rPr dirty="0" err="1"/>
+              <a:t>entwickeln</a:t>
+            </a:r>
+            <a:r>
+              <a:rPr dirty="0"/>
+              <a:t> und </a:t>
+            </a:r>
+            <a:r>
+              <a:rPr dirty="0" err="1"/>
+              <a:t>langfristig</a:t>
+            </a:r>
+            <a:r>
+              <a:rPr dirty="0"/>
+              <a:t> </a:t>
+            </a:r>
+            <a:r>
+              <a:rPr dirty="0" err="1"/>
+              <a:t>warten</a:t>
+            </a:r>
+            <a:r>
+              <a:rPr dirty="0"/>
+              <a:t>?</a:t>
             </a:r>
           </a:p>
           <a:p>
@@ -6121,7 +6370,40 @@
               </a:defRPr>
             </a:pPr>
             <a:r>
-              <a:t>• Welche CI/CD- und Entwicklungsumgebung ist vorhanden?</a:t>
+              <a:rPr dirty="0"/>
+              <a:t>• </a:t>
+            </a:r>
+            <a:r>
+              <a:rPr dirty="0" err="1"/>
+              <a:t>Welche</a:t>
+            </a:r>
+            <a:r>
+              <a:rPr dirty="0"/>
+              <a:t> CI/CD- und </a:t>
+            </a:r>
+            <a:r>
+              <a:rPr dirty="0" err="1"/>
+              <a:t>Entwicklungsumgebung</a:t>
+            </a:r>
+            <a:r>
+              <a:rPr dirty="0"/>
+              <a:t> </a:t>
+            </a:r>
+            <a:r>
+              <a:rPr dirty="0" err="1"/>
+              <a:t>ist</a:t>
+            </a:r>
+            <a:r>
+              <a:rPr dirty="0"/>
+              <a:t> </a:t>
+            </a:r>
+            <a:r>
+              <a:rPr dirty="0" err="1"/>
+              <a:t>vorhanden</a:t>
+            </a:r>
+            <a:r>
+              <a:rPr dirty="0"/>
+              <a:t>?</a:t>
             </a:r>
           </a:p>
           <a:p>
@@ -6134,7 +6416,32 @@
               </a:defRPr>
             </a:pPr>
             <a:r>
-              <a:t>• Welche Anforderungen gibt es an Reporting und Compliance?</a:t>
+              <a:rPr dirty="0"/>
+              <a:t>• </a:t>
+            </a:r>
+            <a:r>
+              <a:rPr dirty="0" err="1"/>
+              <a:t>Welche</a:t>
+            </a:r>
+            <a:r>
+              <a:rPr dirty="0"/>
+              <a:t> </a:t>
+            </a:r>
+            <a:r>
+              <a:rPr dirty="0" err="1"/>
+              <a:t>Anforderungen</a:t>
+            </a:r>
+            <a:r>
+              <a:rPr dirty="0"/>
+              <a:t> </a:t>
+            </a:r>
+            <a:r>
+              <a:rPr dirty="0" err="1"/>
+              <a:t>gibt</a:t>
+            </a:r>
+            <a:r>
+              <a:rPr dirty="0"/>
+              <a:t> es an Reporting?</a:t>
             </a:r>
           </a:p>
           <a:p>
@@ -6147,7 +6454,64 @@
               </a:defRPr>
             </a:pPr>
             <a:r>
-              <a:t>• Welches Budget bzw. welche internen Ressourcen stehen zur Verfügung?</a:t>
+              <a:rPr dirty="0"/>
+              <a:t>• Welches Budget </a:t>
+            </a:r>
+            <a:r>
+              <a:rPr dirty="0" err="1"/>
+              <a:t>bzw</a:t>
+            </a:r>
+            <a:r>
+              <a:rPr dirty="0"/>
+              <a:t>. </a:t>
+            </a:r>
+            <a:r>
+              <a:rPr dirty="0" err="1"/>
+              <a:t>welche</a:t>
+            </a:r>
+            <a:r>
+              <a:rPr dirty="0"/>
+              <a:t> </a:t>
+            </a:r>
+            <a:r>
+              <a:rPr dirty="0" err="1"/>
+              <a:t>internen</a:t>
+            </a:r>
+            <a:r>
+              <a:rPr dirty="0"/>
+              <a:t> </a:t>
+            </a:r>
+            <a:r>
+              <a:rPr dirty="0" err="1"/>
+              <a:t>Ressourcen</a:t>
+            </a:r>
+            <a:r>
+              <a:rPr dirty="0"/>
+              <a:t> </a:t>
+            </a:r>
+            <a:r>
+              <a:rPr dirty="0" err="1"/>
+              <a:t>stehen</a:t>
+            </a:r>
+            <a:r>
+              <a:rPr dirty="0"/>
+              <a:t> </a:t>
+            </a:r>
+            <a:r>
+              <a:rPr dirty="0" err="1"/>
+              <a:t>zur</a:t>
+            </a:r>
+            <a:r>
+              <a:rPr dirty="0"/>
+              <a:t> </a:t>
+            </a:r>
+            <a:r>
+              <a:rPr dirty="0" err="1"/>
+              <a:t>Verfügung</a:t>
+            </a:r>
+            <a:r>
+              <a:rPr dirty="0"/>
+              <a:t>?</a:t>
             </a:r>
           </a:p>
         </p:txBody>
@@ -6302,7 +6666,7 @@
         <p:spPr>
           <a:xfrm>
             <a:off x="822960" y="1508760"/>
-            <a:ext cx="10515600" cy="4754880"/>
+            <a:ext cx="10515600" cy="2462213"/>
           </a:xfrm>
           <a:prstGeom prst="rect">
             <a:avLst/>
@@ -6324,8 +6688,54 @@
               </a:defRPr>
             </a:pPr>
             <a:r>
-              <a:t>• Bisher wenig bzw. keine Erfahrung mit Testautomatisierung</a:t>
-            </a:r>
+              <a:rPr dirty="0"/>
+              <a:t>• Bisher </a:t>
+            </a:r>
+            <a:r>
+              <a:rPr dirty="0" err="1"/>
+              <a:t>wenig</a:t>
+            </a:r>
+            <a:r>
+              <a:rPr dirty="0"/>
+              <a:t> </a:t>
+            </a:r>
+            <a:r>
+              <a:rPr dirty="0" err="1"/>
+              <a:t>bzw</a:t>
+            </a:r>
+            <a:r>
+              <a:rPr dirty="0"/>
+              <a:t>. </a:t>
+            </a:r>
+            <a:r>
+              <a:rPr dirty="0" err="1"/>
+              <a:t>keine</a:t>
+            </a:r>
+            <a:r>
+              <a:rPr dirty="0"/>
+              <a:t> </a:t>
+            </a:r>
+            <a:r>
+              <a:rPr dirty="0" err="1"/>
+              <a:t>Erfahrung</a:t>
+            </a:r>
+            <a:r>
+              <a:rPr dirty="0"/>
+              <a:t> </a:t>
+            </a:r>
+            <a:r>
+              <a:rPr dirty="0" err="1"/>
+              <a:t>mit</a:t>
+            </a:r>
+            <a:r>
+              <a:rPr dirty="0"/>
+              <a:t> </a:t>
+            </a:r>
+            <a:r>
+              <a:rPr dirty="0" err="1"/>
+              <a:t>Testautomatisierung</a:t>
+            </a:r>
+            <a:endParaRPr dirty="0"/>
           </a:p>
           <a:p>
             <a:pPr>
@@ -6337,7 +6747,56 @@
               </a:defRPr>
             </a:pPr>
             <a:r>
-              <a:t>• Noch unklar: Wer übernimmt Entwicklung, Wartung und Betrieb?</a:t>
+              <a:rPr dirty="0"/>
+              <a:t>• Noch </a:t>
+            </a:r>
+            <a:r>
+              <a:rPr dirty="0" err="1"/>
+              <a:t>unklar</a:t>
+            </a:r>
+            <a:r>
+              <a:rPr dirty="0"/>
+              <a:t>: </a:t>
+            </a:r>
+            <a:r>
+              <a:rPr dirty="0" err="1"/>
+              <a:t>Wer</a:t>
+            </a:r>
+            <a:r>
+              <a:rPr dirty="0"/>
+              <a:t> </a:t>
+            </a:r>
+            <a:r>
+              <a:rPr dirty="0" err="1"/>
+              <a:t>übernimmt</a:t>
+            </a:r>
+            <a:r>
+              <a:rPr dirty="0"/>
+              <a:t> </a:t>
+            </a:r>
+            <a:r>
+              <a:rPr dirty="0" err="1"/>
+              <a:t>Entwicklung</a:t>
+            </a:r>
+            <a:r>
+              <a:rPr dirty="0"/>
+              <a:t>, </a:t>
+            </a:r>
+            <a:r>
+              <a:rPr dirty="0" err="1"/>
+              <a:t>Wartung</a:t>
+            </a:r>
+            <a:r>
+              <a:rPr dirty="0"/>
+              <a:t> und</a:t>
+            </a:r>
+            <a:r>
+              <a:rPr lang="de-DE" dirty="0"/>
+              <a:t> Monitoring</a:t>
+            </a:r>
+            <a:r>
+              <a:rPr dirty="0"/>
+              <a:t>?</a:t>
             </a:r>
           </a:p>
           <a:p>
@@ -6350,8 +6809,38 @@
               </a:defRPr>
             </a:pPr>
             <a:r>
-              <a:t>• Budget für Werkzeuge ist noch offen</a:t>
-            </a:r>
+              <a:rPr dirty="0"/>
+              <a:t>• Budget für </a:t>
+            </a:r>
+            <a:r>
+              <a:rPr dirty="0" err="1"/>
+              <a:t>Werkzeuge</a:t>
+            </a:r>
+            <a:r>
+              <a:rPr dirty="0"/>
+              <a:t> </a:t>
+            </a:r>
+            <a:r>
+              <a:rPr dirty="0" err="1"/>
+              <a:t>ist</a:t>
+            </a:r>
+            <a:r>
+              <a:rPr dirty="0"/>
+              <a:t> </a:t>
+            </a:r>
+            <a:r>
+              <a:rPr dirty="0" err="1"/>
+              <a:t>noch</a:t>
+            </a:r>
+            <a:r>
+              <a:rPr dirty="0"/>
+              <a:t> </a:t>
+            </a:r>
+            <a:r>
+              <a:rPr dirty="0" err="1"/>
+              <a:t>offen</a:t>
+            </a:r>
+            <a:endParaRPr dirty="0"/>
           </a:p>
           <a:p>
             <a:pPr>
@@ -6363,8 +6852,38 @@
               </a:defRPr>
             </a:pPr>
             <a:r>
-              <a:t>• Technologie und Produktumfang sind noch nicht bekannt</a:t>
-            </a:r>
+              <a:rPr dirty="0"/>
+              <a:t>• Technologie und </a:t>
+            </a:r>
+            <a:r>
+              <a:rPr dirty="0" err="1"/>
+              <a:t>Produktumfang</a:t>
+            </a:r>
+            <a:r>
+              <a:rPr dirty="0"/>
+              <a:t> </a:t>
+            </a:r>
+            <a:r>
+              <a:rPr dirty="0" err="1"/>
+              <a:t>sind</a:t>
+            </a:r>
+            <a:r>
+              <a:rPr dirty="0"/>
+              <a:t> </a:t>
+            </a:r>
+            <a:r>
+              <a:rPr dirty="0" err="1"/>
+              <a:t>noch</a:t>
+            </a:r>
+            <a:r>
+              <a:rPr dirty="0"/>
+              <a:t> nicht </a:t>
+            </a:r>
+            <a:r>
+              <a:rPr dirty="0" err="1"/>
+              <a:t>bekannt</a:t>
+            </a:r>
+            <a:endParaRPr dirty="0"/>
           </a:p>
           <a:p>
             <a:pPr>
@@ -6376,8 +6895,54 @@
               </a:defRPr>
             </a:pPr>
             <a:r>
-              <a:t>• Daher: Keine vorschnelle Tool-Entscheidung – zuerst Anforderungen und Rahmenbedingungen klären</a:t>
-            </a:r>
+              <a:rPr dirty="0"/>
+              <a:t>• Daher: Keine </a:t>
+            </a:r>
+            <a:r>
+              <a:rPr dirty="0" err="1"/>
+              <a:t>vorschnelle</a:t>
+            </a:r>
+            <a:r>
+              <a:rPr dirty="0"/>
+              <a:t> Tool-</a:t>
+            </a:r>
+            <a:r>
+              <a:rPr dirty="0" err="1"/>
+              <a:t>Entscheidung</a:t>
+            </a:r>
+            <a:r>
+              <a:rPr dirty="0"/>
+              <a:t> – </a:t>
+            </a:r>
+            <a:r>
+              <a:rPr dirty="0" err="1"/>
+              <a:t>zuerst</a:t>
+            </a:r>
+            <a:r>
+              <a:rPr dirty="0"/>
+              <a:t> </a:t>
+            </a:r>
+            <a:r>
+              <a:rPr dirty="0" err="1"/>
+              <a:t>Anforderungen</a:t>
+            </a:r>
+            <a:r>
+              <a:rPr dirty="0"/>
+              <a:t> und </a:t>
+            </a:r>
+            <a:r>
+              <a:rPr dirty="0" err="1"/>
+              <a:t>Rahmenbedingungen</a:t>
+            </a:r>
+            <a:r>
+              <a:rPr dirty="0"/>
+              <a:t> </a:t>
+            </a:r>
+            <a:r>
+              <a:rPr dirty="0" err="1"/>
+              <a:t>klären</a:t>
+            </a:r>
+            <a:endParaRPr dirty="0"/>
           </a:p>
         </p:txBody>
       </p:sp>

--- a/src/test/resources/presale-test-automation-selection-presenttation/Presales_Testautomatisierungswerkzeuge.pptx
+++ b/src/test/resources/presale-test-automation-selection-presenttation/Presales_Testautomatisierungswerkzeuge.pptx
@@ -5,7 +5,7 @@
     <p:sldMasterId id="2147483648" r:id="rId1"/>
   </p:sldMasterIdLst>
   <p:notesMasterIdLst>
-    <p:notesMasterId r:id="rId16"/>
+    <p:notesMasterId r:id="rId15"/>
   </p:notesMasterIdLst>
   <p:sldIdLst>
     <p:sldId id="256" r:id="rId2"/>
@@ -13,15 +13,14 @@
     <p:sldId id="258" r:id="rId4"/>
     <p:sldId id="259" r:id="rId5"/>
     <p:sldId id="260" r:id="rId6"/>
-    <p:sldId id="261" r:id="rId7"/>
-    <p:sldId id="262" r:id="rId8"/>
-    <p:sldId id="263" r:id="rId9"/>
-    <p:sldId id="264" r:id="rId10"/>
-    <p:sldId id="265" r:id="rId11"/>
-    <p:sldId id="266" r:id="rId12"/>
-    <p:sldId id="267" r:id="rId13"/>
-    <p:sldId id="268" r:id="rId14"/>
-    <p:sldId id="269" r:id="rId15"/>
+    <p:sldId id="262" r:id="rId7"/>
+    <p:sldId id="263" r:id="rId8"/>
+    <p:sldId id="264" r:id="rId9"/>
+    <p:sldId id="265" r:id="rId10"/>
+    <p:sldId id="266" r:id="rId11"/>
+    <p:sldId id="267" r:id="rId12"/>
+    <p:sldId id="268" r:id="rId13"/>
+    <p:sldId id="269" r:id="rId14"/>
   </p:sldIdLst>
   <p:sldSz cx="12192000" cy="6858000"/>
   <p:notesSz cx="6858000" cy="9144000"/>
@@ -403,7 +402,7 @@
           <a:lstStyle/>
           <a:p>
             <a:r>
-              <a:t>Sprechtext – ca. 1:30 Min.</a:t>
+              <a:t>Sprechtext – ca. 1:15 Min.</a:t>
             </a:r>
           </a:p>
           <a:p>
@@ -411,7 +410,7 @@
           </a:p>
           <a:p>
             <a:r>
-              <a:t>„Mein konkreter Vorschlag wäre deshalb ein Proof of Concept.</a:t>
+              <a:t>„Nach dem PoC würde ich die Einführung schrittweise durchführen.</a:t>
             </a:r>
           </a:p>
           <a:p>
@@ -419,7 +418,7 @@
           </a:p>
           <a:p>
             <a:r>
-              <a:t>Wir nehmen nicht hundert Testfälle, sondern einen repräsentativen und geschäftskritischen Prozess.</a:t>
+              <a:t>Zuerst definieren wir Architektur und Standards. Dazu gehören beispielsweise Projektstruktur, Naming, Selektoren, Testdaten, Logging und Reporting.</a:t>
             </a:r>
           </a:p>
           <a:p>
@@ -427,7 +426,7 @@
           </a:p>
           <a:p>
             <a:r>
-              <a:t>Diesen Prozess automatisieren wir beispielsweise mit Playwright und vergleichen ihn – wenn relevant – mit einer Alternative.</a:t>
+              <a:t>Danach starten wir mit einem kleinen Pilotumfang.</a:t>
             </a:r>
           </a:p>
           <a:p>
@@ -435,7 +434,7 @@
           </a:p>
           <a:p>
             <a:r>
-              <a:t>Wir schauen dabei nicht nur, ob der Test funktioniert. Wir messen auch Entwicklungsaufwand, Stabilität, Wartbarkeit, Ausführungszeit, CI/CD-Integration und Fehlersuche.</a:t>
+              <a:t>Wenn dieser stabil läuft, integrieren wir die Tests in die CI/CD-Pipeline und erweitern anschließend Schritt für Schritt.</a:t>
             </a:r>
           </a:p>
           <a:p>
@@ -443,15 +442,7 @@
           </a:p>
           <a:p>
             <a:r>
-              <a:t>Am Ende haben wir reale Ergebnisse.</a:t>
-            </a:r>
-          </a:p>
-          <a:p>
-            <a:endParaRPr/>
-          </a:p>
-          <a:p>
-            <a:r>
-              <a:t>Das reduziert das Risiko einer falschen Toolentscheidung erheblich und gibt dem Kunden eine nachvollziehbare Grundlage für die Investitionsentscheidung.“</a:t>
+              <a:t>Ich würde bewusst vermeiden, sofort die gesamte Regression zu automatisieren. Eine schrittweise Einführung reduziert technische und organisatorische Risiken.“</a:t>
             </a:r>
           </a:p>
         </p:txBody>
@@ -521,7 +512,7 @@
           <a:lstStyle/>
           <a:p>
             <a:r>
-              <a:t>Sprechtext – ca. 1:15 Min.</a:t>
+              <a:t>Sprechtext – ca. 1:00 Min.</a:t>
             </a:r>
           </a:p>
           <a:p>
@@ -529,7 +520,7 @@
           </a:p>
           <a:p>
             <a:r>
-              <a:t>„Nach dem PoC würde ich die Einführung schrittweise durchführen.</a:t>
+              <a:t>„Zum Schluss brauchen wir messbare Erfolgskriterien.</a:t>
             </a:r>
           </a:p>
           <a:p>
@@ -537,7 +528,7 @@
           </a:p>
           <a:p>
             <a:r>
-              <a:t>Zuerst definieren wir Architektur und Standards. Dazu gehören beispielsweise Projektstruktur, Naming, Selektoren, Testdaten, Logging und Reporting.</a:t>
+              <a:t>Wir können beispielsweise betrachten, wie stabil die Tests sind, wie schnell Feedback geliefert wird und wie viel manuelle Regression eingespart wird.</a:t>
             </a:r>
           </a:p>
           <a:p>
@@ -545,7 +536,7 @@
           </a:p>
           <a:p>
             <a:r>
-              <a:t>Danach starten wir mit einem kleinen Pilotumfang.</a:t>
+              <a:t>Auch die Fehlersuche ist wichtig. Ein Test, der nur ‚failed‘ meldet, hilft wenig. Gute Logs, Reports und Traces können hier einen großen Unterschied machen.</a:t>
             </a:r>
           </a:p>
           <a:p>
@@ -553,7 +544,7 @@
           </a:p>
           <a:p>
             <a:r>
-              <a:t>Wenn dieser stabil läuft, integrieren wir die Tests in die CI/CD-Pipeline und erweitern anschließend Schritt für Schritt.</a:t>
+              <a:t>Und natürlich müssen wir die Wartungskosten beobachten.</a:t>
             </a:r>
           </a:p>
           <a:p>
@@ -561,7 +552,7 @@
           </a:p>
           <a:p>
             <a:r>
-              <a:t>Ich würde bewusst vermeiden, sofort die gesamte Regression zu automatisieren. Eine schrittweise Einführung reduziert technische und organisatorische Risiken.“</a:t>
+              <a:t>Automatisierung ist für mich dann erfolgreich, wenn sie dauerhaft einen schnelleren und zuverlässigeren Feedback-Prozess ermöglicht.“</a:t>
             </a:r>
           </a:p>
         </p:txBody>
@@ -631,7 +622,7 @@
           <a:lstStyle/>
           <a:p>
             <a:r>
-              <a:t>Sprechtext – ca. 1:00 Min.</a:t>
+              <a:t>Sprechtext – ca. 1:15 Min.</a:t>
             </a:r>
           </a:p>
           <a:p>
@@ -639,7 +630,7 @@
           </a:p>
           <a:p>
             <a:r>
-              <a:t>„Zum Schluss brauchen wir messbare Erfolgskriterien.</a:t>
+              <a:t>„Meine Empfehlung wäre daher zusammengefasst: Wir treffen heute noch keine endgültige Toolentscheidung.</a:t>
             </a:r>
           </a:p>
           <a:p>
@@ -647,7 +638,7 @@
           </a:p>
           <a:p>
             <a:r>
-              <a:t>Wir können beispielsweise betrachten, wie stabil die Tests sind, wie schnell Feedback geliefert wird und wie viel manuelle Regression eingespart wird.</a:t>
+              <a:t>Wir starten mit einer strukturierten Discovery, definieren gemeinsam die Auswahlkriterien und führen anschließend einen kleinen PoC durch.</a:t>
             </a:r>
           </a:p>
           <a:p>
@@ -655,7 +646,7 @@
           </a:p>
           <a:p>
             <a:r>
-              <a:t>Auch die Fehlersuche ist wichtig. Ein Test, der nur ‚failed‘ meldet, hilft wenig. Gute Logs, Reports und Traces können hier einen großen Unterschied machen.</a:t>
+              <a:t>Bei Web würde ich Playwright als starken Kandidaten aufnehmen. Bei APIs beispielsweise REST Assured, abhängig vom Technologie-Stack, und für Mobile Appium.</a:t>
             </a:r>
           </a:p>
           <a:p>
@@ -663,7 +654,7 @@
           </a:p>
           <a:p>
             <a:r>
-              <a:t>Und natürlich müssen wir die Wartungskosten beobachten.</a:t>
+              <a:t>Open Source ist bei einem noch offenen Budget ein sinnvoller Ausgangspunkt, aber wir betrachten die Gesamtbetriebskosten.</a:t>
             </a:r>
           </a:p>
           <a:p>
@@ -671,7 +662,7 @@
           </a:p>
           <a:p>
             <a:r>
-              <a:t>Automatisierung ist für mich dann erfolgreich, wenn sie dauerhaft einen schnelleren und zuverlässigeren Feedback-Prozess ermöglicht.“</a:t>
+              <a:t>Der nächste konkrete Schritt wäre ein Workshop mit Product Owner, QA beziehungsweise Test, Entwicklung und DevOps. Dort können wir die offenen Fragen beantworten und anschließend den PoC definieren.“</a:t>
             </a:r>
           </a:p>
         </p:txBody>
@@ -741,116 +732,6 @@
           <a:lstStyle/>
           <a:p>
             <a:r>
-              <a:t>Sprechtext – ca. 1:15 Min.</a:t>
-            </a:r>
-          </a:p>
-          <a:p>
-            <a:endParaRPr/>
-          </a:p>
-          <a:p>
-            <a:r>
-              <a:t>„Meine Empfehlung wäre daher zusammengefasst: Wir treffen heute noch keine endgültige Toolentscheidung.</a:t>
-            </a:r>
-          </a:p>
-          <a:p>
-            <a:endParaRPr/>
-          </a:p>
-          <a:p>
-            <a:r>
-              <a:t>Wir starten mit einer strukturierten Discovery, definieren gemeinsam die Auswahlkriterien und führen anschließend einen kleinen PoC durch.</a:t>
-            </a:r>
-          </a:p>
-          <a:p>
-            <a:endParaRPr/>
-          </a:p>
-          <a:p>
-            <a:r>
-              <a:t>Bei Web würde ich Playwright als starken Kandidaten aufnehmen. Bei APIs beispielsweise REST Assured, abhängig vom Technologie-Stack, und für Mobile Appium.</a:t>
-            </a:r>
-          </a:p>
-          <a:p>
-            <a:endParaRPr/>
-          </a:p>
-          <a:p>
-            <a:r>
-              <a:t>Open Source ist bei einem noch offenen Budget ein sinnvoller Ausgangspunkt, aber wir betrachten die Gesamtbetriebskosten.</a:t>
-            </a:r>
-          </a:p>
-          <a:p>
-            <a:endParaRPr/>
-          </a:p>
-          <a:p>
-            <a:r>
-              <a:t>Der nächste konkrete Schritt wäre ein Workshop mit Product Owner, QA beziehungsweise Test, Entwicklung und DevOps. Dort können wir die offenen Fragen beantworten und anschließend den PoC definieren.“</a:t>
-            </a:r>
-          </a:p>
-        </p:txBody>
-      </p:sp>
-      <p:sp>
-        <p:nvSpPr>
-          <p:cNvPr id="4" name="Slide Number Placeholder 3"/>
-          <p:cNvSpPr>
-            <a:spLocks noGrp="1"/>
-          </p:cNvSpPr>
-          <p:nvPr>
-            <p:ph type="sldNum" sz="quarter" idx="5"/>
-          </p:nvPr>
-        </p:nvSpPr>
-        <p:spPr/>
-      </p:sp>
-    </p:spTree>
-  </p:cSld>
-  <p:clrMapOvr>
-    <a:masterClrMapping/>
-  </p:clrMapOvr>
-</p:notes>
-</file>
-
-<file path=ppt/notesSlides/notesSlide14.xml><?xml version="1.0" encoding="utf-8"?>
-<p:notes xmlns:a="http://schemas.openxmlformats.org/drawingml/2006/main" xmlns:r="http://schemas.openxmlformats.org/officeDocument/2006/relationships" xmlns:p="http://schemas.openxmlformats.org/presentationml/2006/main">
-  <p:cSld>
-    <p:spTree>
-      <p:nvGrpSpPr>
-        <p:cNvPr id="1" name=""/>
-        <p:cNvGrpSpPr/>
-        <p:nvPr/>
-      </p:nvGrpSpPr>
-      <p:grpSpPr>
-        <a:xfrm>
-          <a:off x="0" y="0"/>
-          <a:ext cx="0" cy="0"/>
-          <a:chOff x="0" y="0"/>
-          <a:chExt cx="0" cy="0"/>
-        </a:xfrm>
-      </p:grpSpPr>
-      <p:sp>
-        <p:nvSpPr>
-          <p:cNvPr id="2" name="Slide Image Placeholder 1"/>
-          <p:cNvSpPr>
-            <a:spLocks noGrp="1" noRot="1" noChangeAspect="1"/>
-          </p:cNvSpPr>
-          <p:nvPr>
-            <p:ph type="sldImg" idx="2"/>
-          </p:nvPr>
-        </p:nvSpPr>
-        <p:spPr/>
-      </p:sp>
-      <p:sp>
-        <p:nvSpPr>
-          <p:cNvPr id="3" name="Notes Placeholder 2"/>
-          <p:cNvSpPr>
-            <a:spLocks noGrp="1"/>
-          </p:cNvSpPr>
-          <p:nvPr>
-            <p:ph type="body" sz="quarter" idx="3"/>
-          </p:nvPr>
-        </p:nvSpPr>
-        <p:spPr/>
-        <p:txBody>
-          <a:bodyPr/>
-          <a:lstStyle/>
-          <a:p>
-            <a:r>
               <a:t>Sprechtext – ca. 1:00 Min.</a:t>
             </a:r>
           </a:p>
@@ -1441,7 +1322,7 @@
           <a:lstStyle/>
           <a:p>
             <a:r>
-              <a:t>Sprechtext – ca. 1:15 Min.</a:t>
+              <a:t>Sprechtext – ca. 1:20 Min.</a:t>
             </a:r>
           </a:p>
           <a:p>
@@ -1449,7 +1330,7 @@
           </a:p>
           <a:p>
             <a:r>
-              <a:t>„Wenn ich heute – bei noch unvollständigen Informationen – einen Kandidaten für Webautomatisierung auswählen müsste, würde ich Playwright in den Proof of Concept aufnehmen.</a:t>
+              <a:t>„Ein weiterer Punkt meiner ursprünglichen Lösung war BDD beziehungsweise Cucumber.</a:t>
             </a:r>
           </a:p>
           <a:p>
@@ -1457,7 +1338,7 @@
           </a:p>
           <a:p>
             <a:r>
-              <a:t>Warum? Es bietet eine moderne Entwicklungsumgebung, unterstützt mehrere Browser und lässt sich gut in CI/CD integrieren. Auch Funktionen für Tracing und Debugging können bei der Fehlersuche sehr hilfreich sein.</a:t>
+              <a:t>BDD kann sehr sinnvoll sein, wenn Business, Product Owner, Tester und Entwickler gemeinsam an fachlichen Szenarien arbeiten sollen.</a:t>
             </a:r>
           </a:p>
           <a:p>
@@ -1465,7 +1346,7 @@
           </a:p>
           <a:p>
             <a:r>
-              <a:t>Außerdem halte ich die Einstiegshürde für ein gemischtes Team aus Testern und Entwicklern für relativ niedrig.</a:t>
+              <a:t>Der große Vorteil ist die gemeinsame Sprache. Ein Szenario kann beispielsweise fachlich formuliert werden, sodass auch ein Product Owner verstehen kann, was getestet wird.</a:t>
             </a:r>
           </a:p>
           <a:p>
@@ -1473,7 +1354,15 @@
           </a:p>
           <a:p>
             <a:r>
-              <a:t>Aber wichtig: Das ist noch keine endgültige Empfehlung. Ich würde Playwright im PoC gegen die relevanten Alternativen vergleichen. So können wir die Entscheidung mit echten Ergebnissen begründen.“</a:t>
+              <a:t>Aber BDD ist nicht automatisch die beste Lösung für jedes Projekt. Es bringt eine zusätzliche Abstraktionsschicht und damit auch Pflegeaufwand mit sich.</a:t>
+            </a:r>
+          </a:p>
+          <a:p>
+            <a:endParaRPr/>
+          </a:p>
+          <a:p>
+            <a:r>
+              <a:t>Meine Empfehlung wäre deshalb: BDD einsetzen, wenn es tatsächlich die Kommunikation und Zusammenarbeit verbessert – nicht einfach, weil Cucumber ein bekanntes Tool ist.“</a:t>
             </a:r>
           </a:p>
         </p:txBody>
@@ -1543,7 +1432,7 @@
           <a:lstStyle/>
           <a:p>
             <a:r>
-              <a:t>Sprechtext – ca. 1:20 Min.</a:t>
+              <a:t>Sprechtext – ca. 1:15 Min.</a:t>
             </a:r>
           </a:p>
           <a:p>
@@ -1551,7 +1440,7 @@
           </a:p>
           <a:p>
             <a:r>
-              <a:t>„Ein weiterer Punkt meiner ursprünglichen Lösung war BDD beziehungsweise Cucumber.</a:t>
+              <a:t>„Da wir heute noch nicht wissen, wer die Automatisierung übernimmt, würde ich diese Frage sehr früh klären.</a:t>
             </a:r>
           </a:p>
           <a:p>
@@ -1559,7 +1448,7 @@
           </a:p>
           <a:p>
             <a:r>
-              <a:t>BDD kann sehr sinnvoll sein, wenn Business, Product Owner, Tester und Entwickler gemeinsam an fachlichen Szenarien arbeiten sollen.</a:t>
+              <a:t>Ein Test Engineer kann beispielsweise Testdesign und Automatisierung verantworten. Entwickler können bei Testbarkeit und technischer Architektur unterstützen. Der Product Owner liefert fachliche Prioritäten und Akzeptanzkriterien. DevOps unterstützt bei CI/CD und Infrastruktur.</a:t>
             </a:r>
           </a:p>
           <a:p>
@@ -1567,7 +1456,7 @@
           </a:p>
           <a:p>
             <a:r>
-              <a:t>Der große Vorteil ist die gemeinsame Sprache. Ein Szenario kann beispielsweise fachlich formuliert werden, sodass auch ein Product Owner verstehen kann, was getestet wird.</a:t>
+              <a:t>Ich würde deshalb ein kleines verantwortliches Kernteam definieren.</a:t>
             </a:r>
           </a:p>
           <a:p>
@@ -1575,7 +1464,7 @@
           </a:p>
           <a:p>
             <a:r>
-              <a:t>Aber BDD ist nicht automatisch die beste Lösung für jedes Projekt. Es bringt eine zusätzliche Abstraktionsschicht und damit auch Pflegeaufwand mit sich.</a:t>
+              <a:t>Das ist wichtig, weil Testautomatisierung kein einmaliges Projekt ist. Tests müssen gepflegt, analysiert und bei Änderungen am Produkt angepasst werden.</a:t>
             </a:r>
           </a:p>
           <a:p>
@@ -1583,7 +1472,7 @@
           </a:p>
           <a:p>
             <a:r>
-              <a:t>Meine Empfehlung wäre deshalb: BDD einsetzen, wenn es tatsächlich die Kommunikation und Zusammenarbeit verbessert – nicht einfach, weil Cucumber ein bekanntes Tool ist.“</a:t>
+              <a:t>Die Ownership muss daher von Anfang an klar sein.“</a:t>
             </a:r>
           </a:p>
         </p:txBody>
@@ -1661,7 +1550,7 @@
           </a:p>
           <a:p>
             <a:r>
-              <a:t>„Da wir heute noch nicht wissen, wer die Automatisierung übernimmt, würde ich diese Frage sehr früh klären.</a:t>
+              <a:t>„Beim Budget möchte ich eine häufige Fehlannahme vermeiden: Open Source bedeutet nicht automatisch kostenlos.</a:t>
             </a:r>
           </a:p>
           <a:p>
@@ -1669,7 +1558,7 @@
           </a:p>
           <a:p>
             <a:r>
-              <a:t>Ein Test Engineer kann beispielsweise Testdesign und Automatisierung verantworten. Entwickler können bei Testbarkeit und technischer Architektur unterstützen. Der Product Owner liefert fachliche Prioritäten und Akzeptanzkriterien. DevOps unterstützt bei CI/CD und Infrastruktur.</a:t>
+              <a:t>Natürlich können wir mit Open-Source-Tools Lizenzkosten vermeiden. Aber es entstehen trotzdem Kosten für Entwicklung, Schulung, Infrastruktur, CI/CD, Testdaten, Geräte und Wartung.</a:t>
             </a:r>
           </a:p>
           <a:p>
@@ -1677,7 +1566,7 @@
           </a:p>
           <a:p>
             <a:r>
-              <a:t>Ich würde deshalb ein kleines verantwortliches Kernteam definieren.</a:t>
+              <a:t>Deshalb würde ich dem Kunden eine TCO-Betrachtung empfehlen – also Total Cost of Ownership.</a:t>
             </a:r>
           </a:p>
           <a:p>
@@ -1685,7 +1574,7 @@
           </a:p>
           <a:p>
             <a:r>
-              <a:t>Das ist wichtig, weil Testautomatisierung kein einmaliges Projekt ist. Tests müssen gepflegt, analysiert und bei Änderungen am Produkt angepasst werden.</a:t>
+              <a:t>Ein kommerzielles Werkzeug kann trotz Lizenzkosten wirtschaftlich sein, wenn beispielsweise Support, Reporting oder Administration deutlich einfacher sind.</a:t>
             </a:r>
           </a:p>
           <a:p>
@@ -1693,7 +1582,7 @@
           </a:p>
           <a:p>
             <a:r>
-              <a:t>Die Ownership muss daher von Anfang an klar sein.“</a:t>
+              <a:t>Die Frage sollte also nicht sein: Was kostet das Tool? Sondern: Was kostet die gesamte Lösung und welchen Nutzen erhalten wir dafür?“</a:t>
             </a:r>
           </a:p>
         </p:txBody>
@@ -1763,7 +1652,7 @@
           <a:lstStyle/>
           <a:p>
             <a:r>
-              <a:t>Sprechtext – ca. 1:15 Min.</a:t>
+              <a:t>Sprechtext – ca. 1:30 Min.</a:t>
             </a:r>
           </a:p>
           <a:p>
@@ -1771,7 +1660,7 @@
           </a:p>
           <a:p>
             <a:r>
-              <a:t>„Beim Budget möchte ich eine häufige Fehlannahme vermeiden: Open Source bedeutet nicht automatisch kostenlos.</a:t>
+              <a:t>„Mein konkreter Vorschlag wäre deshalb ein Proof of Concept.</a:t>
             </a:r>
           </a:p>
           <a:p>
@@ -1779,7 +1668,7 @@
           </a:p>
           <a:p>
             <a:r>
-              <a:t>Natürlich können wir mit Open-Source-Tools Lizenzkosten vermeiden. Aber es entstehen trotzdem Kosten für Entwicklung, Schulung, Infrastruktur, CI/CD, Testdaten, Geräte und Wartung.</a:t>
+              <a:t>Wir nehmen nicht hundert Testfälle, sondern einen repräsentativen und geschäftskritischen Prozess.</a:t>
             </a:r>
           </a:p>
           <a:p>
@@ -1787,7 +1676,7 @@
           </a:p>
           <a:p>
             <a:r>
-              <a:t>Deshalb würde ich dem Kunden eine TCO-Betrachtung empfehlen – also Total Cost of Ownership.</a:t>
+              <a:t>Diesen Prozess automatisieren wir beispielsweise mit Playwright und vergleichen ihn – wenn relevant – mit einer Alternative.</a:t>
             </a:r>
           </a:p>
           <a:p>
@@ -1795,7 +1684,7 @@
           </a:p>
           <a:p>
             <a:r>
-              <a:t>Ein kommerzielles Werkzeug kann trotz Lizenzkosten wirtschaftlich sein, wenn beispielsweise Support, Reporting oder Administration deutlich einfacher sind.</a:t>
+              <a:t>Wir schauen dabei nicht nur, ob der Test funktioniert. Wir messen auch Entwicklungsaufwand, Stabilität, Wartbarkeit, Ausführungszeit, CI/CD-Integration und Fehlersuche.</a:t>
             </a:r>
           </a:p>
           <a:p>
@@ -1803,7 +1692,15 @@
           </a:p>
           <a:p>
             <a:r>
-              <a:t>Die Frage sollte also nicht sein: Was kostet das Tool? Sondern: Was kostet die gesamte Lösung und welchen Nutzen erhalten wir dafür?“</a:t>
+              <a:t>Am Ende haben wir reale Ergebnisse.</a:t>
+            </a:r>
+          </a:p>
+          <a:p>
+            <a:endParaRPr/>
+          </a:p>
+          <a:p>
+            <a:r>
+              <a:t>Das reduziert das Risiko einer falschen Toolentscheidung erheblich und gibt dem Kunden eine nachvollziehbare Grundlage für die Investitionsentscheidung.“</a:t>
             </a:r>
           </a:p>
         </p:txBody>
@@ -5152,7 +5049,7 @@
               </a:defRPr>
             </a:pPr>
             <a:r>
-              <a:t>9. Mein Vorschlag: Proof of Concept</a:t>
+              <a:t>10. Zielbild der Einführung</a:t>
             </a:r>
           </a:p>
         </p:txBody>
@@ -5232,7 +5129,7 @@
               </a:defRPr>
             </a:pPr>
             <a:r>
-              <a:t>• 1. Einen kritischen Business-Prozess auswählen</a:t>
+              <a:t>• Phase 1: Discovery &amp; Tool-Kriterien</a:t>
             </a:r>
           </a:p>
           <a:p>
@@ -5245,7 +5142,7 @@
               </a:defRPr>
             </a:pPr>
             <a:r>
-              <a:t>• 2. Einen API-Test und/oder einen repräsentativen UI-Test automatisieren</a:t>
+              <a:t>• Phase 2: Proof of Concept</a:t>
             </a:r>
           </a:p>
           <a:p>
@@ -5258,7 +5155,7 @@
               </a:defRPr>
             </a:pPr>
             <a:r>
-              <a:t>• 3. Playwright/Selenium bzw. REST-Assured/Appium gegen Alternativen bewerten</a:t>
+              <a:t>• Phase 3: Testautomatisierungs-Architektur und Coding Standards</a:t>
             </a:r>
           </a:p>
           <a:p>
@@ -5271,7 +5168,7 @@
               </a:defRPr>
             </a:pPr>
             <a:r>
-              <a:t>• 4. CI/CD-Ausführung, Reporting und Wartbarkeit testen</a:t>
+              <a:t>• Phase 4: Pilot mit wenigen kritischen Tests</a:t>
             </a:r>
           </a:p>
           <a:p>
@@ -5284,7 +5181,7 @@
               </a:defRPr>
             </a:pPr>
             <a:r>
-              <a:t>• 5. Aufwand, Stabilität und Nutzen messen</a:t>
+              <a:t>• Phase 5: Integration in CI/CD und Reporting</a:t>
             </a:r>
           </a:p>
           <a:p>
@@ -5297,7 +5194,7 @@
               </a:defRPr>
             </a:pPr>
             <a:r>
-              <a:t>• Ergebnis: belastbare Entscheidung statt Tool-Auswahl auf Basis von Marketing oder Bauchgefühl</a:t>
+              <a:t>• Phase 6: Skalierung, Monitoring und kontinuierliche Wartung</a:t>
             </a:r>
           </a:p>
         </p:txBody>
@@ -5328,7 +5225,7 @@
               <a:defRPr sz="900"/>
             </a:pPr>
             <a:r>
-              <a:t>10</a:t>
+              <a:t>11</a:t>
             </a:r>
           </a:p>
         </p:txBody>
@@ -5394,7 +5291,7 @@
               </a:defRPr>
             </a:pPr>
             <a:r>
-              <a:t>10. Zielbild der Einführung</a:t>
+              <a:t>11. Erfolgskriterien</a:t>
             </a:r>
           </a:p>
         </p:txBody>
@@ -5474,7 +5371,7 @@
               </a:defRPr>
             </a:pPr>
             <a:r>
-              <a:t>• Phase 1: Discovery &amp; Tool-Kriterien</a:t>
+              <a:t>• Hohe Stabilität der automatisierten Tests</a:t>
             </a:r>
           </a:p>
           <a:p>
@@ -5487,7 +5384,7 @@
               </a:defRPr>
             </a:pPr>
             <a:r>
-              <a:t>• Phase 2: Proof of Concept</a:t>
+              <a:t>• Kurze Feedback-Zeit für Entwickler und Fachbereiche</a:t>
             </a:r>
           </a:p>
           <a:p>
@@ -5500,7 +5397,7 @@
               </a:defRPr>
             </a:pPr>
             <a:r>
-              <a:t>• Phase 3: Testautomatisierungs-Architektur und Coding Standards</a:t>
+              <a:t>• Weniger manuelle Regression bei wiederholbaren Szenarien</a:t>
             </a:r>
           </a:p>
           <a:p>
@@ -5513,7 +5410,7 @@
               </a:defRPr>
             </a:pPr>
             <a:r>
-              <a:t>• Phase 4: Pilot mit wenigen kritischen Tests</a:t>
+              <a:t>• Gute Fehlersuche durch Logs, Screenshots/Traces und Reports</a:t>
             </a:r>
           </a:p>
           <a:p>
@@ -5526,7 +5423,7 @@
               </a:defRPr>
             </a:pPr>
             <a:r>
-              <a:t>• Phase 5: Integration in CI/CD und Reporting</a:t>
+              <a:t>• Nachvollziehbare Wartungskosten</a:t>
             </a:r>
           </a:p>
           <a:p>
@@ -5539,7 +5436,7 @@
               </a:defRPr>
             </a:pPr>
             <a:r>
-              <a:t>• Phase 6: Skalierung, Monitoring und kontinuierliche Wartung</a:t>
+              <a:t>• Automatisierung als Bestandteil des Entwicklungsprozesses – nicht als separates Nebenprojekt</a:t>
             </a:r>
           </a:p>
         </p:txBody>
@@ -5570,7 +5467,7 @@
               <a:defRPr sz="900"/>
             </a:pPr>
             <a:r>
-              <a:t>11</a:t>
+              <a:t>12</a:t>
             </a:r>
           </a:p>
         </p:txBody>
@@ -5636,7 +5533,7 @@
               </a:defRPr>
             </a:pPr>
             <a:r>
-              <a:t>11. Erfolgskriterien</a:t>
+              <a:t>12. Empfehlung &amp; nächste Schritte</a:t>
             </a:r>
           </a:p>
         </p:txBody>
@@ -5716,7 +5613,7 @@
               </a:defRPr>
             </a:pPr>
             <a:r>
-              <a:t>• Hohe Stabilität der automatisierten Tests</a:t>
+              <a:t>• Noch keine finale Tool-Entscheidung ohne Discovery</a:t>
             </a:r>
           </a:p>
           <a:p>
@@ -5729,7 +5626,7 @@
               </a:defRPr>
             </a:pPr>
             <a:r>
-              <a:t>• Kurze Feedback-Zeit für Entwickler und Fachbereiche</a:t>
+              <a:t>• Open-Source-first ist bei offenem Budget ein sinnvoller Ausgangspunkt</a:t>
             </a:r>
           </a:p>
           <a:p>
@@ -5742,7 +5639,7 @@
               </a:defRPr>
             </a:pPr>
             <a:r>
-              <a:t>• Weniger manuelle Regression bei wiederholbaren Szenarien</a:t>
+              <a:t>• Playwright würde ich für Web als starken Kandidaten in den PoC nehmen</a:t>
             </a:r>
           </a:p>
           <a:p>
@@ -5755,7 +5652,7 @@
               </a:defRPr>
             </a:pPr>
             <a:r>
-              <a:t>• Gute Fehlersuche durch Logs, Screenshots/Traces und Reports</a:t>
+              <a:t>• API: REST Assured bzw. Playwright/API-Funktionen abhängig vom Technologie-Stack</a:t>
             </a:r>
           </a:p>
           <a:p>
@@ -5768,7 +5665,7 @@
               </a:defRPr>
             </a:pPr>
             <a:r>
-              <a:t>• Nachvollziehbare Wartungskosten</a:t>
+              <a:t>• Mobile: Appium als Kandidat</a:t>
             </a:r>
           </a:p>
           <a:p>
@@ -5781,7 +5678,7 @@
               </a:defRPr>
             </a:pPr>
             <a:r>
-              <a:t>• Automatisierung als Bestandteil des Entwicklungsprozesses – nicht als separates Nebenprojekt</a:t>
+              <a:t>• Nächster Schritt: Workshop mit Produkt-, QA-, Entwicklungs- und DevOps-Verantwortlichen + PoC</a:t>
             </a:r>
           </a:p>
         </p:txBody>
@@ -5812,7 +5709,7 @@
               <a:defRPr sz="900"/>
             </a:pPr>
             <a:r>
-              <a:t>12</a:t>
+              <a:t>13</a:t>
             </a:r>
           </a:p>
         </p:txBody>
@@ -5878,248 +5775,6 @@
               </a:defRPr>
             </a:pPr>
             <a:r>
-              <a:t>12. Empfehlung &amp; nächste Schritte</a:t>
-            </a:r>
-          </a:p>
-        </p:txBody>
-      </p:sp>
-      <p:sp>
-        <p:nvSpPr>
-          <p:cNvPr id="3" name="Rectangle 2"/>
-          <p:cNvSpPr/>
-          <p:nvPr/>
-        </p:nvSpPr>
-        <p:spPr>
-          <a:xfrm>
-            <a:off x="640080" y="1170432"/>
-            <a:ext cx="914400" cy="73152"/>
-          </a:xfrm>
-          <a:prstGeom prst="rect">
-            <a:avLst/>
-          </a:prstGeom>
-          <a:solidFill>
-            <a:srgbClr val="1F4E79"/>
-          </a:solidFill>
-          <a:ln>
-            <a:noFill/>
-          </a:ln>
-        </p:spPr>
-        <p:style>
-          <a:lnRef idx="1">
-            <a:schemeClr val="accent1"/>
-          </a:lnRef>
-          <a:fillRef idx="3">
-            <a:schemeClr val="accent1"/>
-          </a:fillRef>
-          <a:effectRef idx="2">
-            <a:schemeClr val="accent1"/>
-          </a:effectRef>
-          <a:fontRef idx="minor">
-            <a:schemeClr val="lt1"/>
-          </a:fontRef>
-        </p:style>
-        <p:txBody>
-          <a:bodyPr rtlCol="0" anchor="ctr"/>
-          <a:lstStyle/>
-          <a:p>
-            <a:pPr algn="ctr"/>
-            <a:endParaRPr/>
-          </a:p>
-        </p:txBody>
-      </p:sp>
-      <p:sp>
-        <p:nvSpPr>
-          <p:cNvPr id="4" name="TextBox 3"/>
-          <p:cNvSpPr txBox="1"/>
-          <p:nvPr/>
-        </p:nvSpPr>
-        <p:spPr>
-          <a:xfrm>
-            <a:off x="822960" y="1508760"/>
-            <a:ext cx="10515600" cy="4754880"/>
-          </a:xfrm>
-          <a:prstGeom prst="rect">
-            <a:avLst/>
-          </a:prstGeom>
-          <a:noFill/>
-        </p:spPr>
-        <p:txBody>
-          <a:bodyPr wrap="square">
-            <a:spAutoFit/>
-          </a:bodyPr>
-          <a:lstStyle/>
-          <a:p>
-            <a:pPr>
-              <a:spcAft>
-                <a:spcPts val="1200"/>
-              </a:spcAft>
-              <a:defRPr sz="1900">
-                <a:latin typeface="Aptos"/>
-              </a:defRPr>
-            </a:pPr>
-            <a:r>
-              <a:t>• Noch keine finale Tool-Entscheidung ohne Discovery</a:t>
-            </a:r>
-          </a:p>
-          <a:p>
-            <a:pPr>
-              <a:spcAft>
-                <a:spcPts val="1200"/>
-              </a:spcAft>
-              <a:defRPr sz="1900">
-                <a:latin typeface="Aptos"/>
-              </a:defRPr>
-            </a:pPr>
-            <a:r>
-              <a:t>• Open-Source-first ist bei offenem Budget ein sinnvoller Ausgangspunkt</a:t>
-            </a:r>
-          </a:p>
-          <a:p>
-            <a:pPr>
-              <a:spcAft>
-                <a:spcPts val="1200"/>
-              </a:spcAft>
-              <a:defRPr sz="1900">
-                <a:latin typeface="Aptos"/>
-              </a:defRPr>
-            </a:pPr>
-            <a:r>
-              <a:t>• Playwright würde ich für Web als starken Kandidaten in den PoC nehmen</a:t>
-            </a:r>
-          </a:p>
-          <a:p>
-            <a:pPr>
-              <a:spcAft>
-                <a:spcPts val="1200"/>
-              </a:spcAft>
-              <a:defRPr sz="1900">
-                <a:latin typeface="Aptos"/>
-              </a:defRPr>
-            </a:pPr>
-            <a:r>
-              <a:t>• API: REST Assured bzw. Playwright/API-Funktionen abhängig vom Technologie-Stack</a:t>
-            </a:r>
-          </a:p>
-          <a:p>
-            <a:pPr>
-              <a:spcAft>
-                <a:spcPts val="1200"/>
-              </a:spcAft>
-              <a:defRPr sz="1900">
-                <a:latin typeface="Aptos"/>
-              </a:defRPr>
-            </a:pPr>
-            <a:r>
-              <a:t>• Mobile: Appium als Kandidat</a:t>
-            </a:r>
-          </a:p>
-          <a:p>
-            <a:pPr>
-              <a:spcAft>
-                <a:spcPts val="1200"/>
-              </a:spcAft>
-              <a:defRPr sz="1900">
-                <a:latin typeface="Aptos"/>
-              </a:defRPr>
-            </a:pPr>
-            <a:r>
-              <a:t>• Nächster Schritt: Workshop mit Produkt-, QA-, Entwicklungs- und DevOps-Verantwortlichen + PoC</a:t>
-            </a:r>
-          </a:p>
-        </p:txBody>
-      </p:sp>
-      <p:sp>
-        <p:nvSpPr>
-          <p:cNvPr id="5" name="TextBox 4"/>
-          <p:cNvSpPr txBox="1"/>
-          <p:nvPr/>
-        </p:nvSpPr>
-        <p:spPr>
-          <a:xfrm>
-            <a:off x="9875520" y="6446520"/>
-            <a:ext cx="1554480" cy="228600"/>
-          </a:xfrm>
-          <a:prstGeom prst="rect">
-            <a:avLst/>
-          </a:prstGeom>
-          <a:noFill/>
-        </p:spPr>
-        <p:txBody>
-          <a:bodyPr wrap="none">
-            <a:spAutoFit/>
-          </a:bodyPr>
-          <a:lstStyle/>
-          <a:p>
-            <a:pPr algn="r">
-              <a:defRPr sz="900"/>
-            </a:pPr>
-            <a:r>
-              <a:t>13</a:t>
-            </a:r>
-          </a:p>
-        </p:txBody>
-      </p:sp>
-    </p:spTree>
-  </p:cSld>
-  <p:clrMapOvr>
-    <a:masterClrMapping/>
-  </p:clrMapOvr>
-</p:sld>
-</file>
-
-<file path=ppt/slides/slide14.xml><?xml version="1.0" encoding="utf-8"?>
-<p:sld xmlns:a="http://schemas.openxmlformats.org/drawingml/2006/main" xmlns:r="http://schemas.openxmlformats.org/officeDocument/2006/relationships" xmlns:p="http://schemas.openxmlformats.org/presentationml/2006/main">
-  <p:cSld>
-    <p:bg>
-      <p:bgPr>
-        <a:solidFill>
-          <a:srgbClr val="F8F9FB"/>
-        </a:solidFill>
-        <a:effectLst/>
-      </p:bgPr>
-    </p:bg>
-    <p:spTree>
-      <p:nvGrpSpPr>
-        <p:cNvPr id="1" name=""/>
-        <p:cNvGrpSpPr/>
-        <p:nvPr/>
-      </p:nvGrpSpPr>
-      <p:grpSpPr>
-        <a:xfrm>
-          <a:off x="0" y="0"/>
-          <a:ext cx="0" cy="0"/>
-          <a:chOff x="0" y="0"/>
-          <a:chExt cx="0" cy="0"/>
-        </a:xfrm>
-      </p:grpSpPr>
-      <p:sp>
-        <p:nvSpPr>
-          <p:cNvPr id="2" name="TextBox 1"/>
-          <p:cNvSpPr txBox="1"/>
-          <p:nvPr/>
-        </p:nvSpPr>
-        <p:spPr>
-          <a:xfrm>
-            <a:off x="640080" y="411480"/>
-            <a:ext cx="10881360" cy="731520"/>
-          </a:xfrm>
-          <a:prstGeom prst="rect">
-            <a:avLst/>
-          </a:prstGeom>
-          <a:noFill/>
-        </p:spPr>
-        <p:txBody>
-          <a:bodyPr wrap="none">
-            <a:spAutoFit/>
-          </a:bodyPr>
-          <a:lstStyle/>
-          <a:p>
-            <a:pPr>
-              <a:defRPr sz="2700" b="1">
-                <a:latin typeface="Aptos Display"/>
-              </a:defRPr>
-            </a:pPr>
-            <a:r>
               <a:t>Fragen an den Kunden</a:t>
             </a:r>
           </a:p>
@@ -7580,24 +7235,32 @@
               <a:t>: </a:t>
             </a:r>
             <a:r>
-              <a:rPr dirty="0" err="1"/>
-              <a:t>Unterstützte</a:t>
+              <a:rPr lang="de-DE" dirty="0"/>
+              <a:t>Welche Technologie wird unterstützt (</a:t>
+            </a:r>
+            <a:r>
+              <a:rPr dirty="0"/>
+              <a:t>Browser</a:t>
+            </a:r>
+            <a:r>
+              <a:rPr lang="de-DE" dirty="0"/>
+              <a:t> Apps</a:t>
+            </a:r>
+            <a:r>
+              <a:rPr dirty="0"/>
+              <a:t>, APIs</a:t>
+            </a:r>
+            <a:r>
+              <a:rPr lang="de-DE" dirty="0"/>
+              <a:t>,</a:t>
             </a:r>
             <a:r>
               <a:rPr dirty="0"/>
               <a:t> </a:t>
             </a:r>
             <a:r>
-              <a:rPr dirty="0" err="1"/>
-              <a:t>Plattformen</a:t>
-            </a:r>
-            <a:r>
-              <a:rPr dirty="0"/>
-              <a:t>, Browser, APIs und </a:t>
-            </a:r>
-            <a:r>
               <a:rPr lang="en-GB" dirty="0"/>
-              <a:t>Backend</a:t>
+              <a:t>Backend, Mobile)</a:t>
             </a:r>
           </a:p>
           <a:p>
@@ -7775,14 +7438,6 @@
             <a:r>
               <a:rPr dirty="0" err="1"/>
               <a:t>Lizenz</a:t>
-            </a:r>
-            <a:r>
-              <a:rPr dirty="0"/>
-              <a:t>, </a:t>
-            </a:r>
-            <a:r>
-              <a:rPr dirty="0" err="1"/>
-              <a:t>Infrastruktur</a:t>
             </a:r>
             <a:r>
               <a:rPr dirty="0"/>
@@ -8303,7 +7958,7 @@
               </a:defRPr>
             </a:pPr>
             <a:r>
-              <a:t>5. Warum ich Playwright als Kandidaten prüfen würde</a:t>
+              <a:t>6. BDD / Cucumber – sinnvoll, aber nicht automatisch</a:t>
             </a:r>
           </a:p>
         </p:txBody>
@@ -8383,7 +8038,7 @@
               </a:defRPr>
             </a:pPr>
             <a:r>
-              <a:t>• Modernes Framework für Web-E2E mit guter Developer Experience</a:t>
+              <a:t>• Vorteil: Gemeinsame Sprache zwischen Business, Product Owner, Test und Entwicklung</a:t>
             </a:r>
           </a:p>
           <a:p>
@@ -8396,7 +8051,7 @@
               </a:defRPr>
             </a:pPr>
             <a:r>
-              <a:t>• Geeignet für mehrere Browser und parallele Ausführung</a:t>
+              <a:t>• Szenarien können fachlich verständlich formuliert werden</a:t>
             </a:r>
           </a:p>
           <a:p>
@@ -8409,7 +8064,7 @@
               </a:defRPr>
             </a:pPr>
             <a:r>
-              <a:t>• Trace-/Debugging-Funktionen erleichtern Analyse von Fehlern</a:t>
+              <a:t>• Besonders sinnvoll bei komplexen Geschäftsregeln und vielen Stakeholdern</a:t>
             </a:r>
           </a:p>
           <a:p>
@@ -8422,7 +8077,7 @@
               </a:defRPr>
             </a:pPr>
             <a:r>
-              <a:t>• Gut in CI/CD integrierbar</a:t>
+              <a:t>• Risiko: Zusätzliche Abstraktionsschicht und Pflegeaufwand</a:t>
             </a:r>
           </a:p>
           <a:p>
@@ -8435,20 +8090,7 @@
               </a:defRPr>
             </a:pPr>
             <a:r>
-              <a:t>• Testcode kann für unterschiedliche Erfahrungsstufen relativ zugänglich sein</a:t>
-            </a:r>
-          </a:p>
-          <a:p>
-            <a:pPr>
-              <a:spcAft>
-                <a:spcPts val="1200"/>
-              </a:spcAft>
-              <a:defRPr sz="1900">
-                <a:latin typeface="Aptos"/>
-              </a:defRPr>
-            </a:pPr>
-            <a:r>
-              <a:t>• Aber: Empfehlung erst nach Discovery und einem kleinen Proof of Concept</a:t>
+              <a:t>• Entscheidung nach Bedarf: BDD nutzen, wenn es die Kommunikation verbessert – nicht nur als Testautomatisierungsstandard</a:t>
             </a:r>
           </a:p>
         </p:txBody>
@@ -8479,7 +8121,7 @@
               <a:defRPr sz="900"/>
             </a:pPr>
             <a:r>
-              <a:t>06</a:t>
+              <a:t>07</a:t>
             </a:r>
           </a:p>
         </p:txBody>
@@ -8545,7 +8187,7 @@
               </a:defRPr>
             </a:pPr>
             <a:r>
-              <a:t>6. BDD / Cucumber – sinnvoll, aber nicht automatisch</a:t>
+              <a:t>7. Wer automatisiert? Rollen und Verantwortlichkeiten</a:t>
             </a:r>
           </a:p>
         </p:txBody>
@@ -8603,7 +8245,7 @@
         <p:spPr>
           <a:xfrm>
             <a:off x="822960" y="1508760"/>
-            <a:ext cx="10515600" cy="4754880"/>
+            <a:ext cx="10515600" cy="2169825"/>
           </a:xfrm>
           <a:prstGeom prst="rect">
             <a:avLst/>
@@ -8625,8 +8267,38 @@
               </a:defRPr>
             </a:pPr>
             <a:r>
-              <a:t>• Vorteil: Gemeinsame Sprache zwischen Business, Product Owner, Test und Entwicklung</a:t>
-            </a:r>
+              <a:rPr dirty="0"/>
+              <a:t>• Test Engineer / QA: </a:t>
+            </a:r>
+            <a:r>
+              <a:rPr dirty="0" err="1"/>
+              <a:t>Testdesign</a:t>
+            </a:r>
+            <a:r>
+              <a:rPr dirty="0"/>
+              <a:t>, </a:t>
+            </a:r>
+            <a:r>
+              <a:rPr dirty="0" err="1"/>
+              <a:t>Automatisierung</a:t>
+            </a:r>
+            <a:r>
+              <a:rPr dirty="0"/>
+              <a:t>, </a:t>
+            </a:r>
+            <a:r>
+              <a:rPr dirty="0" err="1"/>
+              <a:t>Wartung</a:t>
+            </a:r>
+            <a:r>
+              <a:rPr dirty="0"/>
+              <a:t> und </a:t>
+            </a:r>
+            <a:r>
+              <a:rPr dirty="0" err="1"/>
+              <a:t>Analyse</a:t>
+            </a:r>
+            <a:endParaRPr dirty="0"/>
           </a:p>
           <a:p>
             <a:pPr>
@@ -8638,8 +8310,46 @@
               </a:defRPr>
             </a:pPr>
             <a:r>
-              <a:t>• Szenarien können fachlich verständlich formuliert werden</a:t>
-            </a:r>
+              <a:rPr dirty="0"/>
+              <a:t>• </a:t>
+            </a:r>
+            <a:r>
+              <a:rPr lang="de-DE" dirty="0"/>
+              <a:t>Developer / QA</a:t>
+            </a:r>
+            <a:r>
+              <a:rPr dirty="0"/>
+              <a:t>: </a:t>
+            </a:r>
+            <a:r>
+              <a:rPr dirty="0" err="1"/>
+              <a:t>Unterstützung</a:t>
+            </a:r>
+            <a:r>
+              <a:rPr dirty="0"/>
+              <a:t> </a:t>
+            </a:r>
+            <a:r>
+              <a:rPr dirty="0" err="1"/>
+              <a:t>bei</a:t>
+            </a:r>
+            <a:r>
+              <a:rPr dirty="0"/>
+              <a:t> </a:t>
+            </a:r>
+            <a:r>
+              <a:rPr dirty="0" err="1"/>
+              <a:t>Architektur</a:t>
+            </a:r>
+            <a:r>
+              <a:rPr dirty="0"/>
+              <a:t>, </a:t>
+            </a:r>
+            <a:r>
+              <a:rPr dirty="0" err="1"/>
+              <a:t>Codequalität</a:t>
+            </a:r>
+            <a:endParaRPr dirty="0"/>
           </a:p>
           <a:p>
             <a:pPr>
@@ -8651,8 +8361,30 @@
               </a:defRPr>
             </a:pPr>
             <a:r>
-              <a:t>• Besonders sinnvoll bei komplexen Geschäftsregeln und vielen Stakeholdern</a:t>
-            </a:r>
+              <a:rPr dirty="0"/>
+              <a:t>• Product Owner / Business: </a:t>
+            </a:r>
+            <a:r>
+              <a:rPr dirty="0" err="1"/>
+              <a:t>fachliche</a:t>
+            </a:r>
+            <a:r>
+              <a:rPr dirty="0"/>
+              <a:t> </a:t>
+            </a:r>
+            <a:r>
+              <a:rPr dirty="0" err="1"/>
+              <a:t>Akzeptanzkriterien</a:t>
+            </a:r>
+            <a:r>
+              <a:rPr dirty="0"/>
+              <a:t> und </a:t>
+            </a:r>
+            <a:r>
+              <a:rPr dirty="0" err="1"/>
+              <a:t>Priorisierung</a:t>
+            </a:r>
+            <a:endParaRPr dirty="0"/>
           </a:p>
           <a:p>
             <a:pPr>
@@ -8664,8 +8396,22 @@
               </a:defRPr>
             </a:pPr>
             <a:r>
-              <a:t>• Risiko: Zusätzliche Abstraktionsschicht und Pflegeaufwand</a:t>
-            </a:r>
+              <a:rPr dirty="0"/>
+              <a:t>• DevOps: CI/CD, </a:t>
+            </a:r>
+            <a:r>
+              <a:rPr dirty="0" err="1"/>
+              <a:t>Infrastruktur</a:t>
+            </a:r>
+            <a:r>
+              <a:rPr dirty="0"/>
+              <a:t>, Secrets und </a:t>
+            </a:r>
+            <a:r>
+              <a:rPr dirty="0" err="1"/>
+              <a:t>Testumgebungen</a:t>
+            </a:r>
+            <a:endParaRPr dirty="0"/>
           </a:p>
           <a:p>
             <a:pPr>
@@ -8677,8 +8423,70 @@
               </a:defRPr>
             </a:pPr>
             <a:r>
-              <a:t>• Entscheidung nach Bedarf: BDD nutzen, wenn es die Kommunikation verbessert – nicht nur als Testautomatisierungsstandard</a:t>
-            </a:r>
+              <a:rPr dirty="0"/>
+              <a:t>• </a:t>
+            </a:r>
+            <a:r>
+              <a:rPr dirty="0" err="1"/>
+              <a:t>Empfehlung</a:t>
+            </a:r>
+            <a:r>
+              <a:rPr dirty="0"/>
+              <a:t>: </a:t>
+            </a:r>
+            <a:r>
+              <a:rPr dirty="0" err="1"/>
+              <a:t>Verantwortlichkeiten</a:t>
+            </a:r>
+            <a:r>
+              <a:rPr dirty="0"/>
+              <a:t> </a:t>
+            </a:r>
+            <a:r>
+              <a:rPr dirty="0" err="1"/>
+              <a:t>früh</a:t>
+            </a:r>
+            <a:r>
+              <a:rPr dirty="0"/>
+              <a:t> </a:t>
+            </a:r>
+            <a:r>
+              <a:rPr dirty="0" err="1"/>
+              <a:t>klären</a:t>
+            </a:r>
+            <a:r>
+              <a:rPr dirty="0"/>
+              <a:t> und </a:t>
+            </a:r>
+            <a:r>
+              <a:rPr dirty="0" err="1"/>
+              <a:t>ein</a:t>
+            </a:r>
+            <a:r>
+              <a:rPr dirty="0"/>
+              <a:t> </a:t>
+            </a:r>
+            <a:r>
+              <a:rPr dirty="0" err="1"/>
+              <a:t>kleines</a:t>
+            </a:r>
+            <a:r>
+              <a:rPr dirty="0"/>
+              <a:t> </a:t>
+            </a:r>
+            <a:r>
+              <a:rPr dirty="0" err="1"/>
+              <a:t>Kernteam</a:t>
+            </a:r>
+            <a:r>
+              <a:rPr dirty="0"/>
+              <a:t> </a:t>
+            </a:r>
+            <a:r>
+              <a:rPr dirty="0" err="1"/>
+              <a:t>benennen</a:t>
+            </a:r>
+            <a:endParaRPr dirty="0"/>
           </a:p>
         </p:txBody>
       </p:sp>
@@ -8708,7 +8516,7 @@
               <a:defRPr sz="900"/>
             </a:pPr>
             <a:r>
-              <a:t>07</a:t>
+              <a:t>08</a:t>
             </a:r>
           </a:p>
         </p:txBody>
@@ -8755,7 +8563,7 @@
         <p:spPr>
           <a:xfrm>
             <a:off x="640080" y="411480"/>
-            <a:ext cx="10881360" cy="731520"/>
+            <a:ext cx="8513164" cy="507831"/>
           </a:xfrm>
           <a:prstGeom prst="rect">
             <a:avLst/>
@@ -8774,8 +8582,54 @@
               </a:defRPr>
             </a:pPr>
             <a:r>
-              <a:t>7. Wer automatisiert? Rollen und Verantwortlichkeiten</a:t>
-            </a:r>
+              <a:rPr dirty="0"/>
+              <a:t>8. Budget: T</a:t>
+            </a:r>
+            <a:r>
+              <a:rPr lang="de-DE" dirty="0" err="1"/>
+              <a:t>otal</a:t>
+            </a:r>
+            <a:r>
+              <a:rPr lang="de-DE" dirty="0"/>
+              <a:t> </a:t>
+            </a:r>
+            <a:r>
+              <a:rPr dirty="0"/>
+              <a:t>C</a:t>
+            </a:r>
+            <a:r>
+              <a:rPr lang="de-DE" dirty="0" err="1"/>
+              <a:t>ost</a:t>
+            </a:r>
+            <a:r>
+              <a:rPr lang="de-DE" dirty="0"/>
+              <a:t> of Ownership</a:t>
+            </a:r>
+            <a:r>
+              <a:rPr dirty="0"/>
+              <a:t> </a:t>
+            </a:r>
+            <a:r>
+              <a:rPr dirty="0" err="1"/>
+              <a:t>statt</a:t>
+            </a:r>
+            <a:r>
+              <a:rPr dirty="0"/>
+              <a:t> </a:t>
+            </a:r>
+            <a:r>
+              <a:rPr dirty="0" err="1"/>
+              <a:t>nur</a:t>
+            </a:r>
+            <a:r>
+              <a:rPr dirty="0"/>
+              <a:t> </a:t>
+            </a:r>
+            <a:r>
+              <a:rPr dirty="0" err="1"/>
+              <a:t>Lizenzkosten</a:t>
+            </a:r>
+            <a:endParaRPr dirty="0"/>
           </a:p>
         </p:txBody>
       </p:sp>
@@ -8832,7 +8686,7 @@
         <p:spPr>
           <a:xfrm>
             <a:off x="822960" y="1508760"/>
-            <a:ext cx="10515600" cy="2169825"/>
+            <a:ext cx="10515600" cy="4754880"/>
           </a:xfrm>
           <a:prstGeom prst="rect">
             <a:avLst/>
@@ -8854,38 +8708,8 @@
               </a:defRPr>
             </a:pPr>
             <a:r>
-              <a:rPr dirty="0"/>
-              <a:t>• Test Engineer / QA: </a:t>
-            </a:r>
-            <a:r>
-              <a:rPr dirty="0" err="1"/>
-              <a:t>Testdesign</a:t>
-            </a:r>
-            <a:r>
-              <a:rPr dirty="0"/>
-              <a:t>, </a:t>
-            </a:r>
-            <a:r>
-              <a:rPr dirty="0" err="1"/>
-              <a:t>Automatisierung</a:t>
-            </a:r>
-            <a:r>
-              <a:rPr dirty="0"/>
-              <a:t>, </a:t>
-            </a:r>
-            <a:r>
-              <a:rPr dirty="0" err="1"/>
-              <a:t>Wartung</a:t>
-            </a:r>
-            <a:r>
-              <a:rPr dirty="0"/>
-              <a:t> und </a:t>
-            </a:r>
-            <a:r>
-              <a:rPr dirty="0" err="1"/>
-              <a:t>Analyse</a:t>
-            </a:r>
-            <a:endParaRPr dirty="0"/>
+              <a:t>• Open Source kann Lizenzkosten reduzieren – ist aber nicht kostenlos</a:t>
+            </a:r>
           </a:p>
           <a:p>
             <a:pPr>
@@ -8897,46 +8721,8 @@
               </a:defRPr>
             </a:pPr>
             <a:r>
-              <a:rPr dirty="0"/>
-              <a:t>• </a:t>
-            </a:r>
-            <a:r>
-              <a:rPr lang="de-DE" dirty="0"/>
-              <a:t>Developer / QA</a:t>
-            </a:r>
-            <a:r>
-              <a:rPr dirty="0"/>
-              <a:t>: </a:t>
-            </a:r>
-            <a:r>
-              <a:rPr dirty="0" err="1"/>
-              <a:t>Unterstützung</a:t>
-            </a:r>
-            <a:r>
-              <a:rPr dirty="0"/>
-              <a:t> </a:t>
-            </a:r>
-            <a:r>
-              <a:rPr dirty="0" err="1"/>
-              <a:t>bei</a:t>
-            </a:r>
-            <a:r>
-              <a:rPr dirty="0"/>
-              <a:t> </a:t>
-            </a:r>
-            <a:r>
-              <a:rPr dirty="0" err="1"/>
-              <a:t>Architektur</a:t>
-            </a:r>
-            <a:r>
-              <a:rPr dirty="0"/>
-              <a:t>, </a:t>
-            </a:r>
-            <a:r>
-              <a:rPr dirty="0" err="1"/>
-              <a:t>Codequalität</a:t>
-            </a:r>
-            <a:endParaRPr dirty="0"/>
+              <a:t>• Weitere Kosten: Schulung, Entwicklung, Wartung, CI-Infrastruktur, Testdaten und Geräte</a:t>
+            </a:r>
           </a:p>
           <a:p>
             <a:pPr>
@@ -8948,30 +8734,8 @@
               </a:defRPr>
             </a:pPr>
             <a:r>
-              <a:rPr dirty="0"/>
-              <a:t>• Product Owner / Business: </a:t>
-            </a:r>
-            <a:r>
-              <a:rPr dirty="0" err="1"/>
-              <a:t>fachliche</a:t>
-            </a:r>
-            <a:r>
-              <a:rPr dirty="0"/>
-              <a:t> </a:t>
-            </a:r>
-            <a:r>
-              <a:rPr dirty="0" err="1"/>
-              <a:t>Akzeptanzkriterien</a:t>
-            </a:r>
-            <a:r>
-              <a:rPr dirty="0"/>
-              <a:t> und </a:t>
-            </a:r>
-            <a:r>
-              <a:rPr dirty="0" err="1"/>
-              <a:t>Priorisierung</a:t>
-            </a:r>
-            <a:endParaRPr dirty="0"/>
+              <a:t>• Kommerzielle Tools können durch Support und geringeren Initialaufwand sinnvoll sein</a:t>
+            </a:r>
           </a:p>
           <a:p>
             <a:pPr>
@@ -8983,22 +8747,8 @@
               </a:defRPr>
             </a:pPr>
             <a:r>
-              <a:rPr dirty="0"/>
-              <a:t>• DevOps: CI/CD, </a:t>
-            </a:r>
-            <a:r>
-              <a:rPr dirty="0" err="1"/>
-              <a:t>Infrastruktur</a:t>
-            </a:r>
-            <a:r>
-              <a:rPr dirty="0"/>
-              <a:t>, Secrets und </a:t>
-            </a:r>
-            <a:r>
-              <a:rPr dirty="0" err="1"/>
-              <a:t>Testumgebungen</a:t>
-            </a:r>
-            <a:endParaRPr dirty="0"/>
+              <a:t>• Daher: Total Cost of Ownership über 2–3 Jahre betrachten</a:t>
+            </a:r>
           </a:p>
           <a:p>
             <a:pPr>
@@ -9010,70 +8760,8 @@
               </a:defRPr>
             </a:pPr>
             <a:r>
-              <a:rPr dirty="0"/>
-              <a:t>• </a:t>
-            </a:r>
-            <a:r>
-              <a:rPr dirty="0" err="1"/>
-              <a:t>Empfehlung</a:t>
-            </a:r>
-            <a:r>
-              <a:rPr dirty="0"/>
-              <a:t>: </a:t>
-            </a:r>
-            <a:r>
-              <a:rPr dirty="0" err="1"/>
-              <a:t>Verantwortlichkeiten</a:t>
-            </a:r>
-            <a:r>
-              <a:rPr dirty="0"/>
-              <a:t> </a:t>
-            </a:r>
-            <a:r>
-              <a:rPr dirty="0" err="1"/>
-              <a:t>früh</a:t>
-            </a:r>
-            <a:r>
-              <a:rPr dirty="0"/>
-              <a:t> </a:t>
-            </a:r>
-            <a:r>
-              <a:rPr dirty="0" err="1"/>
-              <a:t>klären</a:t>
-            </a:r>
-            <a:r>
-              <a:rPr dirty="0"/>
-              <a:t> und </a:t>
-            </a:r>
-            <a:r>
-              <a:rPr dirty="0" err="1"/>
-              <a:t>ein</a:t>
-            </a:r>
-            <a:r>
-              <a:rPr dirty="0"/>
-              <a:t> </a:t>
-            </a:r>
-            <a:r>
-              <a:rPr dirty="0" err="1"/>
-              <a:t>kleines</a:t>
-            </a:r>
-            <a:r>
-              <a:rPr dirty="0"/>
-              <a:t> </a:t>
-            </a:r>
-            <a:r>
-              <a:rPr dirty="0" err="1"/>
-              <a:t>Kernteam</a:t>
-            </a:r>
-            <a:r>
-              <a:rPr dirty="0"/>
-              <a:t> </a:t>
-            </a:r>
-            <a:r>
-              <a:rPr dirty="0" err="1"/>
-              <a:t>benennen</a:t>
-            </a:r>
-            <a:endParaRPr dirty="0"/>
+              <a:t>• Budgetentscheidung anhand von Nutzen, Risiko und Aufwand treffen</a:t>
+            </a:r>
           </a:p>
         </p:txBody>
       </p:sp>
@@ -9103,7 +8791,7 @@
               <a:defRPr sz="900"/>
             </a:pPr>
             <a:r>
-              <a:t>08</a:t>
+              <a:t>09</a:t>
             </a:r>
           </a:p>
         </p:txBody>
@@ -9150,7 +8838,7 @@
         <p:spPr>
           <a:xfrm>
             <a:off x="640080" y="411480"/>
-            <a:ext cx="8513164" cy="507831"/>
+            <a:ext cx="10881360" cy="731520"/>
           </a:xfrm>
           <a:prstGeom prst="rect">
             <a:avLst/>
@@ -9169,54 +8857,8 @@
               </a:defRPr>
             </a:pPr>
             <a:r>
-              <a:rPr dirty="0"/>
-              <a:t>8. Budget: T</a:t>
-            </a:r>
-            <a:r>
-              <a:rPr lang="de-DE" dirty="0" err="1"/>
-              <a:t>otal</a:t>
-            </a:r>
-            <a:r>
-              <a:rPr lang="de-DE" dirty="0"/>
-              <a:t> </a:t>
-            </a:r>
-            <a:r>
-              <a:rPr dirty="0"/>
-              <a:t>C</a:t>
-            </a:r>
-            <a:r>
-              <a:rPr lang="de-DE" dirty="0" err="1"/>
-              <a:t>ost</a:t>
-            </a:r>
-            <a:r>
-              <a:rPr lang="de-DE" dirty="0"/>
-              <a:t> of Ownership</a:t>
-            </a:r>
-            <a:r>
-              <a:rPr dirty="0"/>
-              <a:t> </a:t>
-            </a:r>
-            <a:r>
-              <a:rPr dirty="0" err="1"/>
-              <a:t>statt</a:t>
-            </a:r>
-            <a:r>
-              <a:rPr dirty="0"/>
-              <a:t> </a:t>
-            </a:r>
-            <a:r>
-              <a:rPr dirty="0" err="1"/>
-              <a:t>nur</a:t>
-            </a:r>
-            <a:r>
-              <a:rPr dirty="0"/>
-              <a:t> </a:t>
-            </a:r>
-            <a:r>
-              <a:rPr dirty="0" err="1"/>
-              <a:t>Lizenzkosten</a:t>
-            </a:r>
-            <a:endParaRPr dirty="0"/>
+              <a:t>9. Mein Vorschlag: Proof of Concept</a:t>
+            </a:r>
           </a:p>
         </p:txBody>
       </p:sp>
@@ -9295,7 +8937,7 @@
               </a:defRPr>
             </a:pPr>
             <a:r>
-              <a:t>• Open Source kann Lizenzkosten reduzieren – ist aber nicht kostenlos</a:t>
+              <a:t>• 1. Einen kritischen Business-Prozess auswählen</a:t>
             </a:r>
           </a:p>
           <a:p>
@@ -9308,7 +8950,7 @@
               </a:defRPr>
             </a:pPr>
             <a:r>
-              <a:t>• Weitere Kosten: Schulung, Entwicklung, Wartung, CI-Infrastruktur, Testdaten und Geräte</a:t>
+              <a:t>• 2. Einen API-Test und/oder einen repräsentativen UI-Test automatisieren</a:t>
             </a:r>
           </a:p>
           <a:p>
@@ -9321,7 +8963,7 @@
               </a:defRPr>
             </a:pPr>
             <a:r>
-              <a:t>• Kommerzielle Tools können durch Support und geringeren Initialaufwand sinnvoll sein</a:t>
+              <a:t>• 3. Playwright/Selenium bzw. REST-Assured/Appium gegen Alternativen bewerten</a:t>
             </a:r>
           </a:p>
           <a:p>
@@ -9334,7 +8976,7 @@
               </a:defRPr>
             </a:pPr>
             <a:r>
-              <a:t>• Daher: Total Cost of Ownership über 2–3 Jahre betrachten</a:t>
+              <a:t>• 4. CI/CD-Ausführung, Reporting und Wartbarkeit testen</a:t>
             </a:r>
           </a:p>
           <a:p>
@@ -9347,7 +8989,20 @@
               </a:defRPr>
             </a:pPr>
             <a:r>
-              <a:t>• Budgetentscheidung anhand von Nutzen, Risiko und Aufwand treffen</a:t>
+              <a:t>• 5. Aufwand, Stabilität und Nutzen messen</a:t>
+            </a:r>
+          </a:p>
+          <a:p>
+            <a:pPr>
+              <a:spcAft>
+                <a:spcPts val="1200"/>
+              </a:spcAft>
+              <a:defRPr sz="1900">
+                <a:latin typeface="Aptos"/>
+              </a:defRPr>
+            </a:pPr>
+            <a:r>
+              <a:t>• Ergebnis: belastbare Entscheidung statt Tool-Auswahl auf Basis von Marketing oder Bauchgefühl</a:t>
             </a:r>
           </a:p>
         </p:txBody>
@@ -9378,7 +9033,7 @@
               <a:defRPr sz="900"/>
             </a:pPr>
             <a:r>
-              <a:t>09</a:t>
+              <a:t>10</a:t>
             </a:r>
           </a:p>
         </p:txBody>

--- a/src/test/resources/presale-test-automation-selection-presenttation/Presales_Testautomatisierungswerkzeuge.pptx
+++ b/src/test/resources/presale-test-automation-selection-presenttation/Presales_Testautomatisierungswerkzeuge.pptx
@@ -5,7 +5,7 @@
     <p:sldMasterId id="2147483648" r:id="rId1"/>
   </p:sldMasterIdLst>
   <p:notesMasterIdLst>
-    <p:notesMasterId r:id="rId15"/>
+    <p:notesMasterId r:id="rId14"/>
   </p:notesMasterIdLst>
   <p:sldIdLst>
     <p:sldId id="256" r:id="rId2"/>
@@ -13,14 +13,13 @@
     <p:sldId id="258" r:id="rId4"/>
     <p:sldId id="259" r:id="rId5"/>
     <p:sldId id="260" r:id="rId6"/>
-    <p:sldId id="262" r:id="rId7"/>
-    <p:sldId id="263" r:id="rId8"/>
-    <p:sldId id="264" r:id="rId9"/>
-    <p:sldId id="265" r:id="rId10"/>
-    <p:sldId id="266" r:id="rId11"/>
-    <p:sldId id="267" r:id="rId12"/>
-    <p:sldId id="268" r:id="rId13"/>
-    <p:sldId id="269" r:id="rId14"/>
+    <p:sldId id="263" r:id="rId7"/>
+    <p:sldId id="264" r:id="rId8"/>
+    <p:sldId id="265" r:id="rId9"/>
+    <p:sldId id="266" r:id="rId10"/>
+    <p:sldId id="267" r:id="rId11"/>
+    <p:sldId id="268" r:id="rId12"/>
+    <p:sldId id="269" r:id="rId13"/>
   </p:sldIdLst>
   <p:sldSz cx="12192000" cy="6858000"/>
   <p:notesSz cx="6858000" cy="9144000"/>
@@ -402,7 +401,7 @@
           <a:lstStyle/>
           <a:p>
             <a:r>
-              <a:t>Sprechtext – ca. 1:15 Min.</a:t>
+              <a:t>Sprechtext – ca. 1:00 Min.</a:t>
             </a:r>
           </a:p>
           <a:p>
@@ -410,7 +409,7 @@
           </a:p>
           <a:p>
             <a:r>
-              <a:t>„Nach dem PoC würde ich die Einführung schrittweise durchführen.</a:t>
+              <a:t>„Zum Schluss brauchen wir messbare Erfolgskriterien.</a:t>
             </a:r>
           </a:p>
           <a:p>
@@ -418,7 +417,7 @@
           </a:p>
           <a:p>
             <a:r>
-              <a:t>Zuerst definieren wir Architektur und Standards. Dazu gehören beispielsweise Projektstruktur, Naming, Selektoren, Testdaten, Logging und Reporting.</a:t>
+              <a:t>Wir können beispielsweise betrachten, wie stabil die Tests sind, wie schnell Feedback geliefert wird und wie viel manuelle Regression eingespart wird.</a:t>
             </a:r>
           </a:p>
           <a:p>
@@ -426,7 +425,7 @@
           </a:p>
           <a:p>
             <a:r>
-              <a:t>Danach starten wir mit einem kleinen Pilotumfang.</a:t>
+              <a:t>Auch die Fehlersuche ist wichtig. Ein Test, der nur ‚failed‘ meldet, hilft wenig. Gute Logs, Reports und Traces können hier einen großen Unterschied machen.</a:t>
             </a:r>
           </a:p>
           <a:p>
@@ -434,7 +433,7 @@
           </a:p>
           <a:p>
             <a:r>
-              <a:t>Wenn dieser stabil läuft, integrieren wir die Tests in die CI/CD-Pipeline und erweitern anschließend Schritt für Schritt.</a:t>
+              <a:t>Und natürlich müssen wir die Wartungskosten beobachten.</a:t>
             </a:r>
           </a:p>
           <a:p>
@@ -442,7 +441,7 @@
           </a:p>
           <a:p>
             <a:r>
-              <a:t>Ich würde bewusst vermeiden, sofort die gesamte Regression zu automatisieren. Eine schrittweise Einführung reduziert technische und organisatorische Risiken.“</a:t>
+              <a:t>Automatisierung ist für mich dann erfolgreich, wenn sie dauerhaft einen schnelleren und zuverlässigeren Feedback-Prozess ermöglicht.“</a:t>
             </a:r>
           </a:p>
         </p:txBody>
@@ -512,7 +511,7 @@
           <a:lstStyle/>
           <a:p>
             <a:r>
-              <a:t>Sprechtext – ca. 1:00 Min.</a:t>
+              <a:t>Sprechtext – ca. 1:15 Min.</a:t>
             </a:r>
           </a:p>
           <a:p>
@@ -520,7 +519,7 @@
           </a:p>
           <a:p>
             <a:r>
-              <a:t>„Zum Schluss brauchen wir messbare Erfolgskriterien.</a:t>
+              <a:t>„Meine Empfehlung wäre daher zusammengefasst: Wir treffen heute noch keine endgültige Toolentscheidung.</a:t>
             </a:r>
           </a:p>
           <a:p>
@@ -528,7 +527,7 @@
           </a:p>
           <a:p>
             <a:r>
-              <a:t>Wir können beispielsweise betrachten, wie stabil die Tests sind, wie schnell Feedback geliefert wird und wie viel manuelle Regression eingespart wird.</a:t>
+              <a:t>Wir starten mit einer strukturierten Discovery, definieren gemeinsam die Auswahlkriterien und führen anschließend einen kleinen PoC durch.</a:t>
             </a:r>
           </a:p>
           <a:p>
@@ -536,7 +535,7 @@
           </a:p>
           <a:p>
             <a:r>
-              <a:t>Auch die Fehlersuche ist wichtig. Ein Test, der nur ‚failed‘ meldet, hilft wenig. Gute Logs, Reports und Traces können hier einen großen Unterschied machen.</a:t>
+              <a:t>Bei Web würde ich Playwright als starken Kandidaten aufnehmen. Bei APIs beispielsweise REST Assured, abhängig vom Technologie-Stack, und für Mobile Appium.</a:t>
             </a:r>
           </a:p>
           <a:p>
@@ -544,7 +543,7 @@
           </a:p>
           <a:p>
             <a:r>
-              <a:t>Und natürlich müssen wir die Wartungskosten beobachten.</a:t>
+              <a:t>Open Source ist bei einem noch offenen Budget ein sinnvoller Ausgangspunkt, aber wir betrachten die Gesamtbetriebskosten.</a:t>
             </a:r>
           </a:p>
           <a:p>
@@ -552,7 +551,7 @@
           </a:p>
           <a:p>
             <a:r>
-              <a:t>Automatisierung ist für mich dann erfolgreich, wenn sie dauerhaft einen schnelleren und zuverlässigeren Feedback-Prozess ermöglicht.“</a:t>
+              <a:t>Der nächste konkrete Schritt wäre ein Workshop mit Product Owner, QA beziehungsweise Test, Entwicklung und DevOps. Dort können wir die offenen Fragen beantworten und anschließend den PoC definieren.“</a:t>
             </a:r>
           </a:p>
         </p:txBody>
@@ -622,116 +621,6 @@
           <a:lstStyle/>
           <a:p>
             <a:r>
-              <a:t>Sprechtext – ca. 1:15 Min.</a:t>
-            </a:r>
-          </a:p>
-          <a:p>
-            <a:endParaRPr/>
-          </a:p>
-          <a:p>
-            <a:r>
-              <a:t>„Meine Empfehlung wäre daher zusammengefasst: Wir treffen heute noch keine endgültige Toolentscheidung.</a:t>
-            </a:r>
-          </a:p>
-          <a:p>
-            <a:endParaRPr/>
-          </a:p>
-          <a:p>
-            <a:r>
-              <a:t>Wir starten mit einer strukturierten Discovery, definieren gemeinsam die Auswahlkriterien und führen anschließend einen kleinen PoC durch.</a:t>
-            </a:r>
-          </a:p>
-          <a:p>
-            <a:endParaRPr/>
-          </a:p>
-          <a:p>
-            <a:r>
-              <a:t>Bei Web würde ich Playwright als starken Kandidaten aufnehmen. Bei APIs beispielsweise REST Assured, abhängig vom Technologie-Stack, und für Mobile Appium.</a:t>
-            </a:r>
-          </a:p>
-          <a:p>
-            <a:endParaRPr/>
-          </a:p>
-          <a:p>
-            <a:r>
-              <a:t>Open Source ist bei einem noch offenen Budget ein sinnvoller Ausgangspunkt, aber wir betrachten die Gesamtbetriebskosten.</a:t>
-            </a:r>
-          </a:p>
-          <a:p>
-            <a:endParaRPr/>
-          </a:p>
-          <a:p>
-            <a:r>
-              <a:t>Der nächste konkrete Schritt wäre ein Workshop mit Product Owner, QA beziehungsweise Test, Entwicklung und DevOps. Dort können wir die offenen Fragen beantworten und anschließend den PoC definieren.“</a:t>
-            </a:r>
-          </a:p>
-        </p:txBody>
-      </p:sp>
-      <p:sp>
-        <p:nvSpPr>
-          <p:cNvPr id="4" name="Slide Number Placeholder 3"/>
-          <p:cNvSpPr>
-            <a:spLocks noGrp="1"/>
-          </p:cNvSpPr>
-          <p:nvPr>
-            <p:ph type="sldNum" sz="quarter" idx="5"/>
-          </p:nvPr>
-        </p:nvSpPr>
-        <p:spPr/>
-      </p:sp>
-    </p:spTree>
-  </p:cSld>
-  <p:clrMapOvr>
-    <a:masterClrMapping/>
-  </p:clrMapOvr>
-</p:notes>
-</file>
-
-<file path=ppt/notesSlides/notesSlide13.xml><?xml version="1.0" encoding="utf-8"?>
-<p:notes xmlns:a="http://schemas.openxmlformats.org/drawingml/2006/main" xmlns:r="http://schemas.openxmlformats.org/officeDocument/2006/relationships" xmlns:p="http://schemas.openxmlformats.org/presentationml/2006/main">
-  <p:cSld>
-    <p:spTree>
-      <p:nvGrpSpPr>
-        <p:cNvPr id="1" name=""/>
-        <p:cNvGrpSpPr/>
-        <p:nvPr/>
-      </p:nvGrpSpPr>
-      <p:grpSpPr>
-        <a:xfrm>
-          <a:off x="0" y="0"/>
-          <a:ext cx="0" cy="0"/>
-          <a:chOff x="0" y="0"/>
-          <a:chExt cx="0" cy="0"/>
-        </a:xfrm>
-      </p:grpSpPr>
-      <p:sp>
-        <p:nvSpPr>
-          <p:cNvPr id="2" name="Slide Image Placeholder 1"/>
-          <p:cNvSpPr>
-            <a:spLocks noGrp="1" noRot="1" noChangeAspect="1"/>
-          </p:cNvSpPr>
-          <p:nvPr>
-            <p:ph type="sldImg" idx="2"/>
-          </p:nvPr>
-        </p:nvSpPr>
-        <p:spPr/>
-      </p:sp>
-      <p:sp>
-        <p:nvSpPr>
-          <p:cNvPr id="3" name="Notes Placeholder 2"/>
-          <p:cNvSpPr>
-            <a:spLocks noGrp="1"/>
-          </p:cNvSpPr>
-          <p:nvPr>
-            <p:ph type="body" sz="quarter" idx="3"/>
-          </p:nvPr>
-        </p:nvSpPr>
-        <p:spPr/>
-        <p:txBody>
-          <a:bodyPr/>
-          <a:lstStyle/>
-          <a:p>
-            <a:r>
               <a:t>Sprechtext – ca. 1:00 Min.</a:t>
             </a:r>
           </a:p>
@@ -1322,7 +1211,7 @@
           <a:lstStyle/>
           <a:p>
             <a:r>
-              <a:t>Sprechtext – ca. 1:20 Min.</a:t>
+              <a:t>Sprechtext – ca. 1:15 Min.</a:t>
             </a:r>
           </a:p>
           <a:p>
@@ -1330,7 +1219,7 @@
           </a:p>
           <a:p>
             <a:r>
-              <a:t>„Ein weiterer Punkt meiner ursprünglichen Lösung war BDD beziehungsweise Cucumber.</a:t>
+              <a:t>„Da wir heute noch nicht wissen, wer die Automatisierung übernimmt, würde ich diese Frage sehr früh klären.</a:t>
             </a:r>
           </a:p>
           <a:p>
@@ -1338,7 +1227,7 @@
           </a:p>
           <a:p>
             <a:r>
-              <a:t>BDD kann sehr sinnvoll sein, wenn Business, Product Owner, Tester und Entwickler gemeinsam an fachlichen Szenarien arbeiten sollen.</a:t>
+              <a:t>Ein Test Engineer kann beispielsweise Testdesign und Automatisierung verantworten. Entwickler können bei Testbarkeit und technischer Architektur unterstützen. Der Product Owner liefert fachliche Prioritäten und Akzeptanzkriterien. DevOps unterstützt bei CI/CD und Infrastruktur.</a:t>
             </a:r>
           </a:p>
           <a:p>
@@ -1346,7 +1235,7 @@
           </a:p>
           <a:p>
             <a:r>
-              <a:t>Der große Vorteil ist die gemeinsame Sprache. Ein Szenario kann beispielsweise fachlich formuliert werden, sodass auch ein Product Owner verstehen kann, was getestet wird.</a:t>
+              <a:t>Ich würde deshalb ein kleines verantwortliches Kernteam definieren.</a:t>
             </a:r>
           </a:p>
           <a:p>
@@ -1354,7 +1243,7 @@
           </a:p>
           <a:p>
             <a:r>
-              <a:t>Aber BDD ist nicht automatisch die beste Lösung für jedes Projekt. Es bringt eine zusätzliche Abstraktionsschicht und damit auch Pflegeaufwand mit sich.</a:t>
+              <a:t>Das ist wichtig, weil Testautomatisierung kein einmaliges Projekt ist. Tests müssen gepflegt, analysiert und bei Änderungen am Produkt angepasst werden.</a:t>
             </a:r>
           </a:p>
           <a:p>
@@ -1362,7 +1251,7 @@
           </a:p>
           <a:p>
             <a:r>
-              <a:t>Meine Empfehlung wäre deshalb: BDD einsetzen, wenn es tatsächlich die Kommunikation und Zusammenarbeit verbessert – nicht einfach, weil Cucumber ein bekanntes Tool ist.“</a:t>
+              <a:t>Die Ownership muss daher von Anfang an klar sein.“</a:t>
             </a:r>
           </a:p>
         </p:txBody>
@@ -1440,7 +1329,7 @@
           </a:p>
           <a:p>
             <a:r>
-              <a:t>„Da wir heute noch nicht wissen, wer die Automatisierung übernimmt, würde ich diese Frage sehr früh klären.</a:t>
+              <a:t>„Beim Budget möchte ich eine häufige Fehlannahme vermeiden: Open Source bedeutet nicht automatisch kostenlos.</a:t>
             </a:r>
           </a:p>
           <a:p>
@@ -1448,7 +1337,7 @@
           </a:p>
           <a:p>
             <a:r>
-              <a:t>Ein Test Engineer kann beispielsweise Testdesign und Automatisierung verantworten. Entwickler können bei Testbarkeit und technischer Architektur unterstützen. Der Product Owner liefert fachliche Prioritäten und Akzeptanzkriterien. DevOps unterstützt bei CI/CD und Infrastruktur.</a:t>
+              <a:t>Natürlich können wir mit Open-Source-Tools Lizenzkosten vermeiden. Aber es entstehen trotzdem Kosten für Entwicklung, Schulung, Infrastruktur, CI/CD, Testdaten, Geräte und Wartung.</a:t>
             </a:r>
           </a:p>
           <a:p>
@@ -1456,7 +1345,7 @@
           </a:p>
           <a:p>
             <a:r>
-              <a:t>Ich würde deshalb ein kleines verantwortliches Kernteam definieren.</a:t>
+              <a:t>Deshalb würde ich dem Kunden eine TCO-Betrachtung empfehlen – also Total Cost of Ownership.</a:t>
             </a:r>
           </a:p>
           <a:p>
@@ -1464,7 +1353,7 @@
           </a:p>
           <a:p>
             <a:r>
-              <a:t>Das ist wichtig, weil Testautomatisierung kein einmaliges Projekt ist. Tests müssen gepflegt, analysiert und bei Änderungen am Produkt angepasst werden.</a:t>
+              <a:t>Ein kommerzielles Werkzeug kann trotz Lizenzkosten wirtschaftlich sein, wenn beispielsweise Support, Reporting oder Administration deutlich einfacher sind.</a:t>
             </a:r>
           </a:p>
           <a:p>
@@ -1472,7 +1361,7 @@
           </a:p>
           <a:p>
             <a:r>
-              <a:t>Die Ownership muss daher von Anfang an klar sein.“</a:t>
+              <a:t>Die Frage sollte also nicht sein: Was kostet das Tool? Sondern: Was kostet die gesamte Lösung und welchen Nutzen erhalten wir dafür?“</a:t>
             </a:r>
           </a:p>
         </p:txBody>
@@ -1542,7 +1431,7 @@
           <a:lstStyle/>
           <a:p>
             <a:r>
-              <a:t>Sprechtext – ca. 1:15 Min.</a:t>
+              <a:t>Sprechtext – ca. 1:30 Min.</a:t>
             </a:r>
           </a:p>
           <a:p>
@@ -1550,7 +1439,7 @@
           </a:p>
           <a:p>
             <a:r>
-              <a:t>„Beim Budget möchte ich eine häufige Fehlannahme vermeiden: Open Source bedeutet nicht automatisch kostenlos.</a:t>
+              <a:t>„Mein konkreter Vorschlag wäre deshalb ein Proof of Concept.</a:t>
             </a:r>
           </a:p>
           <a:p>
@@ -1558,7 +1447,7 @@
           </a:p>
           <a:p>
             <a:r>
-              <a:t>Natürlich können wir mit Open-Source-Tools Lizenzkosten vermeiden. Aber es entstehen trotzdem Kosten für Entwicklung, Schulung, Infrastruktur, CI/CD, Testdaten, Geräte und Wartung.</a:t>
+              <a:t>Wir nehmen nicht hundert Testfälle, sondern einen repräsentativen und geschäftskritischen Prozess.</a:t>
             </a:r>
           </a:p>
           <a:p>
@@ -1566,7 +1455,7 @@
           </a:p>
           <a:p>
             <a:r>
-              <a:t>Deshalb würde ich dem Kunden eine TCO-Betrachtung empfehlen – also Total Cost of Ownership.</a:t>
+              <a:t>Diesen Prozess automatisieren wir beispielsweise mit Playwright und vergleichen ihn – wenn relevant – mit einer Alternative.</a:t>
             </a:r>
           </a:p>
           <a:p>
@@ -1574,7 +1463,7 @@
           </a:p>
           <a:p>
             <a:r>
-              <a:t>Ein kommerzielles Werkzeug kann trotz Lizenzkosten wirtschaftlich sein, wenn beispielsweise Support, Reporting oder Administration deutlich einfacher sind.</a:t>
+              <a:t>Wir schauen dabei nicht nur, ob der Test funktioniert. Wir messen auch Entwicklungsaufwand, Stabilität, Wartbarkeit, Ausführungszeit, CI/CD-Integration und Fehlersuche.</a:t>
             </a:r>
           </a:p>
           <a:p>
@@ -1582,7 +1471,15 @@
           </a:p>
           <a:p>
             <a:r>
-              <a:t>Die Frage sollte also nicht sein: Was kostet das Tool? Sondern: Was kostet die gesamte Lösung und welchen Nutzen erhalten wir dafür?“</a:t>
+              <a:t>Am Ende haben wir reale Ergebnisse.</a:t>
+            </a:r>
+          </a:p>
+          <a:p>
+            <a:endParaRPr/>
+          </a:p>
+          <a:p>
+            <a:r>
+              <a:t>Das reduziert das Risiko einer falschen Toolentscheidung erheblich und gibt dem Kunden eine nachvollziehbare Grundlage für die Investitionsentscheidung.“</a:t>
             </a:r>
           </a:p>
         </p:txBody>
@@ -1652,7 +1549,7 @@
           <a:lstStyle/>
           <a:p>
             <a:r>
-              <a:t>Sprechtext – ca. 1:30 Min.</a:t>
+              <a:t>Sprechtext – ca. 1:15 Min.</a:t>
             </a:r>
           </a:p>
           <a:p>
@@ -1660,7 +1557,7 @@
           </a:p>
           <a:p>
             <a:r>
-              <a:t>„Mein konkreter Vorschlag wäre deshalb ein Proof of Concept.</a:t>
+              <a:t>„Nach dem PoC würde ich die Einführung schrittweise durchführen.</a:t>
             </a:r>
           </a:p>
           <a:p>
@@ -1668,7 +1565,7 @@
           </a:p>
           <a:p>
             <a:r>
-              <a:t>Wir nehmen nicht hundert Testfälle, sondern einen repräsentativen und geschäftskritischen Prozess.</a:t>
+              <a:t>Zuerst definieren wir Architektur und Standards. Dazu gehören beispielsweise Projektstruktur, Naming, Selektoren, Testdaten, Logging und Reporting.</a:t>
             </a:r>
           </a:p>
           <a:p>
@@ -1676,7 +1573,7 @@
           </a:p>
           <a:p>
             <a:r>
-              <a:t>Diesen Prozess automatisieren wir beispielsweise mit Playwright und vergleichen ihn – wenn relevant – mit einer Alternative.</a:t>
+              <a:t>Danach starten wir mit einem kleinen Pilotumfang.</a:t>
             </a:r>
           </a:p>
           <a:p>
@@ -1684,7 +1581,7 @@
           </a:p>
           <a:p>
             <a:r>
-              <a:t>Wir schauen dabei nicht nur, ob der Test funktioniert. Wir messen auch Entwicklungsaufwand, Stabilität, Wartbarkeit, Ausführungszeit, CI/CD-Integration und Fehlersuche.</a:t>
+              <a:t>Wenn dieser stabil läuft, integrieren wir die Tests in die CI/CD-Pipeline und erweitern anschließend Schritt für Schritt.</a:t>
             </a:r>
           </a:p>
           <a:p>
@@ -1692,15 +1589,7 @@
           </a:p>
           <a:p>
             <a:r>
-              <a:t>Am Ende haben wir reale Ergebnisse.</a:t>
-            </a:r>
-          </a:p>
-          <a:p>
-            <a:endParaRPr/>
-          </a:p>
-          <a:p>
-            <a:r>
-              <a:t>Das reduziert das Risiko einer falschen Toolentscheidung erheblich und gibt dem Kunden eine nachvollziehbare Grundlage für die Investitionsentscheidung.“</a:t>
+              <a:t>Ich würde bewusst vermeiden, sofort die gesamte Regression zu automatisieren. Eine schrittweise Einführung reduziert technische und organisatorische Risiken.“</a:t>
             </a:r>
           </a:p>
         </p:txBody>
@@ -5049,7 +4938,7 @@
               </a:defRPr>
             </a:pPr>
             <a:r>
-              <a:t>10. Zielbild der Einführung</a:t>
+              <a:t>11. Erfolgskriterien</a:t>
             </a:r>
           </a:p>
         </p:txBody>
@@ -5129,7 +5018,7 @@
               </a:defRPr>
             </a:pPr>
             <a:r>
-              <a:t>• Phase 1: Discovery &amp; Tool-Kriterien</a:t>
+              <a:t>• Hohe Stabilität der automatisierten Tests</a:t>
             </a:r>
           </a:p>
           <a:p>
@@ -5142,7 +5031,7 @@
               </a:defRPr>
             </a:pPr>
             <a:r>
-              <a:t>• Phase 2: Proof of Concept</a:t>
+              <a:t>• Kurze Feedback-Zeit für Entwickler und Fachbereiche</a:t>
             </a:r>
           </a:p>
           <a:p>
@@ -5155,7 +5044,7 @@
               </a:defRPr>
             </a:pPr>
             <a:r>
-              <a:t>• Phase 3: Testautomatisierungs-Architektur und Coding Standards</a:t>
+              <a:t>• Weniger manuelle Regression bei wiederholbaren Szenarien</a:t>
             </a:r>
           </a:p>
           <a:p>
@@ -5168,7 +5057,7 @@
               </a:defRPr>
             </a:pPr>
             <a:r>
-              <a:t>• Phase 4: Pilot mit wenigen kritischen Tests</a:t>
+              <a:t>• Gute Fehlersuche durch Logs, Screenshots/Traces und Reports</a:t>
             </a:r>
           </a:p>
           <a:p>
@@ -5181,7 +5070,7 @@
               </a:defRPr>
             </a:pPr>
             <a:r>
-              <a:t>• Phase 5: Integration in CI/CD und Reporting</a:t>
+              <a:t>• Nachvollziehbare Wartungskosten</a:t>
             </a:r>
           </a:p>
           <a:p>
@@ -5194,7 +5083,7 @@
               </a:defRPr>
             </a:pPr>
             <a:r>
-              <a:t>• Phase 6: Skalierung, Monitoring und kontinuierliche Wartung</a:t>
+              <a:t>• Automatisierung als Bestandteil des Entwicklungsprozesses – nicht als separates Nebenprojekt</a:t>
             </a:r>
           </a:p>
         </p:txBody>
@@ -5225,7 +5114,7 @@
               <a:defRPr sz="900"/>
             </a:pPr>
             <a:r>
-              <a:t>11</a:t>
+              <a:t>12</a:t>
             </a:r>
           </a:p>
         </p:txBody>
@@ -5291,7 +5180,7 @@
               </a:defRPr>
             </a:pPr>
             <a:r>
-              <a:t>11. Erfolgskriterien</a:t>
+              <a:t>12. Empfehlung &amp; nächste Schritte</a:t>
             </a:r>
           </a:p>
         </p:txBody>
@@ -5371,7 +5260,7 @@
               </a:defRPr>
             </a:pPr>
             <a:r>
-              <a:t>• Hohe Stabilität der automatisierten Tests</a:t>
+              <a:t>• Noch keine finale Tool-Entscheidung ohne Discovery</a:t>
             </a:r>
           </a:p>
           <a:p>
@@ -5384,7 +5273,7 @@
               </a:defRPr>
             </a:pPr>
             <a:r>
-              <a:t>• Kurze Feedback-Zeit für Entwickler und Fachbereiche</a:t>
+              <a:t>• Open-Source-first ist bei offenem Budget ein sinnvoller Ausgangspunkt</a:t>
             </a:r>
           </a:p>
           <a:p>
@@ -5397,7 +5286,7 @@
               </a:defRPr>
             </a:pPr>
             <a:r>
-              <a:t>• Weniger manuelle Regression bei wiederholbaren Szenarien</a:t>
+              <a:t>• Playwright würde ich für Web als starken Kandidaten in den PoC nehmen</a:t>
             </a:r>
           </a:p>
           <a:p>
@@ -5410,7 +5299,7 @@
               </a:defRPr>
             </a:pPr>
             <a:r>
-              <a:t>• Gute Fehlersuche durch Logs, Screenshots/Traces und Reports</a:t>
+              <a:t>• API: REST Assured bzw. Playwright/API-Funktionen abhängig vom Technologie-Stack</a:t>
             </a:r>
           </a:p>
           <a:p>
@@ -5423,7 +5312,7 @@
               </a:defRPr>
             </a:pPr>
             <a:r>
-              <a:t>• Nachvollziehbare Wartungskosten</a:t>
+              <a:t>• Mobile: Appium als Kandidat</a:t>
             </a:r>
           </a:p>
           <a:p>
@@ -5436,7 +5325,7 @@
               </a:defRPr>
             </a:pPr>
             <a:r>
-              <a:t>• Automatisierung als Bestandteil des Entwicklungsprozesses – nicht als separates Nebenprojekt</a:t>
+              <a:t>• Nächster Schritt: Workshop mit Produkt-, QA-, Entwicklungs- und DevOps-Verantwortlichen + PoC</a:t>
             </a:r>
           </a:p>
         </p:txBody>
@@ -5467,7 +5356,7 @@
               <a:defRPr sz="900"/>
             </a:pPr>
             <a:r>
-              <a:t>12</a:t>
+              <a:t>13</a:t>
             </a:r>
           </a:p>
         </p:txBody>
@@ -5533,248 +5422,6 @@
               </a:defRPr>
             </a:pPr>
             <a:r>
-              <a:t>12. Empfehlung &amp; nächste Schritte</a:t>
-            </a:r>
-          </a:p>
-        </p:txBody>
-      </p:sp>
-      <p:sp>
-        <p:nvSpPr>
-          <p:cNvPr id="3" name="Rectangle 2"/>
-          <p:cNvSpPr/>
-          <p:nvPr/>
-        </p:nvSpPr>
-        <p:spPr>
-          <a:xfrm>
-            <a:off x="640080" y="1170432"/>
-            <a:ext cx="914400" cy="73152"/>
-          </a:xfrm>
-          <a:prstGeom prst="rect">
-            <a:avLst/>
-          </a:prstGeom>
-          <a:solidFill>
-            <a:srgbClr val="1F4E79"/>
-          </a:solidFill>
-          <a:ln>
-            <a:noFill/>
-          </a:ln>
-        </p:spPr>
-        <p:style>
-          <a:lnRef idx="1">
-            <a:schemeClr val="accent1"/>
-          </a:lnRef>
-          <a:fillRef idx="3">
-            <a:schemeClr val="accent1"/>
-          </a:fillRef>
-          <a:effectRef idx="2">
-            <a:schemeClr val="accent1"/>
-          </a:effectRef>
-          <a:fontRef idx="minor">
-            <a:schemeClr val="lt1"/>
-          </a:fontRef>
-        </p:style>
-        <p:txBody>
-          <a:bodyPr rtlCol="0" anchor="ctr"/>
-          <a:lstStyle/>
-          <a:p>
-            <a:pPr algn="ctr"/>
-            <a:endParaRPr/>
-          </a:p>
-        </p:txBody>
-      </p:sp>
-      <p:sp>
-        <p:nvSpPr>
-          <p:cNvPr id="4" name="TextBox 3"/>
-          <p:cNvSpPr txBox="1"/>
-          <p:nvPr/>
-        </p:nvSpPr>
-        <p:spPr>
-          <a:xfrm>
-            <a:off x="822960" y="1508760"/>
-            <a:ext cx="10515600" cy="4754880"/>
-          </a:xfrm>
-          <a:prstGeom prst="rect">
-            <a:avLst/>
-          </a:prstGeom>
-          <a:noFill/>
-        </p:spPr>
-        <p:txBody>
-          <a:bodyPr wrap="square">
-            <a:spAutoFit/>
-          </a:bodyPr>
-          <a:lstStyle/>
-          <a:p>
-            <a:pPr>
-              <a:spcAft>
-                <a:spcPts val="1200"/>
-              </a:spcAft>
-              <a:defRPr sz="1900">
-                <a:latin typeface="Aptos"/>
-              </a:defRPr>
-            </a:pPr>
-            <a:r>
-              <a:t>• Noch keine finale Tool-Entscheidung ohne Discovery</a:t>
-            </a:r>
-          </a:p>
-          <a:p>
-            <a:pPr>
-              <a:spcAft>
-                <a:spcPts val="1200"/>
-              </a:spcAft>
-              <a:defRPr sz="1900">
-                <a:latin typeface="Aptos"/>
-              </a:defRPr>
-            </a:pPr>
-            <a:r>
-              <a:t>• Open-Source-first ist bei offenem Budget ein sinnvoller Ausgangspunkt</a:t>
-            </a:r>
-          </a:p>
-          <a:p>
-            <a:pPr>
-              <a:spcAft>
-                <a:spcPts val="1200"/>
-              </a:spcAft>
-              <a:defRPr sz="1900">
-                <a:latin typeface="Aptos"/>
-              </a:defRPr>
-            </a:pPr>
-            <a:r>
-              <a:t>• Playwright würde ich für Web als starken Kandidaten in den PoC nehmen</a:t>
-            </a:r>
-          </a:p>
-          <a:p>
-            <a:pPr>
-              <a:spcAft>
-                <a:spcPts val="1200"/>
-              </a:spcAft>
-              <a:defRPr sz="1900">
-                <a:latin typeface="Aptos"/>
-              </a:defRPr>
-            </a:pPr>
-            <a:r>
-              <a:t>• API: REST Assured bzw. Playwright/API-Funktionen abhängig vom Technologie-Stack</a:t>
-            </a:r>
-          </a:p>
-          <a:p>
-            <a:pPr>
-              <a:spcAft>
-                <a:spcPts val="1200"/>
-              </a:spcAft>
-              <a:defRPr sz="1900">
-                <a:latin typeface="Aptos"/>
-              </a:defRPr>
-            </a:pPr>
-            <a:r>
-              <a:t>• Mobile: Appium als Kandidat</a:t>
-            </a:r>
-          </a:p>
-          <a:p>
-            <a:pPr>
-              <a:spcAft>
-                <a:spcPts val="1200"/>
-              </a:spcAft>
-              <a:defRPr sz="1900">
-                <a:latin typeface="Aptos"/>
-              </a:defRPr>
-            </a:pPr>
-            <a:r>
-              <a:t>• Nächster Schritt: Workshop mit Produkt-, QA-, Entwicklungs- und DevOps-Verantwortlichen + PoC</a:t>
-            </a:r>
-          </a:p>
-        </p:txBody>
-      </p:sp>
-      <p:sp>
-        <p:nvSpPr>
-          <p:cNvPr id="5" name="TextBox 4"/>
-          <p:cNvSpPr txBox="1"/>
-          <p:nvPr/>
-        </p:nvSpPr>
-        <p:spPr>
-          <a:xfrm>
-            <a:off x="9875520" y="6446520"/>
-            <a:ext cx="1554480" cy="228600"/>
-          </a:xfrm>
-          <a:prstGeom prst="rect">
-            <a:avLst/>
-          </a:prstGeom>
-          <a:noFill/>
-        </p:spPr>
-        <p:txBody>
-          <a:bodyPr wrap="none">
-            <a:spAutoFit/>
-          </a:bodyPr>
-          <a:lstStyle/>
-          <a:p>
-            <a:pPr algn="r">
-              <a:defRPr sz="900"/>
-            </a:pPr>
-            <a:r>
-              <a:t>13</a:t>
-            </a:r>
-          </a:p>
-        </p:txBody>
-      </p:sp>
-    </p:spTree>
-  </p:cSld>
-  <p:clrMapOvr>
-    <a:masterClrMapping/>
-  </p:clrMapOvr>
-</p:sld>
-</file>
-
-<file path=ppt/slides/slide13.xml><?xml version="1.0" encoding="utf-8"?>
-<p:sld xmlns:a="http://schemas.openxmlformats.org/drawingml/2006/main" xmlns:r="http://schemas.openxmlformats.org/officeDocument/2006/relationships" xmlns:p="http://schemas.openxmlformats.org/presentationml/2006/main">
-  <p:cSld>
-    <p:bg>
-      <p:bgPr>
-        <a:solidFill>
-          <a:srgbClr val="F8F9FB"/>
-        </a:solidFill>
-        <a:effectLst/>
-      </p:bgPr>
-    </p:bg>
-    <p:spTree>
-      <p:nvGrpSpPr>
-        <p:cNvPr id="1" name=""/>
-        <p:cNvGrpSpPr/>
-        <p:nvPr/>
-      </p:nvGrpSpPr>
-      <p:grpSpPr>
-        <a:xfrm>
-          <a:off x="0" y="0"/>
-          <a:ext cx="0" cy="0"/>
-          <a:chOff x="0" y="0"/>
-          <a:chExt cx="0" cy="0"/>
-        </a:xfrm>
-      </p:grpSpPr>
-      <p:sp>
-        <p:nvSpPr>
-          <p:cNvPr id="2" name="TextBox 1"/>
-          <p:cNvSpPr txBox="1"/>
-          <p:nvPr/>
-        </p:nvSpPr>
-        <p:spPr>
-          <a:xfrm>
-            <a:off x="640080" y="411480"/>
-            <a:ext cx="10881360" cy="731520"/>
-          </a:xfrm>
-          <a:prstGeom prst="rect">
-            <a:avLst/>
-          </a:prstGeom>
-          <a:noFill/>
-        </p:spPr>
-        <p:txBody>
-          <a:bodyPr wrap="none">
-            <a:spAutoFit/>
-          </a:bodyPr>
-          <a:lstStyle/>
-          <a:p>
-            <a:pPr>
-              <a:defRPr sz="2700" b="1">
-                <a:latin typeface="Aptos Display"/>
-              </a:defRPr>
-            </a:pPr>
-            <a:r>
               <a:t>Fragen an den Kunden</a:t>
             </a:r>
           </a:p>
@@ -7958,7 +7605,7 @@
               </a:defRPr>
             </a:pPr>
             <a:r>
-              <a:t>6. BDD / Cucumber – sinnvoll, aber nicht automatisch</a:t>
+              <a:t>7. Wer automatisiert? Rollen und Verantwortlichkeiten</a:t>
             </a:r>
           </a:p>
         </p:txBody>
@@ -8016,7 +7663,7 @@
         <p:spPr>
           <a:xfrm>
             <a:off x="822960" y="1508760"/>
-            <a:ext cx="10515600" cy="4754880"/>
+            <a:ext cx="10515600" cy="2169825"/>
           </a:xfrm>
           <a:prstGeom prst="rect">
             <a:avLst/>
@@ -8038,8 +7685,38 @@
               </a:defRPr>
             </a:pPr>
             <a:r>
-              <a:t>• Vorteil: Gemeinsame Sprache zwischen Business, Product Owner, Test und Entwicklung</a:t>
-            </a:r>
+              <a:rPr dirty="0"/>
+              <a:t>• Test Engineer / QA: </a:t>
+            </a:r>
+            <a:r>
+              <a:rPr dirty="0" err="1"/>
+              <a:t>Testdesign</a:t>
+            </a:r>
+            <a:r>
+              <a:rPr dirty="0"/>
+              <a:t>, </a:t>
+            </a:r>
+            <a:r>
+              <a:rPr dirty="0" err="1"/>
+              <a:t>Automatisierung</a:t>
+            </a:r>
+            <a:r>
+              <a:rPr dirty="0"/>
+              <a:t>, </a:t>
+            </a:r>
+            <a:r>
+              <a:rPr dirty="0" err="1"/>
+              <a:t>Wartung</a:t>
+            </a:r>
+            <a:r>
+              <a:rPr dirty="0"/>
+              <a:t> und </a:t>
+            </a:r>
+            <a:r>
+              <a:rPr dirty="0" err="1"/>
+              <a:t>Analyse</a:t>
+            </a:r>
+            <a:endParaRPr dirty="0"/>
           </a:p>
           <a:p>
             <a:pPr>
@@ -8051,8 +7728,46 @@
               </a:defRPr>
             </a:pPr>
             <a:r>
-              <a:t>• Szenarien können fachlich verständlich formuliert werden</a:t>
-            </a:r>
+              <a:rPr dirty="0"/>
+              <a:t>• </a:t>
+            </a:r>
+            <a:r>
+              <a:rPr lang="de-DE" dirty="0"/>
+              <a:t>Developer / QA</a:t>
+            </a:r>
+            <a:r>
+              <a:rPr dirty="0"/>
+              <a:t>: </a:t>
+            </a:r>
+            <a:r>
+              <a:rPr dirty="0" err="1"/>
+              <a:t>Unterstützung</a:t>
+            </a:r>
+            <a:r>
+              <a:rPr dirty="0"/>
+              <a:t> </a:t>
+            </a:r>
+            <a:r>
+              <a:rPr dirty="0" err="1"/>
+              <a:t>bei</a:t>
+            </a:r>
+            <a:r>
+              <a:rPr dirty="0"/>
+              <a:t> </a:t>
+            </a:r>
+            <a:r>
+              <a:rPr dirty="0" err="1"/>
+              <a:t>Architektur</a:t>
+            </a:r>
+            <a:r>
+              <a:rPr dirty="0"/>
+              <a:t>, </a:t>
+            </a:r>
+            <a:r>
+              <a:rPr dirty="0" err="1"/>
+              <a:t>Codequalität</a:t>
+            </a:r>
+            <a:endParaRPr dirty="0"/>
           </a:p>
           <a:p>
             <a:pPr>
@@ -8064,8 +7779,30 @@
               </a:defRPr>
             </a:pPr>
             <a:r>
-              <a:t>• Besonders sinnvoll bei komplexen Geschäftsregeln und vielen Stakeholdern</a:t>
-            </a:r>
+              <a:rPr dirty="0"/>
+              <a:t>• Product Owner / Business: </a:t>
+            </a:r>
+            <a:r>
+              <a:rPr dirty="0" err="1"/>
+              <a:t>fachliche</a:t>
+            </a:r>
+            <a:r>
+              <a:rPr dirty="0"/>
+              <a:t> </a:t>
+            </a:r>
+            <a:r>
+              <a:rPr dirty="0" err="1"/>
+              <a:t>Akzeptanzkriterien</a:t>
+            </a:r>
+            <a:r>
+              <a:rPr dirty="0"/>
+              <a:t> und </a:t>
+            </a:r>
+            <a:r>
+              <a:rPr dirty="0" err="1"/>
+              <a:t>Priorisierung</a:t>
+            </a:r>
+            <a:endParaRPr dirty="0"/>
           </a:p>
           <a:p>
             <a:pPr>
@@ -8077,8 +7814,22 @@
               </a:defRPr>
             </a:pPr>
             <a:r>
-              <a:t>• Risiko: Zusätzliche Abstraktionsschicht und Pflegeaufwand</a:t>
-            </a:r>
+              <a:rPr dirty="0"/>
+              <a:t>• DevOps: CI/CD, </a:t>
+            </a:r>
+            <a:r>
+              <a:rPr dirty="0" err="1"/>
+              <a:t>Infrastruktur</a:t>
+            </a:r>
+            <a:r>
+              <a:rPr dirty="0"/>
+              <a:t>, Secrets und </a:t>
+            </a:r>
+            <a:r>
+              <a:rPr dirty="0" err="1"/>
+              <a:t>Testumgebungen</a:t>
+            </a:r>
+            <a:endParaRPr dirty="0"/>
           </a:p>
           <a:p>
             <a:pPr>
@@ -8090,8 +7841,70 @@
               </a:defRPr>
             </a:pPr>
             <a:r>
-              <a:t>• Entscheidung nach Bedarf: BDD nutzen, wenn es die Kommunikation verbessert – nicht nur als Testautomatisierungsstandard</a:t>
-            </a:r>
+              <a:rPr dirty="0"/>
+              <a:t>• </a:t>
+            </a:r>
+            <a:r>
+              <a:rPr dirty="0" err="1"/>
+              <a:t>Empfehlung</a:t>
+            </a:r>
+            <a:r>
+              <a:rPr dirty="0"/>
+              <a:t>: </a:t>
+            </a:r>
+            <a:r>
+              <a:rPr dirty="0" err="1"/>
+              <a:t>Verantwortlichkeiten</a:t>
+            </a:r>
+            <a:r>
+              <a:rPr dirty="0"/>
+              <a:t> </a:t>
+            </a:r>
+            <a:r>
+              <a:rPr dirty="0" err="1"/>
+              <a:t>früh</a:t>
+            </a:r>
+            <a:r>
+              <a:rPr dirty="0"/>
+              <a:t> </a:t>
+            </a:r>
+            <a:r>
+              <a:rPr dirty="0" err="1"/>
+              <a:t>klären</a:t>
+            </a:r>
+            <a:r>
+              <a:rPr dirty="0"/>
+              <a:t> und </a:t>
+            </a:r>
+            <a:r>
+              <a:rPr dirty="0" err="1"/>
+              <a:t>ein</a:t>
+            </a:r>
+            <a:r>
+              <a:rPr dirty="0"/>
+              <a:t> </a:t>
+            </a:r>
+            <a:r>
+              <a:rPr dirty="0" err="1"/>
+              <a:t>kleines</a:t>
+            </a:r>
+            <a:r>
+              <a:rPr dirty="0"/>
+              <a:t> </a:t>
+            </a:r>
+            <a:r>
+              <a:rPr dirty="0" err="1"/>
+              <a:t>Kernteam</a:t>
+            </a:r>
+            <a:r>
+              <a:rPr dirty="0"/>
+              <a:t> </a:t>
+            </a:r>
+            <a:r>
+              <a:rPr dirty="0" err="1"/>
+              <a:t>benennen</a:t>
+            </a:r>
+            <a:endParaRPr dirty="0"/>
           </a:p>
         </p:txBody>
       </p:sp>
@@ -8121,7 +7934,7 @@
               <a:defRPr sz="900"/>
             </a:pPr>
             <a:r>
-              <a:t>07</a:t>
+              <a:t>08</a:t>
             </a:r>
           </a:p>
         </p:txBody>
@@ -8168,7 +7981,7 @@
         <p:spPr>
           <a:xfrm>
             <a:off x="640080" y="411480"/>
-            <a:ext cx="10881360" cy="731520"/>
+            <a:ext cx="8513164" cy="507831"/>
           </a:xfrm>
           <a:prstGeom prst="rect">
             <a:avLst/>
@@ -8187,8 +8000,54 @@
               </a:defRPr>
             </a:pPr>
             <a:r>
-              <a:t>7. Wer automatisiert? Rollen und Verantwortlichkeiten</a:t>
-            </a:r>
+              <a:rPr dirty="0"/>
+              <a:t>8. Budget: T</a:t>
+            </a:r>
+            <a:r>
+              <a:rPr lang="de-DE" dirty="0" err="1"/>
+              <a:t>otal</a:t>
+            </a:r>
+            <a:r>
+              <a:rPr lang="de-DE" dirty="0"/>
+              <a:t> </a:t>
+            </a:r>
+            <a:r>
+              <a:rPr dirty="0"/>
+              <a:t>C</a:t>
+            </a:r>
+            <a:r>
+              <a:rPr lang="de-DE" dirty="0" err="1"/>
+              <a:t>ost</a:t>
+            </a:r>
+            <a:r>
+              <a:rPr lang="de-DE" dirty="0"/>
+              <a:t> of Ownership</a:t>
+            </a:r>
+            <a:r>
+              <a:rPr dirty="0"/>
+              <a:t> </a:t>
+            </a:r>
+            <a:r>
+              <a:rPr dirty="0" err="1"/>
+              <a:t>statt</a:t>
+            </a:r>
+            <a:r>
+              <a:rPr dirty="0"/>
+              <a:t> </a:t>
+            </a:r>
+            <a:r>
+              <a:rPr dirty="0" err="1"/>
+              <a:t>nur</a:t>
+            </a:r>
+            <a:r>
+              <a:rPr dirty="0"/>
+              <a:t> </a:t>
+            </a:r>
+            <a:r>
+              <a:rPr dirty="0" err="1"/>
+              <a:t>Lizenzkosten</a:t>
+            </a:r>
+            <a:endParaRPr dirty="0"/>
           </a:p>
         </p:txBody>
       </p:sp>
@@ -8245,7 +8104,7 @@
         <p:spPr>
           <a:xfrm>
             <a:off x="822960" y="1508760"/>
-            <a:ext cx="10515600" cy="2169825"/>
+            <a:ext cx="10515600" cy="4754880"/>
           </a:xfrm>
           <a:prstGeom prst="rect">
             <a:avLst/>
@@ -8267,38 +8126,8 @@
               </a:defRPr>
             </a:pPr>
             <a:r>
-              <a:rPr dirty="0"/>
-              <a:t>• Test Engineer / QA: </a:t>
-            </a:r>
-            <a:r>
-              <a:rPr dirty="0" err="1"/>
-              <a:t>Testdesign</a:t>
-            </a:r>
-            <a:r>
-              <a:rPr dirty="0"/>
-              <a:t>, </a:t>
-            </a:r>
-            <a:r>
-              <a:rPr dirty="0" err="1"/>
-              <a:t>Automatisierung</a:t>
-            </a:r>
-            <a:r>
-              <a:rPr dirty="0"/>
-              <a:t>, </a:t>
-            </a:r>
-            <a:r>
-              <a:rPr dirty="0" err="1"/>
-              <a:t>Wartung</a:t>
-            </a:r>
-            <a:r>
-              <a:rPr dirty="0"/>
-              <a:t> und </a:t>
-            </a:r>
-            <a:r>
-              <a:rPr dirty="0" err="1"/>
-              <a:t>Analyse</a:t>
-            </a:r>
-            <a:endParaRPr dirty="0"/>
+              <a:t>• Open Source kann Lizenzkosten reduzieren – ist aber nicht kostenlos</a:t>
+            </a:r>
           </a:p>
           <a:p>
             <a:pPr>
@@ -8310,46 +8139,8 @@
               </a:defRPr>
             </a:pPr>
             <a:r>
-              <a:rPr dirty="0"/>
-              <a:t>• </a:t>
-            </a:r>
-            <a:r>
-              <a:rPr lang="de-DE" dirty="0"/>
-              <a:t>Developer / QA</a:t>
-            </a:r>
-            <a:r>
-              <a:rPr dirty="0"/>
-              <a:t>: </a:t>
-            </a:r>
-            <a:r>
-              <a:rPr dirty="0" err="1"/>
-              <a:t>Unterstützung</a:t>
-            </a:r>
-            <a:r>
-              <a:rPr dirty="0"/>
-              <a:t> </a:t>
-            </a:r>
-            <a:r>
-              <a:rPr dirty="0" err="1"/>
-              <a:t>bei</a:t>
-            </a:r>
-            <a:r>
-              <a:rPr dirty="0"/>
-              <a:t> </a:t>
-            </a:r>
-            <a:r>
-              <a:rPr dirty="0" err="1"/>
-              <a:t>Architektur</a:t>
-            </a:r>
-            <a:r>
-              <a:rPr dirty="0"/>
-              <a:t>, </a:t>
-            </a:r>
-            <a:r>
-              <a:rPr dirty="0" err="1"/>
-              <a:t>Codequalität</a:t>
-            </a:r>
-            <a:endParaRPr dirty="0"/>
+              <a:t>• Weitere Kosten: Schulung, Entwicklung, Wartung, CI-Infrastruktur, Testdaten und Geräte</a:t>
+            </a:r>
           </a:p>
           <a:p>
             <a:pPr>
@@ -8361,30 +8152,8 @@
               </a:defRPr>
             </a:pPr>
             <a:r>
-              <a:rPr dirty="0"/>
-              <a:t>• Product Owner / Business: </a:t>
-            </a:r>
-            <a:r>
-              <a:rPr dirty="0" err="1"/>
-              <a:t>fachliche</a:t>
-            </a:r>
-            <a:r>
-              <a:rPr dirty="0"/>
-              <a:t> </a:t>
-            </a:r>
-            <a:r>
-              <a:rPr dirty="0" err="1"/>
-              <a:t>Akzeptanzkriterien</a:t>
-            </a:r>
-            <a:r>
-              <a:rPr dirty="0"/>
-              <a:t> und </a:t>
-            </a:r>
-            <a:r>
-              <a:rPr dirty="0" err="1"/>
-              <a:t>Priorisierung</a:t>
-            </a:r>
-            <a:endParaRPr dirty="0"/>
+              <a:t>• Kommerzielle Tools können durch Support und geringeren Initialaufwand sinnvoll sein</a:t>
+            </a:r>
           </a:p>
           <a:p>
             <a:pPr>
@@ -8396,22 +8165,8 @@
               </a:defRPr>
             </a:pPr>
             <a:r>
-              <a:rPr dirty="0"/>
-              <a:t>• DevOps: CI/CD, </a:t>
-            </a:r>
-            <a:r>
-              <a:rPr dirty="0" err="1"/>
-              <a:t>Infrastruktur</a:t>
-            </a:r>
-            <a:r>
-              <a:rPr dirty="0"/>
-              <a:t>, Secrets und </a:t>
-            </a:r>
-            <a:r>
-              <a:rPr dirty="0" err="1"/>
-              <a:t>Testumgebungen</a:t>
-            </a:r>
-            <a:endParaRPr dirty="0"/>
+              <a:t>• Daher: Total Cost of Ownership über 2–3 Jahre betrachten</a:t>
+            </a:r>
           </a:p>
           <a:p>
             <a:pPr>
@@ -8423,70 +8178,8 @@
               </a:defRPr>
             </a:pPr>
             <a:r>
-              <a:rPr dirty="0"/>
-              <a:t>• </a:t>
-            </a:r>
-            <a:r>
-              <a:rPr dirty="0" err="1"/>
-              <a:t>Empfehlung</a:t>
-            </a:r>
-            <a:r>
-              <a:rPr dirty="0"/>
-              <a:t>: </a:t>
-            </a:r>
-            <a:r>
-              <a:rPr dirty="0" err="1"/>
-              <a:t>Verantwortlichkeiten</a:t>
-            </a:r>
-            <a:r>
-              <a:rPr dirty="0"/>
-              <a:t> </a:t>
-            </a:r>
-            <a:r>
-              <a:rPr dirty="0" err="1"/>
-              <a:t>früh</a:t>
-            </a:r>
-            <a:r>
-              <a:rPr dirty="0"/>
-              <a:t> </a:t>
-            </a:r>
-            <a:r>
-              <a:rPr dirty="0" err="1"/>
-              <a:t>klären</a:t>
-            </a:r>
-            <a:r>
-              <a:rPr dirty="0"/>
-              <a:t> und </a:t>
-            </a:r>
-            <a:r>
-              <a:rPr dirty="0" err="1"/>
-              <a:t>ein</a:t>
-            </a:r>
-            <a:r>
-              <a:rPr dirty="0"/>
-              <a:t> </a:t>
-            </a:r>
-            <a:r>
-              <a:rPr dirty="0" err="1"/>
-              <a:t>kleines</a:t>
-            </a:r>
-            <a:r>
-              <a:rPr dirty="0"/>
-              <a:t> </a:t>
-            </a:r>
-            <a:r>
-              <a:rPr dirty="0" err="1"/>
-              <a:t>Kernteam</a:t>
-            </a:r>
-            <a:r>
-              <a:rPr dirty="0"/>
-              <a:t> </a:t>
-            </a:r>
-            <a:r>
-              <a:rPr dirty="0" err="1"/>
-              <a:t>benennen</a:t>
-            </a:r>
-            <a:endParaRPr dirty="0"/>
+              <a:t>• Budgetentscheidung anhand von Nutzen, Risiko und Aufwand treffen</a:t>
+            </a:r>
           </a:p>
         </p:txBody>
       </p:sp>
@@ -8516,7 +8209,7 @@
               <a:defRPr sz="900"/>
             </a:pPr>
             <a:r>
-              <a:t>08</a:t>
+              <a:t>09</a:t>
             </a:r>
           </a:p>
         </p:txBody>
@@ -8563,7 +8256,7 @@
         <p:spPr>
           <a:xfrm>
             <a:off x="640080" y="411480"/>
-            <a:ext cx="8513164" cy="507831"/>
+            <a:ext cx="10881360" cy="731520"/>
           </a:xfrm>
           <a:prstGeom prst="rect">
             <a:avLst/>
@@ -8582,54 +8275,8 @@
               </a:defRPr>
             </a:pPr>
             <a:r>
-              <a:rPr dirty="0"/>
-              <a:t>8. Budget: T</a:t>
-            </a:r>
-            <a:r>
-              <a:rPr lang="de-DE" dirty="0" err="1"/>
-              <a:t>otal</a:t>
-            </a:r>
-            <a:r>
-              <a:rPr lang="de-DE" dirty="0"/>
-              <a:t> </a:t>
-            </a:r>
-            <a:r>
-              <a:rPr dirty="0"/>
-              <a:t>C</a:t>
-            </a:r>
-            <a:r>
-              <a:rPr lang="de-DE" dirty="0" err="1"/>
-              <a:t>ost</a:t>
-            </a:r>
-            <a:r>
-              <a:rPr lang="de-DE" dirty="0"/>
-              <a:t> of Ownership</a:t>
-            </a:r>
-            <a:r>
-              <a:rPr dirty="0"/>
-              <a:t> </a:t>
-            </a:r>
-            <a:r>
-              <a:rPr dirty="0" err="1"/>
-              <a:t>statt</a:t>
-            </a:r>
-            <a:r>
-              <a:rPr dirty="0"/>
-              <a:t> </a:t>
-            </a:r>
-            <a:r>
-              <a:rPr dirty="0" err="1"/>
-              <a:t>nur</a:t>
-            </a:r>
-            <a:r>
-              <a:rPr dirty="0"/>
-              <a:t> </a:t>
-            </a:r>
-            <a:r>
-              <a:rPr dirty="0" err="1"/>
-              <a:t>Lizenzkosten</a:t>
-            </a:r>
-            <a:endParaRPr dirty="0"/>
+              <a:t>9. Mein Vorschlag: Proof of Concept</a:t>
+            </a:r>
           </a:p>
         </p:txBody>
       </p:sp>
@@ -8708,7 +8355,7 @@
               </a:defRPr>
             </a:pPr>
             <a:r>
-              <a:t>• Open Source kann Lizenzkosten reduzieren – ist aber nicht kostenlos</a:t>
+              <a:t>• 1. Einen kritischen Business-Prozess auswählen</a:t>
             </a:r>
           </a:p>
           <a:p>
@@ -8721,7 +8368,7 @@
               </a:defRPr>
             </a:pPr>
             <a:r>
-              <a:t>• Weitere Kosten: Schulung, Entwicklung, Wartung, CI-Infrastruktur, Testdaten und Geräte</a:t>
+              <a:t>• 2. Einen API-Test und/oder einen repräsentativen UI-Test automatisieren</a:t>
             </a:r>
           </a:p>
           <a:p>
@@ -8734,7 +8381,7 @@
               </a:defRPr>
             </a:pPr>
             <a:r>
-              <a:t>• Kommerzielle Tools können durch Support und geringeren Initialaufwand sinnvoll sein</a:t>
+              <a:t>• 3. Playwright/Selenium bzw. REST-Assured/Appium gegen Alternativen bewerten</a:t>
             </a:r>
           </a:p>
           <a:p>
@@ -8747,7 +8394,7 @@
               </a:defRPr>
             </a:pPr>
             <a:r>
-              <a:t>• Daher: Total Cost of Ownership über 2–3 Jahre betrachten</a:t>
+              <a:t>• 4. CI/CD-Ausführung, Reporting und Wartbarkeit testen</a:t>
             </a:r>
           </a:p>
           <a:p>
@@ -8760,7 +8407,20 @@
               </a:defRPr>
             </a:pPr>
             <a:r>
-              <a:t>• Budgetentscheidung anhand von Nutzen, Risiko und Aufwand treffen</a:t>
+              <a:t>• 5. Aufwand, Stabilität und Nutzen messen</a:t>
+            </a:r>
+          </a:p>
+          <a:p>
+            <a:pPr>
+              <a:spcAft>
+                <a:spcPts val="1200"/>
+              </a:spcAft>
+              <a:defRPr sz="1900">
+                <a:latin typeface="Aptos"/>
+              </a:defRPr>
+            </a:pPr>
+            <a:r>
+              <a:t>• Ergebnis: belastbare Entscheidung statt Tool-Auswahl auf Basis von Marketing oder Bauchgefühl</a:t>
             </a:r>
           </a:p>
         </p:txBody>
@@ -8791,7 +8451,7 @@
               <a:defRPr sz="900"/>
             </a:pPr>
             <a:r>
-              <a:t>09</a:t>
+              <a:t>10</a:t>
             </a:r>
           </a:p>
         </p:txBody>
@@ -8857,7 +8517,7 @@
               </a:defRPr>
             </a:pPr>
             <a:r>
-              <a:t>9. Mein Vorschlag: Proof of Concept</a:t>
+              <a:t>10. Zielbild der Einführung</a:t>
             </a:r>
           </a:p>
         </p:txBody>
@@ -8937,7 +8597,7 @@
               </a:defRPr>
             </a:pPr>
             <a:r>
-              <a:t>• 1. Einen kritischen Business-Prozess auswählen</a:t>
+              <a:t>• Phase 1: Discovery &amp; Tool-Kriterien</a:t>
             </a:r>
           </a:p>
           <a:p>
@@ -8950,7 +8610,7 @@
               </a:defRPr>
             </a:pPr>
             <a:r>
-              <a:t>• 2. Einen API-Test und/oder einen repräsentativen UI-Test automatisieren</a:t>
+              <a:t>• Phase 2: Proof of Concept</a:t>
             </a:r>
           </a:p>
           <a:p>
@@ -8963,7 +8623,7 @@
               </a:defRPr>
             </a:pPr>
             <a:r>
-              <a:t>• 3. Playwright/Selenium bzw. REST-Assured/Appium gegen Alternativen bewerten</a:t>
+              <a:t>• Phase 3: Testautomatisierungs-Architektur und Coding Standards</a:t>
             </a:r>
           </a:p>
           <a:p>
@@ -8976,7 +8636,7 @@
               </a:defRPr>
             </a:pPr>
             <a:r>
-              <a:t>• 4. CI/CD-Ausführung, Reporting und Wartbarkeit testen</a:t>
+              <a:t>• Phase 4: Pilot mit wenigen kritischen Tests</a:t>
             </a:r>
           </a:p>
           <a:p>
@@ -8989,7 +8649,7 @@
               </a:defRPr>
             </a:pPr>
             <a:r>
-              <a:t>• 5. Aufwand, Stabilität und Nutzen messen</a:t>
+              <a:t>• Phase 5: Integration in CI/CD und Reporting</a:t>
             </a:r>
           </a:p>
           <a:p>
@@ -9002,7 +8662,7 @@
               </a:defRPr>
             </a:pPr>
             <a:r>
-              <a:t>• Ergebnis: belastbare Entscheidung statt Tool-Auswahl auf Basis von Marketing oder Bauchgefühl</a:t>
+              <a:t>• Phase 6: Skalierung, Monitoring und kontinuierliche Wartung</a:t>
             </a:r>
           </a:p>
         </p:txBody>
@@ -9033,7 +8693,7 @@
               <a:defRPr sz="900"/>
             </a:pPr>
             <a:r>
-              <a:t>10</a:t>
+              <a:t>11</a:t>
             </a:r>
           </a:p>
         </p:txBody>

--- a/src/test/resources/presale-test-automation-selection-presenttation/Presales_Testautomatisierungswerkzeuge.pptx
+++ b/src/test/resources/presale-test-automation-selection-presenttation/Presales_Testautomatisierungswerkzeuge.pptx
@@ -5,21 +5,22 @@
     <p:sldMasterId id="2147483648" r:id="rId1"/>
   </p:sldMasterIdLst>
   <p:notesMasterIdLst>
-    <p:notesMasterId r:id="rId14"/>
+    <p:notesMasterId r:id="rId15"/>
   </p:notesMasterIdLst>
   <p:sldIdLst>
     <p:sldId id="256" r:id="rId2"/>
-    <p:sldId id="257" r:id="rId3"/>
-    <p:sldId id="258" r:id="rId4"/>
-    <p:sldId id="259" r:id="rId5"/>
-    <p:sldId id="260" r:id="rId6"/>
-    <p:sldId id="263" r:id="rId7"/>
-    <p:sldId id="264" r:id="rId8"/>
-    <p:sldId id="265" r:id="rId9"/>
-    <p:sldId id="266" r:id="rId10"/>
-    <p:sldId id="267" r:id="rId11"/>
-    <p:sldId id="268" r:id="rId12"/>
-    <p:sldId id="269" r:id="rId13"/>
+    <p:sldId id="270" r:id="rId3"/>
+    <p:sldId id="257" r:id="rId4"/>
+    <p:sldId id="258" r:id="rId5"/>
+    <p:sldId id="259" r:id="rId6"/>
+    <p:sldId id="260" r:id="rId7"/>
+    <p:sldId id="263" r:id="rId8"/>
+    <p:sldId id="264" r:id="rId9"/>
+    <p:sldId id="265" r:id="rId10"/>
+    <p:sldId id="266" r:id="rId11"/>
+    <p:sldId id="267" r:id="rId12"/>
+    <p:sldId id="268" r:id="rId13"/>
+    <p:sldId id="269" r:id="rId14"/>
   </p:sldIdLst>
   <p:sldSz cx="12192000" cy="6858000"/>
   <p:notesSz cx="6858000" cy="9144000"/>
@@ -401,7 +402,7 @@
           <a:lstStyle/>
           <a:p>
             <a:r>
-              <a:t>Sprechtext – ca. 1:00 Min.</a:t>
+              <a:t>Sprechtext – ca. 1:15 Min.</a:t>
             </a:r>
           </a:p>
           <a:p>
@@ -409,7 +410,7 @@
           </a:p>
           <a:p>
             <a:r>
-              <a:t>„Zum Schluss brauchen wir messbare Erfolgskriterien.</a:t>
+              <a:t>„Nach dem PoC würde ich die Einführung schrittweise durchführen.</a:t>
             </a:r>
           </a:p>
           <a:p>
@@ -417,7 +418,7 @@
           </a:p>
           <a:p>
             <a:r>
-              <a:t>Wir können beispielsweise betrachten, wie stabil die Tests sind, wie schnell Feedback geliefert wird und wie viel manuelle Regression eingespart wird.</a:t>
+              <a:t>Zuerst definieren wir Architektur und Standards. Dazu gehören beispielsweise Projektstruktur, Naming, Selektoren, Testdaten, Logging und Reporting.</a:t>
             </a:r>
           </a:p>
           <a:p>
@@ -425,7 +426,7 @@
           </a:p>
           <a:p>
             <a:r>
-              <a:t>Auch die Fehlersuche ist wichtig. Ein Test, der nur ‚failed‘ meldet, hilft wenig. Gute Logs, Reports und Traces können hier einen großen Unterschied machen.</a:t>
+              <a:t>Danach starten wir mit einem kleinen Pilotumfang.</a:t>
             </a:r>
           </a:p>
           <a:p>
@@ -433,7 +434,7 @@
           </a:p>
           <a:p>
             <a:r>
-              <a:t>Und natürlich müssen wir die Wartungskosten beobachten.</a:t>
+              <a:t>Wenn dieser stabil läuft, integrieren wir die Tests in die CI/CD-Pipeline und erweitern anschließend Schritt für Schritt.</a:t>
             </a:r>
           </a:p>
           <a:p>
@@ -441,7 +442,7 @@
           </a:p>
           <a:p>
             <a:r>
-              <a:t>Automatisierung ist für mich dann erfolgreich, wenn sie dauerhaft einen schnelleren und zuverlässigeren Feedback-Prozess ermöglicht.“</a:t>
+              <a:t>Ich würde bewusst vermeiden, sofort die gesamte Regression zu automatisieren. Eine schrittweise Einführung reduziert technische und organisatorische Risiken.“</a:t>
             </a:r>
           </a:p>
         </p:txBody>
@@ -511,7 +512,7 @@
           <a:lstStyle/>
           <a:p>
             <a:r>
-              <a:t>Sprechtext – ca. 1:15 Min.</a:t>
+              <a:t>Sprechtext – ca. 1:00 Min.</a:t>
             </a:r>
           </a:p>
           <a:p>
@@ -519,7 +520,7 @@
           </a:p>
           <a:p>
             <a:r>
-              <a:t>„Meine Empfehlung wäre daher zusammengefasst: Wir treffen heute noch keine endgültige Toolentscheidung.</a:t>
+              <a:t>„Zum Schluss brauchen wir messbare Erfolgskriterien.</a:t>
             </a:r>
           </a:p>
           <a:p>
@@ -527,7 +528,7 @@
           </a:p>
           <a:p>
             <a:r>
-              <a:t>Wir starten mit einer strukturierten Discovery, definieren gemeinsam die Auswahlkriterien und führen anschließend einen kleinen PoC durch.</a:t>
+              <a:t>Wir können beispielsweise betrachten, wie stabil die Tests sind, wie schnell Feedback geliefert wird und wie viel manuelle Regression eingespart wird.</a:t>
             </a:r>
           </a:p>
           <a:p>
@@ -535,7 +536,7 @@
           </a:p>
           <a:p>
             <a:r>
-              <a:t>Bei Web würde ich Playwright als starken Kandidaten aufnehmen. Bei APIs beispielsweise REST Assured, abhängig vom Technologie-Stack, und für Mobile Appium.</a:t>
+              <a:t>Auch die Fehlersuche ist wichtig. Ein Test, der nur ‚failed‘ meldet, hilft wenig. Gute Logs, Reports und Traces können hier einen großen Unterschied machen.</a:t>
             </a:r>
           </a:p>
           <a:p>
@@ -543,7 +544,7 @@
           </a:p>
           <a:p>
             <a:r>
-              <a:t>Open Source ist bei einem noch offenen Budget ein sinnvoller Ausgangspunkt, aber wir betrachten die Gesamtbetriebskosten.</a:t>
+              <a:t>Und natürlich müssen wir die Wartungskosten beobachten.</a:t>
             </a:r>
           </a:p>
           <a:p>
@@ -551,7 +552,7 @@
           </a:p>
           <a:p>
             <a:r>
-              <a:t>Der nächste konkrete Schritt wäre ein Workshop mit Product Owner, QA beziehungsweise Test, Entwicklung und DevOps. Dort können wir die offenen Fragen beantworten und anschließend den PoC definieren.“</a:t>
+              <a:t>Automatisierung ist für mich dann erfolgreich, wenn sie dauerhaft einen schnelleren und zuverlässigeren Feedback-Prozess ermöglicht.“</a:t>
             </a:r>
           </a:p>
         </p:txBody>
@@ -621,7 +622,7 @@
           <a:lstStyle/>
           <a:p>
             <a:r>
-              <a:t>Sprechtext – ca. 1:00 Min.</a:t>
+              <a:t>Sprechtext – ca. 1:15 Min.</a:t>
             </a:r>
           </a:p>
           <a:p>
@@ -629,7 +630,7 @@
           </a:p>
           <a:p>
             <a:r>
-              <a:t>„Damit würde ich gerne in die Diskussion mit Ihnen gehen.</a:t>
+              <a:t>„Meine Empfehlung wäre daher zusammengefasst: Wir treffen heute noch keine endgültige Toolentscheidung.</a:t>
             </a:r>
           </a:p>
           <a:p>
@@ -637,7 +638,7 @@
           </a:p>
           <a:p>
             <a:r>
-              <a:t>Mich würden zunächst sechs Dinge besonders interessieren:</a:t>
+              <a:t>Wir starten mit einer strukturierten Discovery, definieren gemeinsam die Auswahlkriterien und führen anschließend einen kleinen PoC durch.</a:t>
             </a:r>
           </a:p>
           <a:p>
@@ -645,7 +646,7 @@
           </a:p>
           <a:p>
             <a:r>
-              <a:t>Welche Produkte und Technologien sollen getestet werden?</a:t>
+              <a:t>Bei Web würde ich Playwright als starken Kandidaten aufnehmen. Bei APIs beispielsweise REST Assured, abhängig vom Technologie-Stack, und für Mobile Appium.</a:t>
             </a:r>
           </a:p>
           <a:p>
@@ -653,7 +654,7 @@
           </a:p>
           <a:p>
             <a:r>
-              <a:t>Welche Geschäftsprozesse sind besonders kritisch?</a:t>
+              <a:t>Open Source ist bei einem noch offenen Budget ein sinnvoller Ausgangspunkt, aber wir betrachten die Gesamtbetriebskosten.</a:t>
             </a:r>
           </a:p>
           <a:p>
@@ -661,47 +662,7 @@
           </a:p>
           <a:p>
             <a:r>
-              <a:t>Wer wird zukünftig für die Automatisierung verantwortlich sein?</a:t>
-            </a:r>
-          </a:p>
-          <a:p>
-            <a:endParaRPr/>
-          </a:p>
-          <a:p>
-            <a:r>
-              <a:t>Welche CI/CD-Landschaft gibt es bereits?</a:t>
-            </a:r>
-          </a:p>
-          <a:p>
-            <a:endParaRPr/>
-          </a:p>
-          <a:p>
-            <a:r>
-              <a:t>Welche Anforderungen bestehen an Reporting, Compliance und Nachvollziehbarkeit?</a:t>
-            </a:r>
-          </a:p>
-          <a:p>
-            <a:endParaRPr/>
-          </a:p>
-          <a:p>
-            <a:r>
-              <a:t>Und welches Budget beziehungsweise welche internen Kapazitäten stehen zur Verfügung?</a:t>
-            </a:r>
-          </a:p>
-          <a:p>
-            <a:endParaRPr/>
-          </a:p>
-          <a:p>
-            <a:r>
-              <a:t>Mit diesen Informationen können wir aus einer allgemeinen Tooldiskussion eine konkrete und belastbare Entscheidung machen.</a:t>
-            </a:r>
-          </a:p>
-          <a:p>
-            <a:endParaRPr/>
-          </a:p>
-          <a:p>
-            <a:r>
-              <a:t>Vielen Dank.“</a:t>
+              <a:t>Der nächste konkrete Schritt wäre ein Workshop mit Product Owner, QA beziehungsweise Test, Entwicklung und DevOps. Dort können wir die offenen Fragen beantworten und anschließend den PoC definieren.“</a:t>
             </a:r>
           </a:p>
         </p:txBody>
@@ -726,7 +687,7 @@
 </p:notes>
 </file>
 
-<file path=ppt/notesSlides/notesSlide2.xml><?xml version="1.0" encoding="utf-8"?>
+<file path=ppt/notesSlides/notesSlide13.xml><?xml version="1.0" encoding="utf-8"?>
 <p:notes xmlns:a="http://schemas.openxmlformats.org/drawingml/2006/main" xmlns:r="http://schemas.openxmlformats.org/officeDocument/2006/relationships" xmlns:p="http://schemas.openxmlformats.org/presentationml/2006/main">
   <p:cSld>
     <p:spTree>
@@ -771,7 +732,7 @@
           <a:lstStyle/>
           <a:p>
             <a:r>
-              <a:t>Sprechtext – ca. 1:15 Min.</a:t>
+              <a:t>Sprechtext – ca. 1:00 Min.</a:t>
             </a:r>
           </a:p>
           <a:p>
@@ -779,7 +740,7 @@
           </a:p>
           <a:p>
             <a:r>
-              <a:t>„Aus meiner Sicht haben wir hier mehrere offene Punkte, die für die Toolauswahl entscheidend sind.</a:t>
+              <a:t>„Damit würde ich gerne in die Diskussion mit Ihnen gehen.</a:t>
             </a:r>
           </a:p>
           <a:p>
@@ -787,7 +748,7 @@
           </a:p>
           <a:p>
             <a:r>
-              <a:t>Erstens kennen wir die technische Landschaft noch nicht. Handelt es sich um eine Webanwendung, Mobile App, APIs oder eine Kombination?</a:t>
+              <a:t>Mich würden zunächst sechs Dinge besonders interessieren:</a:t>
             </a:r>
           </a:p>
           <a:p>
@@ -795,7 +756,7 @@
           </a:p>
           <a:p>
             <a:r>
-              <a:t>Zweitens ist die organisatorische Frage wichtig: Wer schreibt später die Tests? Tester, Entwickler, ein eigenes Automation-Team oder vielleicht ein gemischtes Team?</a:t>
+              <a:t>Welche Produkte und Technologien sollen getestet werden?</a:t>
             </a:r>
           </a:p>
           <a:p>
@@ -803,7 +764,7 @@
           </a:p>
           <a:p>
             <a:r>
-              <a:t>Und drittens müssen wir das Budget berücksichtigen. Dabei würde ich nicht nur auf Lizenzkosten schauen, sondern auf die gesamten Kosten über den Lebenszyklus.</a:t>
+              <a:t>Welche Geschäftsprozesse sind besonders kritisch?</a:t>
             </a:r>
           </a:p>
           <a:p>
@@ -811,7 +772,47 @@
           </a:p>
           <a:p>
             <a:r>
-              <a:t>Daher würde ich bewusst noch keine finale Toolentscheidung treffen. Genau diese Offenheit ist in einer Presales-Situation aus meiner Sicht ein Vorteil.“</a:t>
+              <a:t>Wer wird zukünftig für die Automatisierung verantwortlich sein?</a:t>
+            </a:r>
+          </a:p>
+          <a:p>
+            <a:endParaRPr/>
+          </a:p>
+          <a:p>
+            <a:r>
+              <a:t>Welche CI/CD-Landschaft gibt es bereits?</a:t>
+            </a:r>
+          </a:p>
+          <a:p>
+            <a:endParaRPr/>
+          </a:p>
+          <a:p>
+            <a:r>
+              <a:t>Welche Anforderungen bestehen an Reporting, Compliance und Nachvollziehbarkeit?</a:t>
+            </a:r>
+          </a:p>
+          <a:p>
+            <a:endParaRPr/>
+          </a:p>
+          <a:p>
+            <a:r>
+              <a:t>Und welches Budget beziehungsweise welche internen Kapazitäten stehen zur Verfügung?</a:t>
+            </a:r>
+          </a:p>
+          <a:p>
+            <a:endParaRPr/>
+          </a:p>
+          <a:p>
+            <a:r>
+              <a:t>Mit diesen Informationen können wir aus einer allgemeinen Tooldiskussion eine konkrete und belastbare Entscheidung machen.</a:t>
+            </a:r>
+          </a:p>
+          <a:p>
+            <a:endParaRPr/>
+          </a:p>
+          <a:p>
+            <a:r>
+              <a:t>Vielen Dank.“</a:t>
             </a:r>
           </a:p>
         </p:txBody>
@@ -829,6 +830,129 @@
         <p:spPr/>
       </p:sp>
     </p:spTree>
+  </p:cSld>
+  <p:clrMapOvr>
+    <a:masterClrMapping/>
+  </p:clrMapOvr>
+</p:notes>
+</file>
+
+<file path=ppt/notesSlides/notesSlide2.xml><?xml version="1.0" encoding="utf-8"?>
+<p:notes xmlns:a="http://schemas.openxmlformats.org/drawingml/2006/main" xmlns:r="http://schemas.openxmlformats.org/officeDocument/2006/relationships" xmlns:p="http://schemas.openxmlformats.org/presentationml/2006/main">
+  <p:cSld>
+    <p:spTree>
+      <p:nvGrpSpPr>
+        <p:cNvPr id="1" name="">
+          <a:extLst>
+            <a:ext uri="{FF2B5EF4-FFF2-40B4-BE49-F238E27FC236}">
+              <a16:creationId xmlns:a16="http://schemas.microsoft.com/office/drawing/2014/main" id="{E0E8B377-ED87-D1DE-BCC6-5E04850DA519}"/>
+            </a:ext>
+          </a:extLst>
+        </p:cNvPr>
+        <p:cNvGrpSpPr/>
+        <p:nvPr/>
+      </p:nvGrpSpPr>
+      <p:grpSpPr>
+        <a:xfrm>
+          <a:off x="0" y="0"/>
+          <a:ext cx="0" cy="0"/>
+          <a:chOff x="0" y="0"/>
+          <a:chExt cx="0" cy="0"/>
+        </a:xfrm>
+      </p:grpSpPr>
+      <p:sp>
+        <p:nvSpPr>
+          <p:cNvPr id="2" name="Slide Image Placeholder 1">
+            <a:extLst>
+              <a:ext uri="{FF2B5EF4-FFF2-40B4-BE49-F238E27FC236}">
+                <a16:creationId xmlns:a16="http://schemas.microsoft.com/office/drawing/2014/main" id="{E4AF4DE1-8322-334F-681D-CA481E15D204}"/>
+              </a:ext>
+            </a:extLst>
+          </p:cNvPr>
+          <p:cNvSpPr>
+            <a:spLocks noGrp="1" noRot="1" noChangeAspect="1"/>
+          </p:cNvSpPr>
+          <p:nvPr>
+            <p:ph type="sldImg" idx="2"/>
+          </p:nvPr>
+        </p:nvSpPr>
+        <p:spPr/>
+      </p:sp>
+      <p:sp>
+        <p:nvSpPr>
+          <p:cNvPr id="3" name="Notes Placeholder 2">
+            <a:extLst>
+              <a:ext uri="{FF2B5EF4-FFF2-40B4-BE49-F238E27FC236}">
+                <a16:creationId xmlns:a16="http://schemas.microsoft.com/office/drawing/2014/main" id="{651B8DE8-8813-A92C-C4CC-4B237397FE7A}"/>
+              </a:ext>
+            </a:extLst>
+          </p:cNvPr>
+          <p:cNvSpPr>
+            <a:spLocks noGrp="1"/>
+          </p:cNvSpPr>
+          <p:nvPr>
+            <p:ph type="body" sz="quarter" idx="3"/>
+          </p:nvPr>
+        </p:nvSpPr>
+        <p:spPr/>
+        <p:txBody>
+          <a:bodyPr/>
+          <a:lstStyle/>
+          <a:p>
+            <a:r>
+              <a:t>Sprechtext – ca. 1:00 Min.</a:t>
+            </a:r>
+          </a:p>
+          <a:p>
+            <a:endParaRPr/>
+          </a:p>
+          <a:p>
+            <a:r>
+              <a:t>„Herzlich willkommen. In diesem Workshop möchte ich nicht einfach ein bestimmtes Testautomatisierungswerkzeug verkaufen. Mein Ziel ist vielmehr, gemeinsam mit Ihnen herauszufinden, welches Werkzeug zu Ihrem Produkt, Ihrer technischen Landschaft und vor allem zu Ihrem Team passt.</a:t>
+            </a:r>
+          </a:p>
+          <a:p>
+            <a:endParaRPr/>
+          </a:p>
+          <a:p>
+            <a:r>
+              <a:t>Die Ausgangssituation ist interessant: Wir wissen aktuell noch nicht, welche Produkte und Technologien im Einsatz sind, wer die Automatisierung später verantwortet und welches Budget zur Verfügung steht.</a:t>
+            </a:r>
+          </a:p>
+          <a:p>
+            <a:endParaRPr/>
+          </a:p>
+          <a:p>
+            <a:r>
+              <a:t>Deshalb ist mein Ansatz: Erst verstehen, dann bewerten und anschließend anhand eines kleinen Proof of Concepts eine belastbare Entscheidung treffen.“</a:t>
+            </a:r>
+          </a:p>
+        </p:txBody>
+      </p:sp>
+      <p:sp>
+        <p:nvSpPr>
+          <p:cNvPr id="4" name="Slide Number Placeholder 3">
+            <a:extLst>
+              <a:ext uri="{FF2B5EF4-FFF2-40B4-BE49-F238E27FC236}">
+                <a16:creationId xmlns:a16="http://schemas.microsoft.com/office/drawing/2014/main" id="{479C4E66-8C9A-71F0-1627-6149303FA0CB}"/>
+              </a:ext>
+            </a:extLst>
+          </p:cNvPr>
+          <p:cNvSpPr>
+            <a:spLocks noGrp="1"/>
+          </p:cNvSpPr>
+          <p:nvPr>
+            <p:ph type="sldNum" sz="quarter" idx="5"/>
+          </p:nvPr>
+        </p:nvSpPr>
+        <p:spPr/>
+      </p:sp>
+    </p:spTree>
+    <p:extLst>
+      <p:ext uri="{BB962C8B-B14F-4D97-AF65-F5344CB8AC3E}">
+        <p14:creationId xmlns:p14="http://schemas.microsoft.com/office/powerpoint/2010/main" val="510313460"/>
+      </p:ext>
+    </p:extLst>
   </p:cSld>
   <p:clrMapOvr>
     <a:masterClrMapping/>
@@ -881,7 +1005,7 @@
           <a:lstStyle/>
           <a:p>
             <a:r>
-              <a:t>Sprechtext – ca. 1:30 Min.</a:t>
+              <a:t>Sprechtext – ca. 1:15 Min.</a:t>
             </a:r>
           </a:p>
           <a:p>
@@ -889,7 +1013,7 @@
           </a:p>
           <a:p>
             <a:r>
-              <a:t>„Mein erster Schritt wäre eine Discovery-Phase.</a:t>
+              <a:t>„Aus meiner Sicht haben wir hier mehrere offene Punkte, die für die Toolauswahl entscheidend sind.</a:t>
             </a:r>
           </a:p>
           <a:p>
@@ -897,7 +1021,7 @@
           </a:p>
           <a:p>
             <a:r>
-              <a:t>Ich würde mir zunächst User Stories und Acceptance Criteria ansehen. Danach würde ich das Produkt selbst explorativ testen. Das ist wichtig, weil man dadurch nicht nur die Dokumentation kennt, sondern auch versteht, wie das Produkt tatsächlich funktioniert.</a:t>
+              <a:t>Erstens kennen wir die technische Landschaft noch nicht. Handelt es sich um eine Webanwendung, Mobile App, APIs oder eine Kombination?</a:t>
             </a:r>
           </a:p>
           <a:p>
@@ -905,7 +1029,7 @@
           </a:p>
           <a:p>
             <a:r>
-              <a:t>Dabei würde ich Fragen stellen wie: Welche Geschäftsprozesse sind kritisch? Wo entstehen häufig Fehler? Welche Funktionen werden sehr häufig verwendet? Welche Regressionstests kosten heute besonders viel Zeit?</a:t>
+              <a:t>Zweitens ist die organisatorische Frage wichtig: Wer schreibt später die Tests? Tester, Entwickler, ein eigenes Automation-Team oder vielleicht ein gemischtes Team?</a:t>
             </a:r>
           </a:p>
           <a:p>
@@ -913,7 +1037,7 @@
           </a:p>
           <a:p>
             <a:r>
-              <a:t>Zusätzlich würde ich die technische Umgebung untersuchen: Browser, APIs, Mobile Devices, CI/CD, Versionsverwaltung, Testdaten und vorhandene Testframeworks.</a:t>
+              <a:t>Und drittens müssen wir das Budget berücksichtigen. Dabei würde ich nicht nur auf Lizenzkosten schauen, sondern auf die gesamten Kosten über den Lebenszyklus.</a:t>
             </a:r>
           </a:p>
           <a:p>
@@ -921,7 +1045,7 @@
           </a:p>
           <a:p>
             <a:r>
-              <a:t>Das Ziel ist nicht, möglichst viele Tests zu automatisieren. Das Ziel ist, die richtigen Tests zu automatisieren.“</a:t>
+              <a:t>Daher würde ich bewusst noch keine finale Toolentscheidung treffen. Genau diese Offenheit ist in einer Presales-Situation aus meiner Sicht ein Vorteil.“</a:t>
             </a:r>
           </a:p>
         </p:txBody>
@@ -991,7 +1115,7 @@
           <a:lstStyle/>
           <a:p>
             <a:r>
-              <a:t>Sprechtext – ca. 1:20 Min.</a:t>
+              <a:t>Sprechtext – ca. 1:30 Min.</a:t>
             </a:r>
           </a:p>
           <a:p>
@@ -999,7 +1123,7 @@
           </a:p>
           <a:p>
             <a:r>
-              <a:t>„Danach würde ich gemeinsam mit dem Kunden Kriterien für die Werkzeugauswahl definieren.</a:t>
+              <a:t>„Mein erster Schritt wäre eine Discovery-Phase.</a:t>
             </a:r>
           </a:p>
           <a:p>
@@ -1007,7 +1131,7 @@
           </a:p>
           <a:p>
             <a:r>
-              <a:t>Ein Werkzeug muss natürlich technisch geeignet sein. Aber technische Eignung alleine reicht nicht.</a:t>
+              <a:t>Ich würde mir zunächst User Stories und Acceptance Criteria ansehen. Danach würde ich das Produkt selbst explorativ testen. Das ist wichtig, weil man dadurch nicht nur die Dokumentation kennt, sondern auch versteht, wie das Produkt tatsächlich funktioniert.</a:t>
             </a:r>
           </a:p>
           <a:p>
@@ -1015,7 +1139,7 @@
           </a:p>
           <a:p>
             <a:r>
-              <a:t>Wir müssen auch betrachten, wie einfach das Framework für das zukünftige Team zu lernen und zu warten ist. Ein Test, der heute funktioniert, aber in drei Monaten schwer wartbar ist, ist keine gute Automatisierung.</a:t>
+              <a:t>Dabei würde ich Fragen stellen wie: Welche Geschäftsprozesse sind kritisch? Wo entstehen häufig Fehler? Welche Funktionen werden sehr häufig verwendet? Welche Regressionstests kosten heute besonders viel Zeit?</a:t>
             </a:r>
           </a:p>
           <a:p>
@@ -1023,7 +1147,7 @@
           </a:p>
           <a:p>
             <a:r>
-              <a:t>Weitere Kriterien wären die Integration in CI/CD, Parallelisierung, Reporting, Debugging, Community beziehungsweise Support und natürlich Kosten.</a:t>
+              <a:t>Zusätzlich würde ich die technische Umgebung untersuchen: Browser, APIs, Mobile Devices, CI/CD, Versionsverwaltung, Testdaten und vorhandene Testframeworks.</a:t>
             </a:r>
           </a:p>
           <a:p>
@@ -1031,7 +1155,7 @@
           </a:p>
           <a:p>
             <a:r>
-              <a:t>Ein wichtiger Punkt ist außerdem die Wartbarkeit. Für mich ist ein einfach zu wartender Test langfristig wertvoller als ein Test, der zwar schnell entwickelt wurde, aber ständig angepasst werden muss.“</a:t>
+              <a:t>Das Ziel ist nicht, möglichst viele Tests zu automatisieren. Das Ziel ist, die richtigen Tests zu automatisieren.“</a:t>
             </a:r>
           </a:p>
         </p:txBody>
@@ -1109,7 +1233,7 @@
           </a:p>
           <a:p>
             <a:r>
-              <a:t>„Bei den konkreten Werkzeugen würde ich abhängig vom Produkt verschiedene Kandidaten betrachten.</a:t>
+              <a:t>„Danach würde ich gemeinsam mit dem Kunden Kriterien für die Werkzeugauswahl definieren.</a:t>
             </a:r>
           </a:p>
           <a:p>
@@ -1117,7 +1241,7 @@
           </a:p>
           <a:p>
             <a:r>
-              <a:t>Für Webanwendungen wären Playwright und Selenium naheliegende Kandidaten.</a:t>
+              <a:t>Ein Werkzeug muss natürlich technisch geeignet sein. Aber technische Eignung alleine reicht nicht.</a:t>
             </a:r>
           </a:p>
           <a:p>
@@ -1125,7 +1249,7 @@
           </a:p>
           <a:p>
             <a:r>
-              <a:t>Für API- und Backend-Tests kann beispielsweise REST Assured interessant sein, insbesondere wenn die Entwicklungslandschaft Java-basiert ist. Alternativ können API-Funktionen eines modernen E2E-Frameworks ausreichend sein.</a:t>
+              <a:t>Wir müssen auch betrachten, wie einfach das Framework für das zukünftige Team zu lernen und zu warten ist. Ein Test, der heute funktioniert, aber in drei Monaten schwer wartbar ist, ist keine gute Automatisierung.</a:t>
             </a:r>
           </a:p>
           <a:p>
@@ -1133,7 +1257,7 @@
           </a:p>
           <a:p>
             <a:r>
-              <a:t>Für Mobile würde ich Appium als Kandidaten betrachten. Hier muss zusätzlich die Frage nach realen Geräten, Emulatoren, Simulatoren oder einer Device Cloud geklärt werden.</a:t>
+              <a:t>Weitere Kriterien wären die Integration in CI/CD, Parallelisierung, Reporting, Debugging, Community beziehungsweise Support und natürlich Kosten.</a:t>
             </a:r>
           </a:p>
           <a:p>
@@ -1141,7 +1265,7 @@
           </a:p>
           <a:p>
             <a:r>
-              <a:t>Wichtig ist: Ich würde nicht versuchen, zwanghaft ein einziges Werkzeug für alle Testarten einzusetzen. Die Architektur sollte zum Produkt passen.“</a:t>
+              <a:t>Ein wichtiger Punkt ist außerdem die Wartbarkeit. Für mich ist ein einfach zu wartender Test langfristig wertvoller als ein Test, der zwar schnell entwickelt wurde, aber ständig angepasst werden muss.“</a:t>
             </a:r>
           </a:p>
         </p:txBody>
@@ -1211,7 +1335,7 @@
           <a:lstStyle/>
           <a:p>
             <a:r>
-              <a:t>Sprechtext – ca. 1:15 Min.</a:t>
+              <a:t>Sprechtext – ca. 1:20 Min.</a:t>
             </a:r>
           </a:p>
           <a:p>
@@ -1219,7 +1343,7 @@
           </a:p>
           <a:p>
             <a:r>
-              <a:t>„Da wir heute noch nicht wissen, wer die Automatisierung übernimmt, würde ich diese Frage sehr früh klären.</a:t>
+              <a:t>„Bei den konkreten Werkzeugen würde ich abhängig vom Produkt verschiedene Kandidaten betrachten.</a:t>
             </a:r>
           </a:p>
           <a:p>
@@ -1227,7 +1351,7 @@
           </a:p>
           <a:p>
             <a:r>
-              <a:t>Ein Test Engineer kann beispielsweise Testdesign und Automatisierung verantworten. Entwickler können bei Testbarkeit und technischer Architektur unterstützen. Der Product Owner liefert fachliche Prioritäten und Akzeptanzkriterien. DevOps unterstützt bei CI/CD und Infrastruktur.</a:t>
+              <a:t>Für Webanwendungen wären Playwright und Selenium naheliegende Kandidaten.</a:t>
             </a:r>
           </a:p>
           <a:p>
@@ -1235,7 +1359,7 @@
           </a:p>
           <a:p>
             <a:r>
-              <a:t>Ich würde deshalb ein kleines verantwortliches Kernteam definieren.</a:t>
+              <a:t>Für API- und Backend-Tests kann beispielsweise REST Assured interessant sein, insbesondere wenn die Entwicklungslandschaft Java-basiert ist. Alternativ können API-Funktionen eines modernen E2E-Frameworks ausreichend sein.</a:t>
             </a:r>
           </a:p>
           <a:p>
@@ -1243,7 +1367,7 @@
           </a:p>
           <a:p>
             <a:r>
-              <a:t>Das ist wichtig, weil Testautomatisierung kein einmaliges Projekt ist. Tests müssen gepflegt, analysiert und bei Änderungen am Produkt angepasst werden.</a:t>
+              <a:t>Für Mobile würde ich Appium als Kandidaten betrachten. Hier muss zusätzlich die Frage nach realen Geräten, Emulatoren, Simulatoren oder einer Device Cloud geklärt werden.</a:t>
             </a:r>
           </a:p>
           <a:p>
@@ -1251,7 +1375,7 @@
           </a:p>
           <a:p>
             <a:r>
-              <a:t>Die Ownership muss daher von Anfang an klar sein.“</a:t>
+              <a:t>Wichtig ist: Ich würde nicht versuchen, zwanghaft ein einziges Werkzeug für alle Testarten einzusetzen. Die Architektur sollte zum Produkt passen.“</a:t>
             </a:r>
           </a:p>
         </p:txBody>
@@ -1329,7 +1453,7 @@
           </a:p>
           <a:p>
             <a:r>
-              <a:t>„Beim Budget möchte ich eine häufige Fehlannahme vermeiden: Open Source bedeutet nicht automatisch kostenlos.</a:t>
+              <a:t>„Da wir heute noch nicht wissen, wer die Automatisierung übernimmt, würde ich diese Frage sehr früh klären.</a:t>
             </a:r>
           </a:p>
           <a:p>
@@ -1337,7 +1461,7 @@
           </a:p>
           <a:p>
             <a:r>
-              <a:t>Natürlich können wir mit Open-Source-Tools Lizenzkosten vermeiden. Aber es entstehen trotzdem Kosten für Entwicklung, Schulung, Infrastruktur, CI/CD, Testdaten, Geräte und Wartung.</a:t>
+              <a:t>Ein Test Engineer kann beispielsweise Testdesign und Automatisierung verantworten. Entwickler können bei Testbarkeit und technischer Architektur unterstützen. Der Product Owner liefert fachliche Prioritäten und Akzeptanzkriterien. DevOps unterstützt bei CI/CD und Infrastruktur.</a:t>
             </a:r>
           </a:p>
           <a:p>
@@ -1345,7 +1469,7 @@
           </a:p>
           <a:p>
             <a:r>
-              <a:t>Deshalb würde ich dem Kunden eine TCO-Betrachtung empfehlen – also Total Cost of Ownership.</a:t>
+              <a:t>Ich würde deshalb ein kleines verantwortliches Kernteam definieren.</a:t>
             </a:r>
           </a:p>
           <a:p>
@@ -1353,7 +1477,7 @@
           </a:p>
           <a:p>
             <a:r>
-              <a:t>Ein kommerzielles Werkzeug kann trotz Lizenzkosten wirtschaftlich sein, wenn beispielsweise Support, Reporting oder Administration deutlich einfacher sind.</a:t>
+              <a:t>Das ist wichtig, weil Testautomatisierung kein einmaliges Projekt ist. Tests müssen gepflegt, analysiert und bei Änderungen am Produkt angepasst werden.</a:t>
             </a:r>
           </a:p>
           <a:p>
@@ -1361,7 +1485,7 @@
           </a:p>
           <a:p>
             <a:r>
-              <a:t>Die Frage sollte also nicht sein: Was kostet das Tool? Sondern: Was kostet die gesamte Lösung und welchen Nutzen erhalten wir dafür?“</a:t>
+              <a:t>Die Ownership muss daher von Anfang an klar sein.“</a:t>
             </a:r>
           </a:p>
         </p:txBody>
@@ -1431,7 +1555,7 @@
           <a:lstStyle/>
           <a:p>
             <a:r>
-              <a:t>Sprechtext – ca. 1:30 Min.</a:t>
+              <a:t>Sprechtext – ca. 1:15 Min.</a:t>
             </a:r>
           </a:p>
           <a:p>
@@ -1439,7 +1563,7 @@
           </a:p>
           <a:p>
             <a:r>
-              <a:t>„Mein konkreter Vorschlag wäre deshalb ein Proof of Concept.</a:t>
+              <a:t>„Beim Budget möchte ich eine häufige Fehlannahme vermeiden: Open Source bedeutet nicht automatisch kostenlos.</a:t>
             </a:r>
           </a:p>
           <a:p>
@@ -1447,7 +1571,7 @@
           </a:p>
           <a:p>
             <a:r>
-              <a:t>Wir nehmen nicht hundert Testfälle, sondern einen repräsentativen und geschäftskritischen Prozess.</a:t>
+              <a:t>Natürlich können wir mit Open-Source-Tools Lizenzkosten vermeiden. Aber es entstehen trotzdem Kosten für Entwicklung, Schulung, Infrastruktur, CI/CD, Testdaten, Geräte und Wartung.</a:t>
             </a:r>
           </a:p>
           <a:p>
@@ -1455,7 +1579,7 @@
           </a:p>
           <a:p>
             <a:r>
-              <a:t>Diesen Prozess automatisieren wir beispielsweise mit Playwright und vergleichen ihn – wenn relevant – mit einer Alternative.</a:t>
+              <a:t>Deshalb würde ich dem Kunden eine TCO-Betrachtung empfehlen – also Total Cost of Ownership.</a:t>
             </a:r>
           </a:p>
           <a:p>
@@ -1463,7 +1587,7 @@
           </a:p>
           <a:p>
             <a:r>
-              <a:t>Wir schauen dabei nicht nur, ob der Test funktioniert. Wir messen auch Entwicklungsaufwand, Stabilität, Wartbarkeit, Ausführungszeit, CI/CD-Integration und Fehlersuche.</a:t>
+              <a:t>Ein kommerzielles Werkzeug kann trotz Lizenzkosten wirtschaftlich sein, wenn beispielsweise Support, Reporting oder Administration deutlich einfacher sind.</a:t>
             </a:r>
           </a:p>
           <a:p>
@@ -1471,15 +1595,7 @@
           </a:p>
           <a:p>
             <a:r>
-              <a:t>Am Ende haben wir reale Ergebnisse.</a:t>
-            </a:r>
-          </a:p>
-          <a:p>
-            <a:endParaRPr/>
-          </a:p>
-          <a:p>
-            <a:r>
-              <a:t>Das reduziert das Risiko einer falschen Toolentscheidung erheblich und gibt dem Kunden eine nachvollziehbare Grundlage für die Investitionsentscheidung.“</a:t>
+              <a:t>Die Frage sollte also nicht sein: Was kostet das Tool? Sondern: Was kostet die gesamte Lösung und welchen Nutzen erhalten wir dafür?“</a:t>
             </a:r>
           </a:p>
         </p:txBody>
@@ -1549,7 +1665,7 @@
           <a:lstStyle/>
           <a:p>
             <a:r>
-              <a:t>Sprechtext – ca. 1:15 Min.</a:t>
+              <a:t>Sprechtext – ca. 1:30 Min.</a:t>
             </a:r>
           </a:p>
           <a:p>
@@ -1557,7 +1673,7 @@
           </a:p>
           <a:p>
             <a:r>
-              <a:t>„Nach dem PoC würde ich die Einführung schrittweise durchführen.</a:t>
+              <a:t>„Mein konkreter Vorschlag wäre deshalb ein Proof of Concept.</a:t>
             </a:r>
           </a:p>
           <a:p>
@@ -1565,7 +1681,7 @@
           </a:p>
           <a:p>
             <a:r>
-              <a:t>Zuerst definieren wir Architektur und Standards. Dazu gehören beispielsweise Projektstruktur, Naming, Selektoren, Testdaten, Logging und Reporting.</a:t>
+              <a:t>Wir nehmen nicht hundert Testfälle, sondern einen repräsentativen und geschäftskritischen Prozess.</a:t>
             </a:r>
           </a:p>
           <a:p>
@@ -1573,7 +1689,7 @@
           </a:p>
           <a:p>
             <a:r>
-              <a:t>Danach starten wir mit einem kleinen Pilotumfang.</a:t>
+              <a:t>Diesen Prozess automatisieren wir beispielsweise mit Playwright und vergleichen ihn – wenn relevant – mit einer Alternative.</a:t>
             </a:r>
           </a:p>
           <a:p>
@@ -1581,7 +1697,7 @@
           </a:p>
           <a:p>
             <a:r>
-              <a:t>Wenn dieser stabil läuft, integrieren wir die Tests in die CI/CD-Pipeline und erweitern anschließend Schritt für Schritt.</a:t>
+              <a:t>Wir schauen dabei nicht nur, ob der Test funktioniert. Wir messen auch Entwicklungsaufwand, Stabilität, Wartbarkeit, Ausführungszeit, CI/CD-Integration und Fehlersuche.</a:t>
             </a:r>
           </a:p>
           <a:p>
@@ -1589,7 +1705,15 @@
           </a:p>
           <a:p>
             <a:r>
-              <a:t>Ich würde bewusst vermeiden, sofort die gesamte Regression zu automatisieren. Eine schrittweise Einführung reduziert technische und organisatorische Risiken.“</a:t>
+              <a:t>Am Ende haben wir reale Ergebnisse.</a:t>
+            </a:r>
+          </a:p>
+          <a:p>
+            <a:endParaRPr/>
+          </a:p>
+          <a:p>
+            <a:r>
+              <a:t>Das reduziert das Risiko einer falschen Toolentscheidung erheblich und gibt dem Kunden eine nachvollziehbare Grundlage für die Investitionsentscheidung.“</a:t>
             </a:r>
           </a:p>
         </p:txBody>
@@ -1793,7 +1917,7 @@
           <a:p>
             <a:fld id="{5BCAD085-E8A6-8845-BD4E-CB4CCA059FC4}" type="datetimeFigureOut">
               <a:rPr lang="en-US" smtClean="0"/>
-              <a:t>8/26/26</a:t>
+              <a:t>9/2/26</a:t>
             </a:fld>
             <a:endParaRPr lang="en-US"/>
           </a:p>
@@ -1961,7 +2085,7 @@
           <a:p>
             <a:fld id="{5BCAD085-E8A6-8845-BD4E-CB4CCA059FC4}" type="datetimeFigureOut">
               <a:rPr lang="en-US" smtClean="0"/>
-              <a:t>8/26/26</a:t>
+              <a:t>9/2/26</a:t>
             </a:fld>
             <a:endParaRPr lang="en-US"/>
           </a:p>
@@ -2139,7 +2263,7 @@
           <a:p>
             <a:fld id="{5BCAD085-E8A6-8845-BD4E-CB4CCA059FC4}" type="datetimeFigureOut">
               <a:rPr lang="en-US" smtClean="0"/>
-              <a:t>8/26/26</a:t>
+              <a:t>9/2/26</a:t>
             </a:fld>
             <a:endParaRPr lang="en-US"/>
           </a:p>
@@ -2307,7 +2431,7 @@
           <a:p>
             <a:fld id="{5BCAD085-E8A6-8845-BD4E-CB4CCA059FC4}" type="datetimeFigureOut">
               <a:rPr lang="en-US" smtClean="0"/>
-              <a:t>8/26/26</a:t>
+              <a:t>9/2/26</a:t>
             </a:fld>
             <a:endParaRPr lang="en-US"/>
           </a:p>
@@ -2552,7 +2676,7 @@
           <a:p>
             <a:fld id="{5BCAD085-E8A6-8845-BD4E-CB4CCA059FC4}" type="datetimeFigureOut">
               <a:rPr lang="en-US" smtClean="0"/>
-              <a:t>8/26/26</a:t>
+              <a:t>9/2/26</a:t>
             </a:fld>
             <a:endParaRPr lang="en-US"/>
           </a:p>
@@ -2837,7 +2961,7 @@
           <a:p>
             <a:fld id="{5BCAD085-E8A6-8845-BD4E-CB4CCA059FC4}" type="datetimeFigureOut">
               <a:rPr lang="en-US" smtClean="0"/>
-              <a:t>8/26/26</a:t>
+              <a:t>9/2/26</a:t>
             </a:fld>
             <a:endParaRPr lang="en-US"/>
           </a:p>
@@ -3256,7 +3380,7 @@
           <a:p>
             <a:fld id="{5BCAD085-E8A6-8845-BD4E-CB4CCA059FC4}" type="datetimeFigureOut">
               <a:rPr lang="en-US" smtClean="0"/>
-              <a:t>8/26/26</a:t>
+              <a:t>9/2/26</a:t>
             </a:fld>
             <a:endParaRPr lang="en-US"/>
           </a:p>
@@ -3373,7 +3497,7 @@
           <a:p>
             <a:fld id="{5BCAD085-E8A6-8845-BD4E-CB4CCA059FC4}" type="datetimeFigureOut">
               <a:rPr lang="en-US" smtClean="0"/>
-              <a:t>8/26/26</a:t>
+              <a:t>9/2/26</a:t>
             </a:fld>
             <a:endParaRPr lang="en-US"/>
           </a:p>
@@ -3468,7 +3592,7 @@
           <a:p>
             <a:fld id="{5BCAD085-E8A6-8845-BD4E-CB4CCA059FC4}" type="datetimeFigureOut">
               <a:rPr lang="en-US" smtClean="0"/>
-              <a:t>8/26/26</a:t>
+              <a:t>9/2/26</a:t>
             </a:fld>
             <a:endParaRPr lang="en-US"/>
           </a:p>
@@ -3743,7 +3867,7 @@
           <a:p>
             <a:fld id="{5BCAD085-E8A6-8845-BD4E-CB4CCA059FC4}" type="datetimeFigureOut">
               <a:rPr lang="en-US" smtClean="0"/>
-              <a:t>8/26/26</a:t>
+              <a:t>9/2/26</a:t>
             </a:fld>
             <a:endParaRPr lang="en-US"/>
           </a:p>
@@ -3995,7 +4119,7 @@
           <a:p>
             <a:fld id="{5BCAD085-E8A6-8845-BD4E-CB4CCA059FC4}" type="datetimeFigureOut">
               <a:rPr lang="en-US" smtClean="0"/>
-              <a:t>8/26/26</a:t>
+              <a:t>9/2/26</a:t>
             </a:fld>
             <a:endParaRPr lang="en-US"/>
           </a:p>
@@ -4206,7 +4330,7 @@
           <a:p>
             <a:fld id="{5BCAD085-E8A6-8845-BD4E-CB4CCA059FC4}" type="datetimeFigureOut">
               <a:rPr lang="en-US" smtClean="0"/>
-              <a:t>8/26/26</a:t>
+              <a:t>9/2/26</a:t>
             </a:fld>
             <a:endParaRPr lang="en-US"/>
           </a:p>
@@ -4598,7 +4722,7 @@
         <p:spPr>
           <a:xfrm>
             <a:off x="640080" y="411480"/>
-            <a:ext cx="10881360" cy="731520"/>
+            <a:ext cx="9334800" cy="923330"/>
           </a:xfrm>
           <a:prstGeom prst="rect">
             <a:avLst/>
@@ -4617,8 +4741,26 @@
               </a:defRPr>
             </a:pPr>
             <a:r>
-              <a:t>Testautomatisierungswerkzeuge – Beratung in der Presales-Situation</a:t>
-            </a:r>
+              <a:rPr lang="en-GB" dirty="0" err="1"/>
+              <a:t>Aufgabensituation</a:t>
+            </a:r>
+            <a:r>
+              <a:rPr lang="en-GB" dirty="0"/>
+              <a:t>: Workshop </a:t>
+            </a:r>
+            <a:r>
+              <a:rPr lang="en-GB" dirty="0" err="1"/>
+              <a:t>Testautomatisierungswerkzeuge</a:t>
+            </a:r>
+            <a:endParaRPr lang="en-GB" dirty="0"/>
+          </a:p>
+          <a:p>
+            <a:pPr>
+              <a:defRPr sz="2700" b="1">
+                <a:latin typeface="Aptos Display"/>
+              </a:defRPr>
+            </a:pPr>
+            <a:endParaRPr dirty="0"/>
           </a:p>
         </p:txBody>
       </p:sp>
@@ -4675,7 +4817,7 @@
         <p:spPr>
           <a:xfrm>
             <a:off x="822960" y="1508760"/>
-            <a:ext cx="10515600" cy="1277273"/>
+            <a:ext cx="10515600" cy="4847481"/>
           </a:xfrm>
           <a:prstGeom prst="rect">
             <a:avLst/>
@@ -4697,58 +4839,13 @@
               </a:defRPr>
             </a:pPr>
             <a:r>
-              <a:rPr dirty="0"/>
-              <a:t>• Ziel: </a:t>
-            </a:r>
-            <a:r>
-              <a:rPr dirty="0" err="1"/>
-              <a:t>Gemeinsam</a:t>
-            </a:r>
-            <a:r>
-              <a:rPr dirty="0"/>
-              <a:t> </a:t>
-            </a:r>
-            <a:r>
-              <a:rPr dirty="0" err="1"/>
-              <a:t>eine</a:t>
-            </a:r>
-            <a:r>
-              <a:rPr dirty="0"/>
-              <a:t> </a:t>
-            </a:r>
-            <a:r>
-              <a:rPr dirty="0" err="1"/>
-              <a:t>passende</a:t>
-            </a:r>
-            <a:r>
-              <a:rPr dirty="0"/>
-              <a:t>, </a:t>
-            </a:r>
-            <a:r>
-              <a:rPr dirty="0" err="1"/>
-              <a:t>nachhaltige</a:t>
-            </a:r>
-            <a:r>
-              <a:rPr dirty="0"/>
-              <a:t> </a:t>
-            </a:r>
-            <a:r>
-              <a:rPr dirty="0" err="1"/>
-              <a:t>Automatisierungsstrategie</a:t>
-            </a:r>
-            <a:r>
-              <a:rPr dirty="0"/>
-              <a:t> </a:t>
-            </a:r>
-            <a:r>
-              <a:rPr lang="de-DE" dirty="0"/>
-              <a:t>zu </a:t>
-            </a:r>
-            <a:r>
-              <a:rPr dirty="0" err="1"/>
-              <a:t>entwickeln</a:t>
-            </a:r>
-            <a:endParaRPr dirty="0"/>
+              <a:rPr lang="en-GB" dirty="0" err="1"/>
+              <a:t>Situationsbeschreibung</a:t>
+            </a:r>
+            <a:r>
+              <a:rPr lang="en-GB" dirty="0"/>
+              <a:t>:</a:t>
+            </a:r>
           </a:p>
           <a:p>
             <a:pPr>
@@ -4760,38 +4857,41 @@
               </a:defRPr>
             </a:pPr>
             <a:r>
-              <a:rPr dirty="0"/>
-              <a:t>• </a:t>
-            </a:r>
-            <a:r>
-              <a:rPr dirty="0" err="1"/>
-              <a:t>Fokus</a:t>
-            </a:r>
-            <a:r>
-              <a:rPr dirty="0"/>
-              <a:t>: </a:t>
-            </a:r>
-            <a:r>
-              <a:rPr dirty="0" err="1"/>
-              <a:t>Anforderungen</a:t>
-            </a:r>
-            <a:r>
-              <a:rPr dirty="0"/>
-              <a:t>, Technologie, Team, Budget und </a:t>
-            </a:r>
-            <a:r>
-              <a:rPr dirty="0" err="1"/>
-              <a:t>langfristiger</a:t>
-            </a:r>
-            <a:r>
-              <a:rPr dirty="0"/>
+              <a:rPr lang="en-GB" dirty="0"/>
+              <a:t>Du </a:t>
+            </a:r>
+            <a:r>
+              <a:rPr lang="en-GB" dirty="0" err="1"/>
+              <a:t>wirst</a:t>
+            </a:r>
+            <a:r>
+              <a:rPr lang="en-GB" dirty="0"/>
               <a:t> </a:t>
             </a:r>
             <a:r>
-              <a:rPr dirty="0" err="1"/>
-              <a:t>Betrieb</a:t>
-            </a:r>
-            <a:endParaRPr dirty="0"/>
+              <a:rPr lang="en-GB" dirty="0" err="1"/>
+              <a:t>gebeten</a:t>
+            </a:r>
+            <a:r>
+              <a:rPr lang="en-GB" dirty="0"/>
+              <a:t> in </a:t>
+            </a:r>
+            <a:r>
+              <a:rPr lang="en-GB" dirty="0" err="1"/>
+              <a:t>einer</a:t>
+            </a:r>
+            <a:r>
+              <a:rPr lang="en-GB" dirty="0"/>
+              <a:t> Presales Situation den Kunden in der </a:t>
+            </a:r>
+            <a:r>
+              <a:rPr lang="en-GB" dirty="0" err="1"/>
+              <a:t>Auswahl</a:t>
+            </a:r>
+            <a:r>
+              <a:rPr lang="en-GB" dirty="0"/>
+              <a:t> und</a:t>
+            </a:r>
           </a:p>
           <a:p>
             <a:pPr>
@@ -4803,44 +4903,389 @@
               </a:defRPr>
             </a:pPr>
             <a:r>
-              <a:rPr dirty="0"/>
-              <a:t>• </a:t>
-            </a:r>
-            <a:r>
-              <a:rPr dirty="0" err="1"/>
-              <a:t>Vorgehen</a:t>
-            </a:r>
-            <a:r>
-              <a:rPr dirty="0"/>
-              <a:t>: Erst verstehen → </a:t>
-            </a:r>
-            <a:r>
-              <a:rPr dirty="0" err="1"/>
-              <a:t>dann</a:t>
-            </a:r>
-            <a:r>
-              <a:rPr dirty="0"/>
+              <a:rPr lang="en-GB" dirty="0" err="1"/>
+              <a:t>Einführung</a:t>
+            </a:r>
+            <a:r>
+              <a:rPr lang="en-GB" dirty="0"/>
+              <a:t> von </a:t>
+            </a:r>
+            <a:r>
+              <a:rPr lang="en-GB" dirty="0" err="1"/>
+              <a:t>Testautomatisierungswerkzeugen</a:t>
+            </a:r>
+            <a:r>
+              <a:rPr lang="en-GB" dirty="0"/>
               <a:t> </a:t>
             </a:r>
             <a:r>
-              <a:rPr dirty="0" err="1"/>
-              <a:t>bewerten</a:t>
-            </a:r>
-            <a:r>
-              <a:rPr dirty="0"/>
-              <a:t> → Pilot </a:t>
-            </a:r>
-            <a:r>
-              <a:rPr dirty="0" err="1"/>
-              <a:t>durchführen</a:t>
-            </a:r>
-            <a:r>
-              <a:rPr dirty="0"/>
-              <a:t> → </a:t>
-            </a:r>
-            <a:r>
-              <a:rPr dirty="0" err="1"/>
-              <a:t>skalieren</a:t>
+              <a:rPr lang="en-GB" dirty="0" err="1"/>
+              <a:t>zu</a:t>
+            </a:r>
+            <a:r>
+              <a:rPr lang="en-GB" dirty="0"/>
+              <a:t> </a:t>
+            </a:r>
+            <a:r>
+              <a:rPr lang="en-GB" dirty="0" err="1"/>
+              <a:t>beraten</a:t>
+            </a:r>
+            <a:r>
+              <a:rPr lang="en-GB" dirty="0"/>
+              <a:t>. Der</a:t>
+            </a:r>
+          </a:p>
+          <a:p>
+            <a:pPr>
+              <a:spcAft>
+                <a:spcPts val="1200"/>
+              </a:spcAft>
+              <a:defRPr sz="1900">
+                <a:latin typeface="Aptos"/>
+              </a:defRPr>
+            </a:pPr>
+            <a:r>
+              <a:rPr lang="en-GB" dirty="0" err="1"/>
+              <a:t>Auftraggebende</a:t>
+            </a:r>
+            <a:r>
+              <a:rPr lang="en-GB" dirty="0"/>
+              <a:t> hat </a:t>
+            </a:r>
+            <a:r>
+              <a:rPr lang="en-GB" dirty="0" err="1"/>
+              <a:t>bisher</a:t>
+            </a:r>
+            <a:r>
+              <a:rPr lang="en-GB" dirty="0"/>
+              <a:t> </a:t>
+            </a:r>
+            <a:r>
+              <a:rPr lang="en-GB" dirty="0" err="1"/>
+              <a:t>wenig</a:t>
+            </a:r>
+            <a:r>
+              <a:rPr lang="en-GB" dirty="0"/>
+              <a:t> bis </a:t>
+            </a:r>
+            <a:r>
+              <a:rPr lang="en-GB" dirty="0" err="1"/>
+              <a:t>keine</a:t>
+            </a:r>
+            <a:r>
+              <a:rPr lang="en-GB" dirty="0"/>
+              <a:t> </a:t>
+            </a:r>
+            <a:r>
+              <a:rPr lang="en-GB" dirty="0" err="1"/>
+              <a:t>Erfahrung</a:t>
+            </a:r>
+            <a:r>
+              <a:rPr lang="en-GB" dirty="0"/>
+              <a:t> </a:t>
+            </a:r>
+            <a:r>
+              <a:rPr lang="en-GB" dirty="0" err="1"/>
+              <a:t>im</a:t>
+            </a:r>
+            <a:r>
+              <a:rPr lang="en-GB" dirty="0"/>
+              <a:t> </a:t>
+            </a:r>
+            <a:r>
+              <a:rPr lang="en-GB" dirty="0" err="1"/>
+              <a:t>Bereich</a:t>
+            </a:r>
+            <a:r>
+              <a:rPr lang="en-GB" dirty="0"/>
+              <a:t> der</a:t>
+            </a:r>
+          </a:p>
+          <a:p>
+            <a:pPr>
+              <a:spcAft>
+                <a:spcPts val="1200"/>
+              </a:spcAft>
+              <a:defRPr sz="1900">
+                <a:latin typeface="Aptos"/>
+              </a:defRPr>
+            </a:pPr>
+            <a:r>
+              <a:rPr lang="en-GB" dirty="0" err="1"/>
+              <a:t>Testautomatisierung</a:t>
+            </a:r>
+            <a:r>
+              <a:rPr lang="en-GB" dirty="0"/>
+              <a:t>. Dir </a:t>
+            </a:r>
+            <a:r>
+              <a:rPr lang="en-GB" dirty="0" err="1"/>
+              <a:t>liegen</a:t>
+            </a:r>
+            <a:r>
+              <a:rPr lang="en-GB" dirty="0"/>
+              <a:t> </a:t>
+            </a:r>
+            <a:r>
+              <a:rPr lang="en-GB" dirty="0" err="1"/>
+              <a:t>bisher</a:t>
+            </a:r>
+            <a:r>
+              <a:rPr lang="en-GB" dirty="0"/>
+              <a:t> </a:t>
+            </a:r>
+            <a:r>
+              <a:rPr lang="en-GB" dirty="0" err="1"/>
+              <a:t>keine</a:t>
+            </a:r>
+            <a:r>
+              <a:rPr lang="en-GB" dirty="0"/>
+              <a:t> </a:t>
+            </a:r>
+            <a:r>
+              <a:rPr lang="en-GB" dirty="0" err="1"/>
+              <a:t>Informationen</a:t>
+            </a:r>
+            <a:r>
+              <a:rPr lang="en-GB" dirty="0"/>
+              <a:t> </a:t>
+            </a:r>
+            <a:r>
+              <a:rPr lang="en-GB" dirty="0" err="1"/>
+              <a:t>dazu</a:t>
+            </a:r>
+            <a:r>
+              <a:rPr lang="en-GB" dirty="0"/>
+              <a:t> </a:t>
+            </a:r>
+            <a:r>
+              <a:rPr lang="en-GB" dirty="0" err="1"/>
+              <a:t>vor</a:t>
+            </a:r>
+            <a:r>
+              <a:rPr lang="en-GB" dirty="0"/>
+              <a:t>, </a:t>
+            </a:r>
+            <a:r>
+              <a:rPr lang="en-GB" dirty="0" err="1"/>
+              <a:t>wer</a:t>
+            </a:r>
+            <a:r>
+              <a:rPr lang="en-GB" dirty="0"/>
+              <a:t> die</a:t>
+            </a:r>
+          </a:p>
+          <a:p>
+            <a:pPr>
+              <a:spcAft>
+                <a:spcPts val="1200"/>
+              </a:spcAft>
+              <a:defRPr sz="1900">
+                <a:latin typeface="Aptos"/>
+              </a:defRPr>
+            </a:pPr>
+            <a:r>
+              <a:rPr lang="en-GB" dirty="0" err="1"/>
+              <a:t>Testautomatisierung</a:t>
+            </a:r>
+            <a:r>
+              <a:rPr lang="en-GB" dirty="0"/>
+              <a:t> </a:t>
+            </a:r>
+            <a:r>
+              <a:rPr lang="en-GB" dirty="0" err="1"/>
+              <a:t>kundenseitig</a:t>
+            </a:r>
+            <a:r>
+              <a:rPr lang="en-GB" dirty="0"/>
+              <a:t> </a:t>
+            </a:r>
+            <a:r>
+              <a:rPr lang="en-GB" dirty="0" err="1"/>
+              <a:t>übernehmen</a:t>
+            </a:r>
+            <a:r>
+              <a:rPr lang="en-GB" dirty="0"/>
+              <a:t> </a:t>
+            </a:r>
+            <a:r>
+              <a:rPr lang="en-GB" dirty="0" err="1"/>
+              <a:t>wird</a:t>
+            </a:r>
+            <a:r>
+              <a:rPr lang="en-GB" dirty="0"/>
+              <a:t>. Auch </a:t>
+            </a:r>
+            <a:r>
+              <a:rPr lang="en-GB" dirty="0" err="1"/>
+              <a:t>ob</a:t>
+            </a:r>
+            <a:r>
+              <a:rPr lang="en-GB" dirty="0"/>
+              <a:t> für</a:t>
+            </a:r>
+          </a:p>
+          <a:p>
+            <a:pPr>
+              <a:spcAft>
+                <a:spcPts val="1200"/>
+              </a:spcAft>
+              <a:defRPr sz="1900">
+                <a:latin typeface="Aptos"/>
+              </a:defRPr>
+            </a:pPr>
+            <a:r>
+              <a:rPr lang="en-GB" dirty="0" err="1"/>
+              <a:t>Testautomatisierungswerkzeuge</a:t>
+            </a:r>
+            <a:r>
+              <a:rPr lang="en-GB" dirty="0"/>
+              <a:t> Budget </a:t>
+            </a:r>
+            <a:r>
+              <a:rPr lang="en-GB" dirty="0" err="1"/>
+              <a:t>bereitgestellt</a:t>
+            </a:r>
+            <a:r>
+              <a:rPr lang="en-GB" dirty="0"/>
+              <a:t> </a:t>
+            </a:r>
+            <a:r>
+              <a:rPr lang="en-GB" dirty="0" err="1"/>
+              <a:t>wird</a:t>
+            </a:r>
+            <a:r>
+              <a:rPr lang="en-GB" dirty="0"/>
+              <a:t> </a:t>
+            </a:r>
+            <a:r>
+              <a:rPr lang="en-GB" dirty="0" err="1"/>
+              <a:t>ist</a:t>
+            </a:r>
+            <a:r>
+              <a:rPr lang="en-GB" dirty="0"/>
+              <a:t> </a:t>
+            </a:r>
+            <a:r>
+              <a:rPr lang="en-GB" dirty="0" err="1"/>
+              <a:t>offen</a:t>
+            </a:r>
+            <a:r>
+              <a:rPr lang="en-GB" dirty="0"/>
+              <a:t>.</a:t>
+            </a:r>
+          </a:p>
+          <a:p>
+            <a:pPr>
+              <a:spcAft>
+                <a:spcPts val="1200"/>
+              </a:spcAft>
+              <a:defRPr sz="1900">
+                <a:latin typeface="Aptos"/>
+              </a:defRPr>
+            </a:pPr>
+            <a:endParaRPr lang="en-GB" dirty="0"/>
+          </a:p>
+          <a:p>
+            <a:pPr>
+              <a:spcAft>
+                <a:spcPts val="1200"/>
+              </a:spcAft>
+              <a:defRPr sz="1900">
+                <a:latin typeface="Aptos"/>
+              </a:defRPr>
+            </a:pPr>
+            <a:r>
+              <a:rPr lang="en-GB" dirty="0" err="1"/>
+              <a:t>Aufgabenbeschreibung</a:t>
+            </a:r>
+            <a:r>
+              <a:rPr lang="en-GB" dirty="0"/>
+              <a:t>:</a:t>
+            </a:r>
+          </a:p>
+          <a:p>
+            <a:pPr>
+              <a:spcAft>
+                <a:spcPts val="1200"/>
+              </a:spcAft>
+              <a:defRPr sz="1900">
+                <a:latin typeface="Aptos"/>
+              </a:defRPr>
+            </a:pPr>
+            <a:r>
+              <a:rPr lang="en-GB" dirty="0" err="1"/>
+              <a:t>Erstelle</a:t>
+            </a:r>
+            <a:r>
+              <a:rPr lang="en-GB" dirty="0"/>
+              <a:t> </a:t>
+            </a:r>
+            <a:r>
+              <a:rPr lang="en-GB" dirty="0" err="1"/>
+              <a:t>eine</a:t>
+            </a:r>
+            <a:r>
+              <a:rPr lang="en-GB" dirty="0"/>
+              <a:t> </a:t>
+            </a:r>
+            <a:r>
+              <a:rPr lang="en-GB" dirty="0" err="1"/>
+              <a:t>Präsentation</a:t>
+            </a:r>
+            <a:r>
+              <a:rPr lang="en-GB" dirty="0"/>
+              <a:t> für den Kunden </a:t>
+            </a:r>
+            <a:r>
+              <a:rPr lang="en-GB" dirty="0" err="1"/>
+              <a:t>zur</a:t>
+            </a:r>
+            <a:r>
+              <a:rPr lang="en-GB" dirty="0"/>
+              <a:t> </a:t>
+            </a:r>
+            <a:r>
+              <a:rPr lang="en-GB" dirty="0" err="1"/>
+              <a:t>Beratung</a:t>
+            </a:r>
+            <a:r>
+              <a:rPr lang="en-GB" dirty="0"/>
+              <a:t> </a:t>
+            </a:r>
+            <a:r>
+              <a:rPr lang="en-GB" dirty="0" err="1"/>
+              <a:t>bei</a:t>
+            </a:r>
+            <a:r>
+              <a:rPr lang="en-GB" dirty="0"/>
+              <a:t> der </a:t>
+            </a:r>
+            <a:r>
+              <a:rPr lang="en-GB" dirty="0" err="1"/>
+              <a:t>Auswahl</a:t>
+            </a:r>
+            <a:r>
+              <a:rPr lang="en-GB" dirty="0"/>
+              <a:t> von</a:t>
+            </a:r>
+          </a:p>
+          <a:p>
+            <a:pPr>
+              <a:spcAft>
+                <a:spcPts val="1200"/>
+              </a:spcAft>
+              <a:defRPr sz="1900">
+                <a:latin typeface="Aptos"/>
+              </a:defRPr>
+            </a:pPr>
+            <a:r>
+              <a:rPr lang="en-GB" dirty="0" err="1"/>
+              <a:t>Testautomatisierungswerkzeugen</a:t>
+            </a:r>
+            <a:r>
+              <a:rPr lang="en-GB" dirty="0"/>
+              <a:t>.</a:t>
             </a:r>
             <a:endParaRPr dirty="0"/>
           </a:p>
@@ -4938,7 +5383,7 @@
               </a:defRPr>
             </a:pPr>
             <a:r>
-              <a:t>11. Erfolgskriterien</a:t>
+              <a:t>10. Zielbild der Einführung</a:t>
             </a:r>
           </a:p>
         </p:txBody>
@@ -5018,7 +5463,7 @@
               </a:defRPr>
             </a:pPr>
             <a:r>
-              <a:t>• Hohe Stabilität der automatisierten Tests</a:t>
+              <a:t>• Phase 1: Discovery &amp; Tool-Kriterien</a:t>
             </a:r>
           </a:p>
           <a:p>
@@ -5031,7 +5476,7 @@
               </a:defRPr>
             </a:pPr>
             <a:r>
-              <a:t>• Kurze Feedback-Zeit für Entwickler und Fachbereiche</a:t>
+              <a:t>• Phase 2: Proof of Concept</a:t>
             </a:r>
           </a:p>
           <a:p>
@@ -5044,7 +5489,7 @@
               </a:defRPr>
             </a:pPr>
             <a:r>
-              <a:t>• Weniger manuelle Regression bei wiederholbaren Szenarien</a:t>
+              <a:t>• Phase 3: Testautomatisierungs-Architektur und Coding Standards</a:t>
             </a:r>
           </a:p>
           <a:p>
@@ -5057,7 +5502,7 @@
               </a:defRPr>
             </a:pPr>
             <a:r>
-              <a:t>• Gute Fehlersuche durch Logs, Screenshots/Traces und Reports</a:t>
+              <a:t>• Phase 4: Pilot mit wenigen kritischen Tests</a:t>
             </a:r>
           </a:p>
           <a:p>
@@ -5070,7 +5515,7 @@
               </a:defRPr>
             </a:pPr>
             <a:r>
-              <a:t>• Nachvollziehbare Wartungskosten</a:t>
+              <a:t>• Phase 5: Integration in CI/CD und Reporting</a:t>
             </a:r>
           </a:p>
           <a:p>
@@ -5083,7 +5528,7 @@
               </a:defRPr>
             </a:pPr>
             <a:r>
-              <a:t>• Automatisierung als Bestandteil des Entwicklungsprozesses – nicht als separates Nebenprojekt</a:t>
+              <a:t>• Phase 6: Skalierung, Monitoring und kontinuierliche Wartung</a:t>
             </a:r>
           </a:p>
         </p:txBody>
@@ -5114,7 +5559,7 @@
               <a:defRPr sz="900"/>
             </a:pPr>
             <a:r>
-              <a:t>12</a:t>
+              <a:t>11</a:t>
             </a:r>
           </a:p>
         </p:txBody>
@@ -5180,7 +5625,7 @@
               </a:defRPr>
             </a:pPr>
             <a:r>
-              <a:t>12. Empfehlung &amp; nächste Schritte</a:t>
+              <a:t>11. Erfolgskriterien</a:t>
             </a:r>
           </a:p>
         </p:txBody>
@@ -5260,7 +5705,7 @@
               </a:defRPr>
             </a:pPr>
             <a:r>
-              <a:t>• Noch keine finale Tool-Entscheidung ohne Discovery</a:t>
+              <a:t>• Hohe Stabilität der automatisierten Tests</a:t>
             </a:r>
           </a:p>
           <a:p>
@@ -5273,7 +5718,7 @@
               </a:defRPr>
             </a:pPr>
             <a:r>
-              <a:t>• Open-Source-first ist bei offenem Budget ein sinnvoller Ausgangspunkt</a:t>
+              <a:t>• Kurze Feedback-Zeit für Entwickler und Fachbereiche</a:t>
             </a:r>
           </a:p>
           <a:p>
@@ -5286,7 +5731,7 @@
               </a:defRPr>
             </a:pPr>
             <a:r>
-              <a:t>• Playwright würde ich für Web als starken Kandidaten in den PoC nehmen</a:t>
+              <a:t>• Weniger manuelle Regression bei wiederholbaren Szenarien</a:t>
             </a:r>
           </a:p>
           <a:p>
@@ -5299,7 +5744,7 @@
               </a:defRPr>
             </a:pPr>
             <a:r>
-              <a:t>• API: REST Assured bzw. Playwright/API-Funktionen abhängig vom Technologie-Stack</a:t>
+              <a:t>• Gute Fehlersuche durch Logs, Screenshots/Traces und Reports</a:t>
             </a:r>
           </a:p>
           <a:p>
@@ -5312,7 +5757,7 @@
               </a:defRPr>
             </a:pPr>
             <a:r>
-              <a:t>• Mobile: Appium als Kandidat</a:t>
+              <a:t>• Nachvollziehbare Wartungskosten</a:t>
             </a:r>
           </a:p>
           <a:p>
@@ -5325,7 +5770,7 @@
               </a:defRPr>
             </a:pPr>
             <a:r>
-              <a:t>• Nächster Schritt: Workshop mit Produkt-, QA-, Entwicklungs- und DevOps-Verantwortlichen + PoC</a:t>
+              <a:t>• Automatisierung als Bestandteil des Entwicklungsprozesses – nicht als separates Nebenprojekt</a:t>
             </a:r>
           </a:p>
         </p:txBody>
@@ -5356,7 +5801,7 @@
               <a:defRPr sz="900"/>
             </a:pPr>
             <a:r>
-              <a:t>13</a:t>
+              <a:t>12</a:t>
             </a:r>
           </a:p>
         </p:txBody>
@@ -5422,7 +5867,7 @@
               </a:defRPr>
             </a:pPr>
             <a:r>
-              <a:t>Fragen an den Kunden</a:t>
+              <a:t>12. Empfehlung &amp; nächste Schritte</a:t>
             </a:r>
           </a:p>
         </p:txBody>
@@ -5480,7 +5925,7 @@
         <p:spPr>
           <a:xfrm>
             <a:off x="822960" y="1508760"/>
-            <a:ext cx="10515600" cy="2616101"/>
+            <a:ext cx="10515600" cy="4754880"/>
           </a:xfrm>
           <a:prstGeom prst="rect">
             <a:avLst/>
@@ -5502,56 +5947,7 @@
               </a:defRPr>
             </a:pPr>
             <a:r>
-              <a:rPr dirty="0"/>
-              <a:t>• </a:t>
-            </a:r>
-            <a:r>
-              <a:rPr dirty="0" err="1"/>
-              <a:t>Welche</a:t>
-            </a:r>
-            <a:r>
-              <a:rPr dirty="0"/>
-              <a:t> </a:t>
-            </a:r>
-            <a:r>
-              <a:rPr dirty="0" err="1"/>
-              <a:t>Produkte</a:t>
-            </a:r>
-            <a:r>
-              <a:rPr dirty="0"/>
-              <a:t> und </a:t>
-            </a:r>
-            <a:r>
-              <a:rPr dirty="0" err="1"/>
-              <a:t>Technologien</a:t>
-            </a:r>
-            <a:r>
-              <a:rPr dirty="0"/>
-              <a:t> </a:t>
-            </a:r>
-            <a:r>
-              <a:rPr dirty="0" err="1"/>
-              <a:t>sollen</a:t>
-            </a:r>
-            <a:r>
-              <a:rPr dirty="0"/>
-              <a:t> </a:t>
-            </a:r>
-            <a:r>
-              <a:rPr dirty="0" err="1"/>
-              <a:t>getestet</a:t>
-            </a:r>
-            <a:r>
-              <a:rPr dirty="0"/>
-              <a:t> </a:t>
-            </a:r>
-            <a:r>
-              <a:rPr dirty="0" err="1"/>
-              <a:t>werden</a:t>
-            </a:r>
-            <a:r>
-              <a:rPr dirty="0"/>
-              <a:t>?</a:t>
+              <a:t>• Noch keine finale Tool-Entscheidung ohne Discovery</a:t>
             </a:r>
           </a:p>
           <a:p>
@@ -5564,48 +5960,7 @@
               </a:defRPr>
             </a:pPr>
             <a:r>
-              <a:rPr dirty="0"/>
-              <a:t>• </a:t>
-            </a:r>
-            <a:r>
-              <a:rPr dirty="0" err="1"/>
-              <a:t>Welche</a:t>
-            </a:r>
-            <a:r>
-              <a:rPr dirty="0"/>
-              <a:t> </a:t>
-            </a:r>
-            <a:r>
-              <a:rPr dirty="0" err="1"/>
-              <a:t>Geschäftsprozesse</a:t>
-            </a:r>
-            <a:r>
-              <a:rPr dirty="0"/>
-              <a:t> </a:t>
-            </a:r>
-            <a:r>
-              <a:rPr dirty="0" err="1"/>
-              <a:t>sind</a:t>
-            </a:r>
-            <a:r>
-              <a:rPr dirty="0"/>
-              <a:t> </a:t>
-            </a:r>
-            <a:r>
-              <a:rPr dirty="0" err="1"/>
-              <a:t>besonders</a:t>
-            </a:r>
-            <a:r>
-              <a:rPr dirty="0"/>
-              <a:t> </a:t>
-            </a:r>
-            <a:r>
-              <a:rPr dirty="0" err="1"/>
-              <a:t>kritisch</a:t>
-            </a:r>
-            <a:r>
-              <a:rPr dirty="0"/>
-              <a:t>?</a:t>
+              <a:t>• Open-Source-first ist bei offenem Budget ein sinnvoller Ausgangspunkt</a:t>
             </a:r>
           </a:p>
           <a:p>
@@ -5618,48 +5973,7 @@
               </a:defRPr>
             </a:pPr>
             <a:r>
-              <a:rPr dirty="0"/>
-              <a:t>• </a:t>
-            </a:r>
-            <a:r>
-              <a:rPr dirty="0" err="1"/>
-              <a:t>Wer</a:t>
-            </a:r>
-            <a:r>
-              <a:rPr dirty="0"/>
-              <a:t> </a:t>
-            </a:r>
-            <a:r>
-              <a:rPr dirty="0" err="1"/>
-              <a:t>soll</a:t>
-            </a:r>
-            <a:r>
-              <a:rPr dirty="0"/>
-              <a:t> die Tests </a:t>
-            </a:r>
-            <a:r>
-              <a:rPr dirty="0" err="1"/>
-              <a:t>entwickeln</a:t>
-            </a:r>
-            <a:r>
-              <a:rPr dirty="0"/>
-              <a:t> und </a:t>
-            </a:r>
-            <a:r>
-              <a:rPr dirty="0" err="1"/>
-              <a:t>langfristig</a:t>
-            </a:r>
-            <a:r>
-              <a:rPr dirty="0"/>
-              <a:t> </a:t>
-            </a:r>
-            <a:r>
-              <a:rPr dirty="0" err="1"/>
-              <a:t>warten</a:t>
-            </a:r>
-            <a:r>
-              <a:rPr dirty="0"/>
-              <a:t>?</a:t>
+              <a:t>• Playwright würde ich für Web als starken Kandidaten in den PoC nehmen</a:t>
             </a:r>
           </a:p>
           <a:p>
@@ -5672,40 +5986,7 @@
               </a:defRPr>
             </a:pPr>
             <a:r>
-              <a:rPr dirty="0"/>
-              <a:t>• </a:t>
-            </a:r>
-            <a:r>
-              <a:rPr dirty="0" err="1"/>
-              <a:t>Welche</a:t>
-            </a:r>
-            <a:r>
-              <a:rPr dirty="0"/>
-              <a:t> CI/CD- und </a:t>
-            </a:r>
-            <a:r>
-              <a:rPr dirty="0" err="1"/>
-              <a:t>Entwicklungsumgebung</a:t>
-            </a:r>
-            <a:r>
-              <a:rPr dirty="0"/>
-              <a:t> </a:t>
-            </a:r>
-            <a:r>
-              <a:rPr dirty="0" err="1"/>
-              <a:t>ist</a:t>
-            </a:r>
-            <a:r>
-              <a:rPr dirty="0"/>
-              <a:t> </a:t>
-            </a:r>
-            <a:r>
-              <a:rPr dirty="0" err="1"/>
-              <a:t>vorhanden</a:t>
-            </a:r>
-            <a:r>
-              <a:rPr dirty="0"/>
-              <a:t>?</a:t>
+              <a:t>• API: REST Assured bzw. Playwright/API-Funktionen abhängig vom Technologie-Stack</a:t>
             </a:r>
           </a:p>
           <a:p>
@@ -5718,32 +5999,7 @@
               </a:defRPr>
             </a:pPr>
             <a:r>
-              <a:rPr dirty="0"/>
-              <a:t>• </a:t>
-            </a:r>
-            <a:r>
-              <a:rPr dirty="0" err="1"/>
-              <a:t>Welche</a:t>
-            </a:r>
-            <a:r>
-              <a:rPr dirty="0"/>
-              <a:t> </a:t>
-            </a:r>
-            <a:r>
-              <a:rPr dirty="0" err="1"/>
-              <a:t>Anforderungen</a:t>
-            </a:r>
-            <a:r>
-              <a:rPr dirty="0"/>
-              <a:t> </a:t>
-            </a:r>
-            <a:r>
-              <a:rPr dirty="0" err="1"/>
-              <a:t>gibt</a:t>
-            </a:r>
-            <a:r>
-              <a:rPr dirty="0"/>
-              <a:t> es an Reporting?</a:t>
+              <a:t>• Mobile: Appium als Kandidat</a:t>
             </a:r>
           </a:p>
           <a:p>
@@ -5756,64 +6012,7 @@
               </a:defRPr>
             </a:pPr>
             <a:r>
-              <a:rPr dirty="0"/>
-              <a:t>• Welches Budget </a:t>
-            </a:r>
-            <a:r>
-              <a:rPr dirty="0" err="1"/>
-              <a:t>bzw</a:t>
-            </a:r>
-            <a:r>
-              <a:rPr dirty="0"/>
-              <a:t>. </a:t>
-            </a:r>
-            <a:r>
-              <a:rPr dirty="0" err="1"/>
-              <a:t>welche</a:t>
-            </a:r>
-            <a:r>
-              <a:rPr dirty="0"/>
-              <a:t> </a:t>
-            </a:r>
-            <a:r>
-              <a:rPr dirty="0" err="1"/>
-              <a:t>internen</a:t>
-            </a:r>
-            <a:r>
-              <a:rPr dirty="0"/>
-              <a:t> </a:t>
-            </a:r>
-            <a:r>
-              <a:rPr dirty="0" err="1"/>
-              <a:t>Ressourcen</a:t>
-            </a:r>
-            <a:r>
-              <a:rPr dirty="0"/>
-              <a:t> </a:t>
-            </a:r>
-            <a:r>
-              <a:rPr dirty="0" err="1"/>
-              <a:t>stehen</a:t>
-            </a:r>
-            <a:r>
-              <a:rPr dirty="0"/>
-              <a:t> </a:t>
-            </a:r>
-            <a:r>
-              <a:rPr dirty="0" err="1"/>
-              <a:t>zur</a:t>
-            </a:r>
-            <a:r>
-              <a:rPr dirty="0"/>
-              <a:t> </a:t>
-            </a:r>
-            <a:r>
-              <a:rPr dirty="0" err="1"/>
-              <a:t>Verfügung</a:t>
-            </a:r>
-            <a:r>
-              <a:rPr dirty="0"/>
-              <a:t>?</a:t>
+              <a:t>• Nächster Schritt: Workshop mit Produkt-, QA-, Entwicklungs- und DevOps-Verantwortlichen + PoC</a:t>
             </a:r>
           </a:p>
         </p:txBody>
@@ -5844,7 +6043,7 @@
               <a:defRPr sz="900"/>
             </a:pPr>
             <a:r>
-              <a:t>14</a:t>
+              <a:t>13</a:t>
             </a:r>
           </a:p>
         </p:txBody>
@@ -5857,7 +6056,7 @@
 </p:sld>
 </file>
 
-<file path=ppt/slides/slide2.xml><?xml version="1.0" encoding="utf-8"?>
+<file path=ppt/slides/slide13.xml><?xml version="1.0" encoding="utf-8"?>
 <p:sld xmlns:a="http://schemas.openxmlformats.org/drawingml/2006/main" xmlns:r="http://schemas.openxmlformats.org/officeDocument/2006/relationships" xmlns:p="http://schemas.openxmlformats.org/presentationml/2006/main">
   <p:cSld>
     <p:bg>
@@ -5910,7 +6109,7 @@
               </a:defRPr>
             </a:pPr>
             <a:r>
-              <a:t>1. Ausgangssituation &amp; offene Fragen</a:t>
+              <a:t>Fragen an den Kunden</a:t>
             </a:r>
           </a:p>
         </p:txBody>
@@ -5968,7 +6167,7 @@
         <p:spPr>
           <a:xfrm>
             <a:off x="822960" y="1508760"/>
-            <a:ext cx="10515600" cy="2462213"/>
+            <a:ext cx="10515600" cy="2616101"/>
           </a:xfrm>
           <a:prstGeom prst="rect">
             <a:avLst/>
@@ -5991,11 +6190,11 @@
             </a:pPr>
             <a:r>
               <a:rPr dirty="0"/>
-              <a:t>• Bisher </a:t>
-            </a:r>
-            <a:r>
-              <a:rPr dirty="0" err="1"/>
-              <a:t>wenig</a:t>
+              <a:t>• </a:t>
+            </a:r>
+            <a:r>
+              <a:rPr dirty="0" err="1"/>
+              <a:t>Welche</a:t>
             </a:r>
             <a:r>
               <a:rPr dirty="0"/>
@@ -6003,15 +6202,15 @@
             </a:r>
             <a:r>
               <a:rPr dirty="0" err="1"/>
-              <a:t>bzw</a:t>
-            </a:r>
-            <a:r>
-              <a:rPr dirty="0"/>
-              <a:t>. </a:t>
-            </a:r>
-            <a:r>
-              <a:rPr dirty="0" err="1"/>
-              <a:t>keine</a:t>
+              <a:t>Produkte</a:t>
+            </a:r>
+            <a:r>
+              <a:rPr dirty="0"/>
+              <a:t> und </a:t>
+            </a:r>
+            <a:r>
+              <a:rPr dirty="0" err="1"/>
+              <a:t>Technologien</a:t>
             </a:r>
             <a:r>
               <a:rPr dirty="0"/>
@@ -6019,7 +6218,7 @@
             </a:r>
             <a:r>
               <a:rPr dirty="0" err="1"/>
-              <a:t>Erfahrung</a:t>
+              <a:t>sollen</a:t>
             </a:r>
             <a:r>
               <a:rPr dirty="0"/>
@@ -6027,7 +6226,7 @@
             </a:r>
             <a:r>
               <a:rPr dirty="0" err="1"/>
-              <a:t>mit</a:t>
+              <a:t>getestet</a:t>
             </a:r>
             <a:r>
               <a:rPr dirty="0"/>
@@ -6035,9 +6234,12 @@
             </a:r>
             <a:r>
               <a:rPr dirty="0" err="1"/>
-              <a:t>Testautomatisierung</a:t>
-            </a:r>
-            <a:endParaRPr dirty="0"/>
+              <a:t>werden</a:t>
+            </a:r>
+            <a:r>
+              <a:rPr dirty="0"/>
+              <a:t>?</a:t>
+            </a:r>
           </a:p>
           <a:p>
             <a:pPr>
@@ -6050,19 +6252,11 @@
             </a:pPr>
             <a:r>
               <a:rPr dirty="0"/>
-              <a:t>• Noch </a:t>
-            </a:r>
-            <a:r>
-              <a:rPr dirty="0" err="1"/>
-              <a:t>unklar</a:t>
-            </a:r>
-            <a:r>
-              <a:rPr dirty="0"/>
-              <a:t>: </a:t>
-            </a:r>
-            <a:r>
-              <a:rPr dirty="0" err="1"/>
-              <a:t>Wer</a:t>
+              <a:t>• </a:t>
+            </a:r>
+            <a:r>
+              <a:rPr dirty="0" err="1"/>
+              <a:t>Welche</a:t>
             </a:r>
             <a:r>
               <a:rPr dirty="0"/>
@@ -6070,7 +6264,7 @@
             </a:r>
             <a:r>
               <a:rPr dirty="0" err="1"/>
-              <a:t>übernimmt</a:t>
+              <a:t>Geschäftsprozesse</a:t>
             </a:r>
             <a:r>
               <a:rPr dirty="0"/>
@@ -6078,23 +6272,23 @@
             </a:r>
             <a:r>
               <a:rPr dirty="0" err="1"/>
-              <a:t>Entwicklung</a:t>
-            </a:r>
-            <a:r>
-              <a:rPr dirty="0"/>
-              <a:t>, </a:t>
-            </a:r>
-            <a:r>
-              <a:rPr dirty="0" err="1"/>
-              <a:t>Wartung</a:t>
-            </a:r>
-            <a:r>
-              <a:rPr dirty="0"/>
-              <a:t> und</a:t>
-            </a:r>
-            <a:r>
-              <a:rPr lang="de-DE" dirty="0"/>
-              <a:t> Monitoring</a:t>
+              <a:t>sind</a:t>
+            </a:r>
+            <a:r>
+              <a:rPr dirty="0"/>
+              <a:t> </a:t>
+            </a:r>
+            <a:r>
+              <a:rPr dirty="0" err="1"/>
+              <a:t>besonders</a:t>
+            </a:r>
+            <a:r>
+              <a:rPr dirty="0"/>
+              <a:t> </a:t>
+            </a:r>
+            <a:r>
+              <a:rPr dirty="0" err="1"/>
+              <a:t>kritisch</a:t>
             </a:r>
             <a:r>
               <a:rPr dirty="0"/>
@@ -6112,11 +6306,11 @@
             </a:pPr>
             <a:r>
               <a:rPr dirty="0"/>
-              <a:t>• Budget für </a:t>
-            </a:r>
-            <a:r>
-              <a:rPr dirty="0" err="1"/>
-              <a:t>Werkzeuge</a:t>
+              <a:t>• </a:t>
+            </a:r>
+            <a:r>
+              <a:rPr dirty="0" err="1"/>
+              <a:t>Wer</a:t>
             </a:r>
             <a:r>
               <a:rPr dirty="0"/>
@@ -6124,7 +6318,23 @@
             </a:r>
             <a:r>
               <a:rPr dirty="0" err="1"/>
-              <a:t>ist</a:t>
+              <a:t>soll</a:t>
+            </a:r>
+            <a:r>
+              <a:rPr dirty="0"/>
+              <a:t> die Tests </a:t>
+            </a:r>
+            <a:r>
+              <a:rPr dirty="0" err="1"/>
+              <a:t>entwickeln</a:t>
+            </a:r>
+            <a:r>
+              <a:rPr dirty="0"/>
+              <a:t> und </a:t>
+            </a:r>
+            <a:r>
+              <a:rPr dirty="0" err="1"/>
+              <a:t>langfristig</a:t>
             </a:r>
             <a:r>
               <a:rPr dirty="0"/>
@@ -6132,17 +6342,12 @@
             </a:r>
             <a:r>
               <a:rPr dirty="0" err="1"/>
-              <a:t>noch</a:t>
-            </a:r>
-            <a:r>
-              <a:rPr dirty="0"/>
-              <a:t> </a:t>
-            </a:r>
-            <a:r>
-              <a:rPr dirty="0" err="1"/>
-              <a:t>offen</a:t>
-            </a:r>
-            <a:endParaRPr dirty="0"/>
+              <a:t>warten</a:t>
+            </a:r>
+            <a:r>
+              <a:rPr dirty="0"/>
+              <a:t>?</a:t>
+            </a:r>
           </a:p>
           <a:p>
             <a:pPr>
@@ -6155,11 +6360,19 @@
             </a:pPr>
             <a:r>
               <a:rPr dirty="0"/>
-              <a:t>• Technologie und </a:t>
-            </a:r>
-            <a:r>
-              <a:rPr dirty="0" err="1"/>
-              <a:t>Produktumfang</a:t>
+              <a:t>• </a:t>
+            </a:r>
+            <a:r>
+              <a:rPr dirty="0" err="1"/>
+              <a:t>Welche</a:t>
+            </a:r>
+            <a:r>
+              <a:rPr dirty="0"/>
+              <a:t> CI/CD- und </a:t>
+            </a:r>
+            <a:r>
+              <a:rPr dirty="0" err="1"/>
+              <a:t>Entwicklungsumgebung</a:t>
             </a:r>
             <a:r>
               <a:rPr dirty="0"/>
@@ -6167,7 +6380,7 @@
             </a:r>
             <a:r>
               <a:rPr dirty="0" err="1"/>
-              <a:t>sind</a:t>
+              <a:t>ist</a:t>
             </a:r>
             <a:r>
               <a:rPr dirty="0"/>
@@ -6175,17 +6388,12 @@
             </a:r>
             <a:r>
               <a:rPr dirty="0" err="1"/>
-              <a:t>noch</a:t>
-            </a:r>
-            <a:r>
-              <a:rPr dirty="0"/>
-              <a:t> nicht </a:t>
-            </a:r>
-            <a:r>
-              <a:rPr dirty="0" err="1"/>
-              <a:t>bekannt</a:t>
-            </a:r>
-            <a:endParaRPr dirty="0"/>
+              <a:t>vorhanden</a:t>
+            </a:r>
+            <a:r>
+              <a:rPr dirty="0"/>
+              <a:t>?</a:t>
+            </a:r>
           </a:p>
           <a:p>
             <a:pPr>
@@ -6198,27 +6406,11 @@
             </a:pPr>
             <a:r>
               <a:rPr dirty="0"/>
-              <a:t>• Daher: Keine </a:t>
-            </a:r>
-            <a:r>
-              <a:rPr dirty="0" err="1"/>
-              <a:t>vorschnelle</a:t>
-            </a:r>
-            <a:r>
-              <a:rPr dirty="0"/>
-              <a:t> Tool-</a:t>
-            </a:r>
-            <a:r>
-              <a:rPr dirty="0" err="1"/>
-              <a:t>Entscheidung</a:t>
-            </a:r>
-            <a:r>
-              <a:rPr dirty="0"/>
-              <a:t> – </a:t>
-            </a:r>
-            <a:r>
-              <a:rPr dirty="0" err="1"/>
-              <a:t>zuerst</a:t>
+              <a:t>• </a:t>
+            </a:r>
+            <a:r>
+              <a:rPr dirty="0" err="1"/>
+              <a:t>Welche</a:t>
             </a:r>
             <a:r>
               <a:rPr dirty="0"/>
@@ -6230,21 +6422,86 @@
             </a:r>
             <a:r>
               <a:rPr dirty="0"/>
-              <a:t> und </a:t>
-            </a:r>
-            <a:r>
-              <a:rPr dirty="0" err="1"/>
-              <a:t>Rahmenbedingungen</a:t>
-            </a:r>
-            <a:r>
-              <a:rPr dirty="0"/>
               <a:t> </a:t>
             </a:r>
             <a:r>
               <a:rPr dirty="0" err="1"/>
-              <a:t>klären</a:t>
-            </a:r>
-            <a:endParaRPr dirty="0"/>
+              <a:t>gibt</a:t>
+            </a:r>
+            <a:r>
+              <a:rPr dirty="0"/>
+              <a:t> es an Reporting?</a:t>
+            </a:r>
+          </a:p>
+          <a:p>
+            <a:pPr>
+              <a:spcAft>
+                <a:spcPts val="1200"/>
+              </a:spcAft>
+              <a:defRPr sz="1900">
+                <a:latin typeface="Aptos"/>
+              </a:defRPr>
+            </a:pPr>
+            <a:r>
+              <a:rPr dirty="0"/>
+              <a:t>• Welches Budget </a:t>
+            </a:r>
+            <a:r>
+              <a:rPr dirty="0" err="1"/>
+              <a:t>bzw</a:t>
+            </a:r>
+            <a:r>
+              <a:rPr dirty="0"/>
+              <a:t>. </a:t>
+            </a:r>
+            <a:r>
+              <a:rPr dirty="0" err="1"/>
+              <a:t>welche</a:t>
+            </a:r>
+            <a:r>
+              <a:rPr dirty="0"/>
+              <a:t> </a:t>
+            </a:r>
+            <a:r>
+              <a:rPr dirty="0" err="1"/>
+              <a:t>internen</a:t>
+            </a:r>
+            <a:r>
+              <a:rPr dirty="0"/>
+              <a:t> </a:t>
+            </a:r>
+            <a:r>
+              <a:rPr dirty="0" err="1"/>
+              <a:t>Ressourcen</a:t>
+            </a:r>
+            <a:r>
+              <a:rPr dirty="0"/>
+              <a:t> </a:t>
+            </a:r>
+            <a:r>
+              <a:rPr dirty="0" err="1"/>
+              <a:t>stehen</a:t>
+            </a:r>
+            <a:r>
+              <a:rPr dirty="0"/>
+              <a:t> </a:t>
+            </a:r>
+            <a:r>
+              <a:rPr dirty="0" err="1"/>
+              <a:t>zur</a:t>
+            </a:r>
+            <a:r>
+              <a:rPr dirty="0"/>
+              <a:t> </a:t>
+            </a:r>
+            <a:r>
+              <a:rPr dirty="0" err="1"/>
+              <a:t>Verfügung</a:t>
+            </a:r>
+            <a:r>
+              <a:rPr dirty="0"/>
+              <a:t>?</a:t>
+            </a:r>
           </a:p>
         </p:txBody>
       </p:sp>
@@ -6274,12 +6531,368 @@
               <a:defRPr sz="900"/>
             </a:pPr>
             <a:r>
-              <a:t>02</a:t>
+              <a:t>14</a:t>
             </a:r>
           </a:p>
         </p:txBody>
       </p:sp>
     </p:spTree>
+  </p:cSld>
+  <p:clrMapOvr>
+    <a:masterClrMapping/>
+  </p:clrMapOvr>
+</p:sld>
+</file>
+
+<file path=ppt/slides/slide2.xml><?xml version="1.0" encoding="utf-8"?>
+<p:sld xmlns:a="http://schemas.openxmlformats.org/drawingml/2006/main" xmlns:r="http://schemas.openxmlformats.org/officeDocument/2006/relationships" xmlns:p="http://schemas.openxmlformats.org/presentationml/2006/main">
+  <p:cSld>
+    <p:bg>
+      <p:bgPr>
+        <a:solidFill>
+          <a:srgbClr val="F8F9FB"/>
+        </a:solidFill>
+        <a:effectLst/>
+      </p:bgPr>
+    </p:bg>
+    <p:spTree>
+      <p:nvGrpSpPr>
+        <p:cNvPr id="1" name="">
+          <a:extLst>
+            <a:ext uri="{FF2B5EF4-FFF2-40B4-BE49-F238E27FC236}">
+              <a16:creationId xmlns:a16="http://schemas.microsoft.com/office/drawing/2014/main" id="{1D100F53-ABB4-5B2F-DA1B-51BB7953C865}"/>
+            </a:ext>
+          </a:extLst>
+        </p:cNvPr>
+        <p:cNvGrpSpPr/>
+        <p:nvPr/>
+      </p:nvGrpSpPr>
+      <p:grpSpPr>
+        <a:xfrm>
+          <a:off x="0" y="0"/>
+          <a:ext cx="0" cy="0"/>
+          <a:chOff x="0" y="0"/>
+          <a:chExt cx="0" cy="0"/>
+        </a:xfrm>
+      </p:grpSpPr>
+      <p:sp>
+        <p:nvSpPr>
+          <p:cNvPr id="2" name="TextBox 1">
+            <a:extLst>
+              <a:ext uri="{FF2B5EF4-FFF2-40B4-BE49-F238E27FC236}">
+                <a16:creationId xmlns:a16="http://schemas.microsoft.com/office/drawing/2014/main" id="{D5C67E86-7429-B3BA-49BD-55386A887029}"/>
+              </a:ext>
+            </a:extLst>
+          </p:cNvPr>
+          <p:cNvSpPr txBox="1"/>
+          <p:nvPr/>
+        </p:nvSpPr>
+        <p:spPr>
+          <a:xfrm>
+            <a:off x="640080" y="411480"/>
+            <a:ext cx="10881360" cy="731520"/>
+          </a:xfrm>
+          <a:prstGeom prst="rect">
+            <a:avLst/>
+          </a:prstGeom>
+          <a:noFill/>
+        </p:spPr>
+        <p:txBody>
+          <a:bodyPr wrap="none">
+            <a:spAutoFit/>
+          </a:bodyPr>
+          <a:lstStyle/>
+          <a:p>
+            <a:pPr>
+              <a:defRPr sz="2700" b="1">
+                <a:latin typeface="Aptos Display"/>
+              </a:defRPr>
+            </a:pPr>
+            <a:r>
+              <a:t>Testautomatisierungswerkzeuge – Beratung in der Presales-Situation</a:t>
+            </a:r>
+          </a:p>
+        </p:txBody>
+      </p:sp>
+      <p:sp>
+        <p:nvSpPr>
+          <p:cNvPr id="3" name="Rectangle 2">
+            <a:extLst>
+              <a:ext uri="{FF2B5EF4-FFF2-40B4-BE49-F238E27FC236}">
+                <a16:creationId xmlns:a16="http://schemas.microsoft.com/office/drawing/2014/main" id="{1701F008-6AE4-5736-DA57-1DEE30669E9F}"/>
+              </a:ext>
+            </a:extLst>
+          </p:cNvPr>
+          <p:cNvSpPr/>
+          <p:nvPr/>
+        </p:nvSpPr>
+        <p:spPr>
+          <a:xfrm>
+            <a:off x="640080" y="1170432"/>
+            <a:ext cx="914400" cy="73152"/>
+          </a:xfrm>
+          <a:prstGeom prst="rect">
+            <a:avLst/>
+          </a:prstGeom>
+          <a:solidFill>
+            <a:srgbClr val="1F4E79"/>
+          </a:solidFill>
+          <a:ln>
+            <a:noFill/>
+          </a:ln>
+        </p:spPr>
+        <p:style>
+          <a:lnRef idx="1">
+            <a:schemeClr val="accent1"/>
+          </a:lnRef>
+          <a:fillRef idx="3">
+            <a:schemeClr val="accent1"/>
+          </a:fillRef>
+          <a:effectRef idx="2">
+            <a:schemeClr val="accent1"/>
+          </a:effectRef>
+          <a:fontRef idx="minor">
+            <a:schemeClr val="lt1"/>
+          </a:fontRef>
+        </p:style>
+        <p:txBody>
+          <a:bodyPr rtlCol="0" anchor="ctr"/>
+          <a:lstStyle/>
+          <a:p>
+            <a:pPr algn="ctr"/>
+            <a:endParaRPr/>
+          </a:p>
+        </p:txBody>
+      </p:sp>
+      <p:sp>
+        <p:nvSpPr>
+          <p:cNvPr id="4" name="TextBox 3">
+            <a:extLst>
+              <a:ext uri="{FF2B5EF4-FFF2-40B4-BE49-F238E27FC236}">
+                <a16:creationId xmlns:a16="http://schemas.microsoft.com/office/drawing/2014/main" id="{DE467ECE-D665-4198-EC21-D414EBCFB7D4}"/>
+              </a:ext>
+            </a:extLst>
+          </p:cNvPr>
+          <p:cNvSpPr txBox="1"/>
+          <p:nvPr/>
+        </p:nvSpPr>
+        <p:spPr>
+          <a:xfrm>
+            <a:off x="822960" y="1508760"/>
+            <a:ext cx="10515600" cy="1277273"/>
+          </a:xfrm>
+          <a:prstGeom prst="rect">
+            <a:avLst/>
+          </a:prstGeom>
+          <a:noFill/>
+        </p:spPr>
+        <p:txBody>
+          <a:bodyPr wrap="square">
+            <a:spAutoFit/>
+          </a:bodyPr>
+          <a:lstStyle/>
+          <a:p>
+            <a:pPr>
+              <a:spcAft>
+                <a:spcPts val="1200"/>
+              </a:spcAft>
+              <a:defRPr sz="1900">
+                <a:latin typeface="Aptos"/>
+              </a:defRPr>
+            </a:pPr>
+            <a:r>
+              <a:rPr dirty="0"/>
+              <a:t>• Ziel: </a:t>
+            </a:r>
+            <a:r>
+              <a:rPr dirty="0" err="1"/>
+              <a:t>Gemeinsam</a:t>
+            </a:r>
+            <a:r>
+              <a:rPr dirty="0"/>
+              <a:t> </a:t>
+            </a:r>
+            <a:r>
+              <a:rPr dirty="0" err="1"/>
+              <a:t>eine</a:t>
+            </a:r>
+            <a:r>
+              <a:rPr dirty="0"/>
+              <a:t> </a:t>
+            </a:r>
+            <a:r>
+              <a:rPr dirty="0" err="1"/>
+              <a:t>passende</a:t>
+            </a:r>
+            <a:r>
+              <a:rPr dirty="0"/>
+              <a:t>, </a:t>
+            </a:r>
+            <a:r>
+              <a:rPr dirty="0" err="1"/>
+              <a:t>nachhaltige</a:t>
+            </a:r>
+            <a:r>
+              <a:rPr dirty="0"/>
+              <a:t> </a:t>
+            </a:r>
+            <a:r>
+              <a:rPr dirty="0" err="1"/>
+              <a:t>Automatisierungsstrategie</a:t>
+            </a:r>
+            <a:r>
+              <a:rPr dirty="0"/>
+              <a:t> </a:t>
+            </a:r>
+            <a:r>
+              <a:rPr lang="de-DE" dirty="0"/>
+              <a:t>zu </a:t>
+            </a:r>
+            <a:r>
+              <a:rPr dirty="0" err="1"/>
+              <a:t>entwickeln</a:t>
+            </a:r>
+            <a:endParaRPr dirty="0"/>
+          </a:p>
+          <a:p>
+            <a:pPr>
+              <a:spcAft>
+                <a:spcPts val="1200"/>
+              </a:spcAft>
+              <a:defRPr sz="1900">
+                <a:latin typeface="Aptos"/>
+              </a:defRPr>
+            </a:pPr>
+            <a:r>
+              <a:rPr dirty="0"/>
+              <a:t>• </a:t>
+            </a:r>
+            <a:r>
+              <a:rPr dirty="0" err="1"/>
+              <a:t>Fokus</a:t>
+            </a:r>
+            <a:r>
+              <a:rPr dirty="0"/>
+              <a:t>: </a:t>
+            </a:r>
+            <a:r>
+              <a:rPr dirty="0" err="1"/>
+              <a:t>Anforderungen</a:t>
+            </a:r>
+            <a:r>
+              <a:rPr dirty="0"/>
+              <a:t>, Technologie, Team, Budget und </a:t>
+            </a:r>
+            <a:r>
+              <a:rPr dirty="0" err="1"/>
+              <a:t>langfristiger</a:t>
+            </a:r>
+            <a:r>
+              <a:rPr dirty="0"/>
+              <a:t> </a:t>
+            </a:r>
+            <a:r>
+              <a:rPr dirty="0" err="1"/>
+              <a:t>Betrieb</a:t>
+            </a:r>
+            <a:endParaRPr dirty="0"/>
+          </a:p>
+          <a:p>
+            <a:pPr>
+              <a:spcAft>
+                <a:spcPts val="1200"/>
+              </a:spcAft>
+              <a:defRPr sz="1900">
+                <a:latin typeface="Aptos"/>
+              </a:defRPr>
+            </a:pPr>
+            <a:r>
+              <a:rPr dirty="0"/>
+              <a:t>• </a:t>
+            </a:r>
+            <a:r>
+              <a:rPr dirty="0" err="1"/>
+              <a:t>Vorgehen</a:t>
+            </a:r>
+            <a:r>
+              <a:rPr dirty="0"/>
+              <a:t>: Erst verstehen → </a:t>
+            </a:r>
+            <a:r>
+              <a:rPr dirty="0" err="1"/>
+              <a:t>dann</a:t>
+            </a:r>
+            <a:r>
+              <a:rPr dirty="0"/>
+              <a:t> </a:t>
+            </a:r>
+            <a:r>
+              <a:rPr dirty="0" err="1"/>
+              <a:t>bewerten</a:t>
+            </a:r>
+            <a:r>
+              <a:rPr dirty="0"/>
+              <a:t> → Pilot </a:t>
+            </a:r>
+            <a:r>
+              <a:rPr dirty="0" err="1"/>
+              <a:t>durchführen</a:t>
+            </a:r>
+            <a:r>
+              <a:rPr dirty="0"/>
+              <a:t> → </a:t>
+            </a:r>
+            <a:r>
+              <a:rPr dirty="0" err="1"/>
+              <a:t>skalieren</a:t>
+            </a:r>
+            <a:endParaRPr dirty="0"/>
+          </a:p>
+        </p:txBody>
+      </p:sp>
+      <p:sp>
+        <p:nvSpPr>
+          <p:cNvPr id="5" name="TextBox 4">
+            <a:extLst>
+              <a:ext uri="{FF2B5EF4-FFF2-40B4-BE49-F238E27FC236}">
+                <a16:creationId xmlns:a16="http://schemas.microsoft.com/office/drawing/2014/main" id="{EEC3B3E9-E725-B9EE-FE79-E30901941437}"/>
+              </a:ext>
+            </a:extLst>
+          </p:cNvPr>
+          <p:cNvSpPr txBox="1"/>
+          <p:nvPr/>
+        </p:nvSpPr>
+        <p:spPr>
+          <a:xfrm>
+            <a:off x="9875520" y="6446520"/>
+            <a:ext cx="1554480" cy="228600"/>
+          </a:xfrm>
+          <a:prstGeom prst="rect">
+            <a:avLst/>
+          </a:prstGeom>
+          <a:noFill/>
+        </p:spPr>
+        <p:txBody>
+          <a:bodyPr wrap="none">
+            <a:spAutoFit/>
+          </a:bodyPr>
+          <a:lstStyle/>
+          <a:p>
+            <a:pPr algn="r">
+              <a:defRPr sz="900"/>
+            </a:pPr>
+            <a:r>
+              <a:t>01</a:t>
+            </a:r>
+          </a:p>
+        </p:txBody>
+      </p:sp>
+    </p:spTree>
+    <p:extLst>
+      <p:ext uri="{BB962C8B-B14F-4D97-AF65-F5344CB8AC3E}">
+        <p14:creationId xmlns:p14="http://schemas.microsoft.com/office/powerpoint/2010/main" val="3500883414"/>
+      </p:ext>
+    </p:extLst>
   </p:cSld>
   <p:clrMapOvr>
     <a:masterClrMapping/>
@@ -6340,7 +6953,7 @@
               </a:defRPr>
             </a:pPr>
             <a:r>
-              <a:t>2. Discovery: Produkt und Testlandschaft verstehen</a:t>
+              <a:t>1. Ausgangssituation &amp; offene Fragen</a:t>
             </a:r>
           </a:p>
         </p:txBody>
@@ -6421,19 +7034,51 @@
             </a:pPr>
             <a:r>
               <a:rPr dirty="0"/>
-              <a:t>• </a:t>
-            </a:r>
-            <a:r>
-              <a:rPr dirty="0" err="1"/>
-              <a:t>Anforderungen</a:t>
-            </a:r>
-            <a:r>
-              <a:rPr dirty="0"/>
-              <a:t>, User Stories und Acceptance Criteria </a:t>
-            </a:r>
-            <a:r>
-              <a:rPr dirty="0" err="1"/>
-              <a:t>analysieren</a:t>
+              <a:t>• Bisher </a:t>
+            </a:r>
+            <a:r>
+              <a:rPr dirty="0" err="1"/>
+              <a:t>wenig</a:t>
+            </a:r>
+            <a:r>
+              <a:rPr dirty="0"/>
+              <a:t> </a:t>
+            </a:r>
+            <a:r>
+              <a:rPr dirty="0" err="1"/>
+              <a:t>bzw</a:t>
+            </a:r>
+            <a:r>
+              <a:rPr dirty="0"/>
+              <a:t>. </a:t>
+            </a:r>
+            <a:r>
+              <a:rPr dirty="0" err="1"/>
+              <a:t>keine</a:t>
+            </a:r>
+            <a:r>
+              <a:rPr dirty="0"/>
+              <a:t> </a:t>
+            </a:r>
+            <a:r>
+              <a:rPr dirty="0" err="1"/>
+              <a:t>Erfahrung</a:t>
+            </a:r>
+            <a:r>
+              <a:rPr dirty="0"/>
+              <a:t> </a:t>
+            </a:r>
+            <a:r>
+              <a:rPr dirty="0" err="1"/>
+              <a:t>mit</a:t>
+            </a:r>
+            <a:r>
+              <a:rPr dirty="0"/>
+              <a:t> </a:t>
+            </a:r>
+            <a:r>
+              <a:rPr dirty="0" err="1"/>
+              <a:t>Testautomatisierung</a:t>
             </a:r>
             <a:endParaRPr dirty="0"/>
           </a:p>
@@ -6448,11 +7093,19 @@
             </a:pPr>
             <a:r>
               <a:rPr dirty="0"/>
-              <a:t>• </a:t>
-            </a:r>
-            <a:r>
-              <a:rPr dirty="0" err="1"/>
-              <a:t>Produkt</a:t>
+              <a:t>• Noch </a:t>
+            </a:r>
+            <a:r>
+              <a:rPr dirty="0" err="1"/>
+              <a:t>unklar</a:t>
+            </a:r>
+            <a:r>
+              <a:rPr dirty="0"/>
+              <a:t>: </a:t>
+            </a:r>
+            <a:r>
+              <a:rPr dirty="0" err="1"/>
+              <a:t>Wer</a:t>
             </a:r>
             <a:r>
               <a:rPr dirty="0"/>
@@ -6460,7 +7113,7 @@
             </a:r>
             <a:r>
               <a:rPr dirty="0" err="1"/>
-              <a:t>zunächst</a:t>
+              <a:t>übernimmt</a:t>
             </a:r>
             <a:r>
               <a:rPr dirty="0"/>
@@ -6468,59 +7121,27 @@
             </a:r>
             <a:r>
               <a:rPr dirty="0" err="1"/>
-              <a:t>explorativ</a:t>
-            </a:r>
-            <a:r>
-              <a:rPr dirty="0"/>
-              <a:t>/</a:t>
-            </a:r>
-            <a:r>
-              <a:rPr dirty="0" err="1"/>
-              <a:t>manuell</a:t>
-            </a:r>
-            <a:r>
-              <a:rPr dirty="0"/>
-              <a:t> </a:t>
-            </a:r>
-            <a:r>
-              <a:rPr dirty="0" err="1"/>
-              <a:t>testen</a:t>
-            </a:r>
-            <a:r>
-              <a:rPr dirty="0"/>
-              <a:t>, um </a:t>
-            </a:r>
-            <a:r>
-              <a:rPr dirty="0" err="1"/>
-              <a:t>Risiken</a:t>
-            </a:r>
-            <a:r>
-              <a:rPr dirty="0"/>
-              <a:t> und </a:t>
-            </a:r>
-            <a:r>
-              <a:rPr dirty="0" err="1"/>
-              <a:t>kritische</a:t>
-            </a:r>
-            <a:r>
-              <a:rPr dirty="0"/>
-              <a:t> </a:t>
-            </a:r>
-            <a:r>
-              <a:rPr dirty="0" err="1"/>
-              <a:t>Geschäftsprozesse</a:t>
-            </a:r>
-            <a:r>
-              <a:rPr dirty="0"/>
-              <a:t> </a:t>
-            </a:r>
-            <a:r>
-              <a:rPr dirty="0" err="1"/>
-              <a:t>zu</a:t>
-            </a:r>
-            <a:r>
-              <a:rPr dirty="0"/>
-              <a:t> verstehen</a:t>
+              <a:t>Entwicklung</a:t>
+            </a:r>
+            <a:r>
+              <a:rPr dirty="0"/>
+              <a:t>, </a:t>
+            </a:r>
+            <a:r>
+              <a:rPr dirty="0" err="1"/>
+              <a:t>Wartung</a:t>
+            </a:r>
+            <a:r>
+              <a:rPr dirty="0"/>
+              <a:t> und</a:t>
+            </a:r>
+            <a:r>
+              <a:rPr lang="de-DE" dirty="0"/>
+              <a:t> Monitoring</a:t>
+            </a:r>
+            <a:r>
+              <a:rPr dirty="0"/>
+              <a:t>?</a:t>
             </a:r>
           </a:p>
           <a:p>
@@ -6534,11 +7155,11 @@
             </a:pPr>
             <a:r>
               <a:rPr dirty="0"/>
-              <a:t>• </a:t>
-            </a:r>
-            <a:r>
-              <a:rPr dirty="0" err="1"/>
-              <a:t>Technologien</a:t>
+              <a:t>• Budget für </a:t>
+            </a:r>
+            <a:r>
+              <a:rPr dirty="0" err="1"/>
+              <a:t>Werkzeuge</a:t>
             </a:r>
             <a:r>
               <a:rPr dirty="0"/>
@@ -6546,21 +7167,25 @@
             </a:r>
             <a:r>
               <a:rPr dirty="0" err="1"/>
-              <a:t>klären</a:t>
-            </a:r>
-            <a:r>
-              <a:rPr dirty="0"/>
-              <a:t>: Web, API/Backend, Mobile, Desktop</a:t>
-            </a:r>
-            <a:r>
-              <a:rPr lang="de-DE" dirty="0"/>
+              <a:t>ist</a:t>
+            </a:r>
+            <a:r>
+              <a:rPr dirty="0"/>
               <a:t> </a:t>
             </a:r>
             <a:r>
-              <a:rPr lang="de-DE" dirty="0" err="1"/>
-              <a:t>etc</a:t>
-            </a:r>
-            <a:endParaRPr lang="en-GB" dirty="0"/>
+              <a:rPr dirty="0" err="1"/>
+              <a:t>noch</a:t>
+            </a:r>
+            <a:r>
+              <a:rPr dirty="0"/>
+              <a:t> </a:t>
+            </a:r>
+            <a:r>
+              <a:rPr dirty="0" err="1"/>
+              <a:t>offen</a:t>
+            </a:r>
+            <a:endParaRPr dirty="0"/>
           </a:p>
           <a:p>
             <a:pPr>
@@ -6572,46 +7197,38 @@
               </a:defRPr>
             </a:pPr>
             <a:r>
-              <a:rPr lang="en-GB" dirty="0"/>
-              <a:t>• </a:t>
-            </a:r>
-            <a:r>
-              <a:rPr lang="en-GB" dirty="0" err="1"/>
-              <a:t>Bestehende</a:t>
-            </a:r>
-            <a:r>
-              <a:rPr lang="en-GB" dirty="0"/>
+              <a:rPr dirty="0"/>
+              <a:t>• Technologie und </a:t>
+            </a:r>
+            <a:r>
+              <a:rPr dirty="0" err="1"/>
+              <a:t>Produktumfang</a:t>
+            </a:r>
+            <a:r>
+              <a:rPr dirty="0"/>
               <a:t> </a:t>
             </a:r>
             <a:r>
-              <a:rPr lang="en-GB" dirty="0" err="1"/>
-              <a:t>Testfälle</a:t>
-            </a:r>
-            <a:r>
-              <a:rPr lang="en-GB" dirty="0"/>
-              <a:t>, CI/CD, </a:t>
-            </a:r>
-            <a:r>
-              <a:rPr lang="en-GB" dirty="0" err="1"/>
-              <a:t>Versionsverwaltung</a:t>
-            </a:r>
-            <a:r>
-              <a:rPr lang="en-GB" dirty="0"/>
-              <a:t> und </a:t>
-            </a:r>
-            <a:r>
-              <a:rPr lang="en-GB" dirty="0" err="1"/>
-              <a:t>Testdaten</a:t>
-            </a:r>
-            <a:r>
-              <a:rPr lang="en-GB" dirty="0"/>
+              <a:rPr dirty="0" err="1"/>
+              <a:t>sind</a:t>
+            </a:r>
+            <a:r>
+              <a:rPr dirty="0"/>
               <a:t> </a:t>
             </a:r>
             <a:r>
-              <a:rPr lang="en-GB" dirty="0" err="1"/>
-              <a:t>untersuchen</a:t>
-            </a:r>
-            <a:endParaRPr lang="en-GB" dirty="0"/>
+              <a:rPr dirty="0" err="1"/>
+              <a:t>noch</a:t>
+            </a:r>
+            <a:r>
+              <a:rPr dirty="0"/>
+              <a:t> nicht </a:t>
+            </a:r>
+            <a:r>
+              <a:rPr dirty="0" err="1"/>
+              <a:t>bekannt</a:t>
+            </a:r>
+            <a:endParaRPr dirty="0"/>
           </a:p>
           <a:p>
             <a:pPr>
@@ -6624,11 +7241,27 @@
             </a:pPr>
             <a:r>
               <a:rPr dirty="0"/>
-              <a:t>• Ziel: </a:t>
-            </a:r>
-            <a:r>
-              <a:rPr dirty="0" err="1"/>
-              <a:t>Automatisierung</a:t>
+              <a:t>• Daher: Keine </a:t>
+            </a:r>
+            <a:r>
+              <a:rPr dirty="0" err="1"/>
+              <a:t>vorschnelle</a:t>
+            </a:r>
+            <a:r>
+              <a:rPr dirty="0"/>
+              <a:t> Tool-</a:t>
+            </a:r>
+            <a:r>
+              <a:rPr dirty="0" err="1"/>
+              <a:t>Entscheidung</a:t>
+            </a:r>
+            <a:r>
+              <a:rPr dirty="0"/>
+              <a:t> – </a:t>
+            </a:r>
+            <a:r>
+              <a:rPr dirty="0" err="1"/>
+              <a:t>zuerst</a:t>
             </a:r>
             <a:r>
               <a:rPr dirty="0"/>
@@ -6636,7 +7269,15 @@
             </a:r>
             <a:r>
               <a:rPr dirty="0" err="1"/>
-              <a:t>dort</a:t>
+              <a:t>Anforderungen</a:t>
+            </a:r>
+            <a:r>
+              <a:rPr dirty="0"/>
+              <a:t> und </a:t>
+            </a:r>
+            <a:r>
+              <a:rPr dirty="0" err="1"/>
+              <a:t>Rahmenbedingungen</a:t>
             </a:r>
             <a:r>
               <a:rPr dirty="0"/>
@@ -6644,47 +7285,7 @@
             </a:r>
             <a:r>
               <a:rPr dirty="0" err="1"/>
-              <a:t>einsetzen</a:t>
-            </a:r>
-            <a:r>
-              <a:rPr dirty="0"/>
-              <a:t>, wo </a:t>
-            </a:r>
-            <a:r>
-              <a:rPr dirty="0" err="1"/>
-              <a:t>sie</a:t>
-            </a:r>
-            <a:r>
-              <a:rPr dirty="0"/>
-              <a:t> </a:t>
-            </a:r>
-            <a:r>
-              <a:rPr dirty="0" err="1"/>
-              <a:t>einen</a:t>
-            </a:r>
-            <a:r>
-              <a:rPr dirty="0"/>
-              <a:t> </a:t>
-            </a:r>
-            <a:r>
-              <a:rPr dirty="0" err="1"/>
-              <a:t>messbaren</a:t>
-            </a:r>
-            <a:r>
-              <a:rPr dirty="0"/>
-              <a:t> </a:t>
-            </a:r>
-            <a:r>
-              <a:rPr dirty="0" err="1"/>
-              <a:t>Nutzen</a:t>
-            </a:r>
-            <a:r>
-              <a:rPr dirty="0"/>
-              <a:t> </a:t>
-            </a:r>
-            <a:r>
-              <a:rPr dirty="0" err="1"/>
-              <a:t>bringt</a:t>
+              <a:t>klären</a:t>
             </a:r>
             <a:endParaRPr dirty="0"/>
           </a:p>
@@ -6716,7 +7317,7 @@
               <a:defRPr sz="900"/>
             </a:pPr>
             <a:r>
-              <a:t>03</a:t>
+              <a:t>02</a:t>
             </a:r>
           </a:p>
         </p:txBody>
@@ -6782,7 +7383,7 @@
               </a:defRPr>
             </a:pPr>
             <a:r>
-              <a:t>3. Auswahlkriterien für ein Werkzeug</a:t>
+              <a:t>2. Discovery: Produkt und Testlandschaft verstehen</a:t>
             </a:r>
           </a:p>
         </p:txBody>
@@ -6840,7 +7441,7 @@
         <p:spPr>
           <a:xfrm>
             <a:off x="822960" y="1508760"/>
-            <a:ext cx="10515600" cy="2616101"/>
+            <a:ext cx="10515600" cy="2462213"/>
           </a:xfrm>
           <a:prstGeom prst="rect">
             <a:avLst/>
@@ -6867,48 +7468,17 @@
             </a:r>
             <a:r>
               <a:rPr dirty="0" err="1"/>
-              <a:t>Technische</a:t>
-            </a:r>
-            <a:r>
-              <a:rPr dirty="0"/>
-              <a:t> </a:t>
-            </a:r>
-            <a:r>
-              <a:rPr dirty="0" err="1"/>
-              <a:t>Eignung</a:t>
-            </a:r>
-            <a:r>
-              <a:rPr dirty="0"/>
-              <a:t>: </a:t>
-            </a:r>
-            <a:r>
-              <a:rPr lang="de-DE" dirty="0"/>
-              <a:t>Welche Technologie wird unterstützt (</a:t>
-            </a:r>
-            <a:r>
-              <a:rPr dirty="0"/>
-              <a:t>Browser</a:t>
-            </a:r>
-            <a:r>
-              <a:rPr lang="de-DE" dirty="0"/>
-              <a:t> Apps</a:t>
-            </a:r>
-            <a:r>
-              <a:rPr dirty="0"/>
-              <a:t>, APIs</a:t>
-            </a:r>
-            <a:r>
-              <a:rPr lang="de-DE" dirty="0"/>
-              <a:t>,</a:t>
-            </a:r>
-            <a:r>
-              <a:rPr dirty="0"/>
-              <a:t> </a:t>
-            </a:r>
-            <a:r>
-              <a:rPr lang="en-GB" dirty="0"/>
-              <a:t>Backend, Mobile)</a:t>
-            </a:r>
+              <a:t>Anforderungen</a:t>
+            </a:r>
+            <a:r>
+              <a:rPr dirty="0"/>
+              <a:t>, User Stories und Acceptance Criteria </a:t>
+            </a:r>
+            <a:r>
+              <a:rPr dirty="0" err="1"/>
+              <a:t>analysieren</a:t>
+            </a:r>
+            <a:endParaRPr dirty="0"/>
           </a:p>
           <a:p>
             <a:pPr>
@@ -6920,30 +7490,81 @@
               </a:defRPr>
             </a:pPr>
             <a:r>
-              <a:rPr lang="en-GB" dirty="0"/>
+              <a:rPr dirty="0"/>
               <a:t>• </a:t>
             </a:r>
             <a:r>
-              <a:rPr lang="en-GB" dirty="0" err="1"/>
-              <a:t>Bedienbarkeit</a:t>
-            </a:r>
-            <a:r>
-              <a:rPr lang="en-GB" dirty="0"/>
-              <a:t>: </a:t>
-            </a:r>
-            <a:r>
-              <a:rPr lang="en-GB" dirty="0" err="1"/>
-              <a:t>Lernkurve</a:t>
-            </a:r>
-            <a:r>
-              <a:rPr lang="en-GB" dirty="0"/>
-              <a:t> für Junior/Senior Tester und </a:t>
-            </a:r>
-            <a:r>
-              <a:rPr lang="en-GB" dirty="0" err="1"/>
-              <a:t>Entwickler</a:t>
-            </a:r>
-            <a:endParaRPr lang="en-GB" dirty="0"/>
+              <a:rPr dirty="0" err="1"/>
+              <a:t>Produkt</a:t>
+            </a:r>
+            <a:r>
+              <a:rPr dirty="0"/>
+              <a:t> </a:t>
+            </a:r>
+            <a:r>
+              <a:rPr dirty="0" err="1"/>
+              <a:t>zunächst</a:t>
+            </a:r>
+            <a:r>
+              <a:rPr dirty="0"/>
+              <a:t> </a:t>
+            </a:r>
+            <a:r>
+              <a:rPr dirty="0" err="1"/>
+              <a:t>explorativ</a:t>
+            </a:r>
+            <a:r>
+              <a:rPr dirty="0"/>
+              <a:t>/</a:t>
+            </a:r>
+            <a:r>
+              <a:rPr dirty="0" err="1"/>
+              <a:t>manuell</a:t>
+            </a:r>
+            <a:r>
+              <a:rPr dirty="0"/>
+              <a:t> </a:t>
+            </a:r>
+            <a:r>
+              <a:rPr dirty="0" err="1"/>
+              <a:t>testen</a:t>
+            </a:r>
+            <a:r>
+              <a:rPr dirty="0"/>
+              <a:t>, um </a:t>
+            </a:r>
+            <a:r>
+              <a:rPr dirty="0" err="1"/>
+              <a:t>Risiken</a:t>
+            </a:r>
+            <a:r>
+              <a:rPr dirty="0"/>
+              <a:t> und </a:t>
+            </a:r>
+            <a:r>
+              <a:rPr dirty="0" err="1"/>
+              <a:t>kritische</a:t>
+            </a:r>
+            <a:r>
+              <a:rPr dirty="0"/>
+              <a:t> </a:t>
+            </a:r>
+            <a:r>
+              <a:rPr dirty="0" err="1"/>
+              <a:t>Geschäftsprozesse</a:t>
+            </a:r>
+            <a:r>
+              <a:rPr dirty="0"/>
+              <a:t> </a:t>
+            </a:r>
+            <a:r>
+              <a:rPr dirty="0" err="1"/>
+              <a:t>zu</a:t>
+            </a:r>
+            <a:r>
+              <a:rPr dirty="0"/>
+              <a:t> verstehen</a:t>
+            </a:r>
           </a:p>
           <a:p>
             <a:pPr>
@@ -6960,31 +7581,7 @@
             </a:r>
             <a:r>
               <a:rPr dirty="0" err="1"/>
-              <a:t>Wartbarkeit</a:t>
-            </a:r>
-            <a:r>
-              <a:rPr dirty="0"/>
-              <a:t>: stabile </a:t>
-            </a:r>
-            <a:r>
-              <a:rPr dirty="0" err="1"/>
-              <a:t>Selektoren</a:t>
-            </a:r>
-            <a:r>
-              <a:rPr dirty="0"/>
-              <a:t>, </a:t>
-            </a:r>
-            <a:r>
-              <a:rPr dirty="0" err="1"/>
-              <a:t>Wiederverwendbarkeit</a:t>
-            </a:r>
-            <a:r>
-              <a:rPr dirty="0"/>
-              <a:t>, </a:t>
-            </a:r>
-            <a:r>
-              <a:rPr dirty="0" err="1"/>
-              <a:t>klare</a:t>
+              <a:t>Technologien</a:t>
             </a:r>
             <a:r>
               <a:rPr dirty="0"/>
@@ -6992,9 +7589,21 @@
             </a:r>
             <a:r>
               <a:rPr dirty="0" err="1"/>
-              <a:t>Architektur</a:t>
-            </a:r>
-            <a:endParaRPr dirty="0"/>
+              <a:t>klären</a:t>
+            </a:r>
+            <a:r>
+              <a:rPr dirty="0"/>
+              <a:t>: Web, API/Backend, Mobile, Desktop</a:t>
+            </a:r>
+            <a:r>
+              <a:rPr lang="de-DE" dirty="0"/>
+              <a:t> </a:t>
+            </a:r>
+            <a:r>
+              <a:rPr lang="de-DE" dirty="0" err="1"/>
+              <a:t>etc</a:t>
+            </a:r>
+            <a:endParaRPr lang="en-GB" dirty="0"/>
           </a:p>
           <a:p>
             <a:pPr>
@@ -7006,30 +7615,46 @@
               </a:defRPr>
             </a:pPr>
             <a:r>
-              <a:rPr dirty="0"/>
-              <a:t>• CI/CD-</a:t>
-            </a:r>
-            <a:r>
-              <a:rPr dirty="0" err="1"/>
-              <a:t>Fähigkeit</a:t>
-            </a:r>
-            <a:r>
-              <a:rPr dirty="0"/>
-              <a:t>: Headless-</a:t>
-            </a:r>
-            <a:r>
-              <a:rPr dirty="0" err="1"/>
-              <a:t>Ausführung</a:t>
-            </a:r>
-            <a:r>
-              <a:rPr dirty="0"/>
-              <a:t>, Reports, </a:t>
-            </a:r>
-            <a:r>
-              <a:rPr dirty="0" err="1"/>
-              <a:t>Parallelisierung</a:t>
-            </a:r>
-            <a:endParaRPr dirty="0"/>
+              <a:rPr lang="en-GB" dirty="0"/>
+              <a:t>• </a:t>
+            </a:r>
+            <a:r>
+              <a:rPr lang="en-GB" dirty="0" err="1"/>
+              <a:t>Bestehende</a:t>
+            </a:r>
+            <a:r>
+              <a:rPr lang="en-GB" dirty="0"/>
+              <a:t> </a:t>
+            </a:r>
+            <a:r>
+              <a:rPr lang="en-GB" dirty="0" err="1"/>
+              <a:t>Testfälle</a:t>
+            </a:r>
+            <a:r>
+              <a:rPr lang="en-GB" dirty="0"/>
+              <a:t>, CI/CD, </a:t>
+            </a:r>
+            <a:r>
+              <a:rPr lang="en-GB" dirty="0" err="1"/>
+              <a:t>Versionsverwaltung</a:t>
+            </a:r>
+            <a:r>
+              <a:rPr lang="en-GB" dirty="0"/>
+              <a:t> und </a:t>
+            </a:r>
+            <a:r>
+              <a:rPr lang="en-GB" dirty="0" err="1"/>
+              <a:t>Testdaten</a:t>
+            </a:r>
+            <a:r>
+              <a:rPr lang="en-GB" dirty="0"/>
+              <a:t> </a:t>
+            </a:r>
+            <a:r>
+              <a:rPr lang="en-GB" dirty="0" err="1"/>
+              <a:t>untersuchen</a:t>
+            </a:r>
+            <a:endParaRPr lang="en-GB" dirty="0"/>
           </a:p>
           <a:p>
             <a:pPr>
@@ -7042,65 +7667,11 @@
             </a:pPr>
             <a:r>
               <a:rPr dirty="0"/>
-              <a:t>• Community &amp; Support: </a:t>
-            </a:r>
-            <a:r>
-              <a:rPr dirty="0" err="1"/>
-              <a:t>Dokumentation</a:t>
-            </a:r>
-            <a:r>
-              <a:rPr dirty="0"/>
-              <a:t>, </a:t>
-            </a:r>
-            <a:r>
-              <a:rPr dirty="0" err="1"/>
-              <a:t>Ökosystem</a:t>
-            </a:r>
-            <a:r>
-              <a:rPr dirty="0"/>
-              <a:t>, </a:t>
-            </a:r>
-            <a:r>
-              <a:rPr dirty="0" err="1"/>
-              <a:t>kommerzieller</a:t>
-            </a:r>
-            <a:r>
-              <a:rPr dirty="0"/>
-              <a:t> Support</a:t>
-            </a:r>
-          </a:p>
-          <a:p>
-            <a:pPr>
-              <a:spcAft>
-                <a:spcPts val="1200"/>
-              </a:spcAft>
-              <a:defRPr sz="1900">
-                <a:latin typeface="Aptos"/>
-              </a:defRPr>
-            </a:pPr>
-            <a:r>
-              <a:rPr dirty="0"/>
-              <a:t>• Kosten: </a:t>
-            </a:r>
-            <a:r>
-              <a:rPr dirty="0" err="1"/>
-              <a:t>Lizenz</a:t>
-            </a:r>
-            <a:r>
-              <a:rPr dirty="0"/>
-              <a:t>, </a:t>
-            </a:r>
-            <a:r>
-              <a:rPr dirty="0" err="1"/>
-              <a:t>Schulung</a:t>
-            </a:r>
-            <a:r>
-              <a:rPr dirty="0"/>
-              <a:t> und </a:t>
-            </a:r>
-            <a:r>
-              <a:rPr dirty="0" err="1"/>
-              <a:t>vor</a:t>
+              <a:t>• Ziel: </a:t>
+            </a:r>
+            <a:r>
+              <a:rPr dirty="0" err="1"/>
+              <a:t>Automatisierung</a:t>
             </a:r>
             <a:r>
               <a:rPr dirty="0"/>
@@ -7108,7 +7679,7 @@
             </a:r>
             <a:r>
               <a:rPr dirty="0" err="1"/>
-              <a:t>allem</a:t>
+              <a:t>dort</a:t>
             </a:r>
             <a:r>
               <a:rPr dirty="0"/>
@@ -7116,7 +7687,15 @@
             </a:r>
             <a:r>
               <a:rPr dirty="0" err="1"/>
-              <a:t>laufender</a:t>
+              <a:t>einsetzen</a:t>
+            </a:r>
+            <a:r>
+              <a:rPr dirty="0"/>
+              <a:t>, wo </a:t>
+            </a:r>
+            <a:r>
+              <a:rPr dirty="0" err="1"/>
+              <a:t>sie</a:t>
             </a:r>
             <a:r>
               <a:rPr dirty="0"/>
@@ -7124,7 +7703,31 @@
             </a:r>
             <a:r>
               <a:rPr dirty="0" err="1"/>
-              <a:t>Wartungsaufwand</a:t>
+              <a:t>einen</a:t>
+            </a:r>
+            <a:r>
+              <a:rPr dirty="0"/>
+              <a:t> </a:t>
+            </a:r>
+            <a:r>
+              <a:rPr dirty="0" err="1"/>
+              <a:t>messbaren</a:t>
+            </a:r>
+            <a:r>
+              <a:rPr dirty="0"/>
+              <a:t> </a:t>
+            </a:r>
+            <a:r>
+              <a:rPr dirty="0" err="1"/>
+              <a:t>Nutzen</a:t>
+            </a:r>
+            <a:r>
+              <a:rPr dirty="0"/>
+              <a:t> </a:t>
+            </a:r>
+            <a:r>
+              <a:rPr dirty="0" err="1"/>
+              <a:t>bringt</a:t>
             </a:r>
             <a:endParaRPr dirty="0"/>
           </a:p>
@@ -7156,7 +7759,7 @@
               <a:defRPr sz="900"/>
             </a:pPr>
             <a:r>
-              <a:t>04</a:t>
+              <a:t>03</a:t>
             </a:r>
           </a:p>
         </p:txBody>
@@ -7203,7 +7806,7 @@
         <p:spPr>
           <a:xfrm>
             <a:off x="640080" y="411480"/>
-            <a:ext cx="2710550" cy="507831"/>
+            <a:ext cx="10881360" cy="731520"/>
           </a:xfrm>
           <a:prstGeom prst="rect">
             <a:avLst/>
@@ -7222,22 +7825,8 @@
               </a:defRPr>
             </a:pPr>
             <a:r>
-              <a:rPr dirty="0"/>
-              <a:t>4. </a:t>
-            </a:r>
-            <a:r>
-              <a:rPr dirty="0" err="1"/>
-              <a:t>Mögliche</a:t>
-            </a:r>
-            <a:r>
-              <a:rPr dirty="0"/>
-              <a:t> Tool</a:t>
-            </a:r>
-            <a:r>
-              <a:rPr lang="de-DE" dirty="0"/>
-              <a:t>s</a:t>
-            </a:r>
-            <a:endParaRPr dirty="0"/>
+              <a:t>3. Auswahlkriterien für ein Werkzeug</a:t>
+            </a:r>
           </a:p>
         </p:txBody>
       </p:sp>
@@ -7294,7 +7883,7 @@
         <p:spPr>
           <a:xfrm>
             <a:off x="822960" y="1508760"/>
-            <a:ext cx="10515600" cy="2169825"/>
+            <a:ext cx="10515600" cy="2616101"/>
           </a:xfrm>
           <a:prstGeom prst="rect">
             <a:avLst/>
@@ -7317,23 +7906,51 @@
             </a:pPr>
             <a:r>
               <a:rPr dirty="0"/>
-              <a:t>• Web: Playwright </a:t>
-            </a:r>
-            <a:r>
-              <a:rPr dirty="0" err="1"/>
-              <a:t>oder</a:t>
-            </a:r>
-            <a:r>
-              <a:rPr dirty="0"/>
-              <a:t> Selenium – </a:t>
-            </a:r>
-            <a:r>
-              <a:rPr dirty="0" err="1"/>
-              <a:t>abhängig</a:t>
-            </a:r>
-            <a:r>
-              <a:rPr dirty="0"/>
-              <a:t> von Technologie, Team</a:t>
+              <a:t>• </a:t>
+            </a:r>
+            <a:r>
+              <a:rPr dirty="0" err="1"/>
+              <a:t>Technische</a:t>
+            </a:r>
+            <a:r>
+              <a:rPr dirty="0"/>
+              <a:t> </a:t>
+            </a:r>
+            <a:r>
+              <a:rPr dirty="0" err="1"/>
+              <a:t>Eignung</a:t>
+            </a:r>
+            <a:r>
+              <a:rPr dirty="0"/>
+              <a:t>: </a:t>
+            </a:r>
+            <a:r>
+              <a:rPr lang="de-DE" dirty="0"/>
+              <a:t>Welche Technologie wird unterstützt (</a:t>
+            </a:r>
+            <a:r>
+              <a:rPr dirty="0"/>
+              <a:t>Browser</a:t>
+            </a:r>
+            <a:r>
+              <a:rPr lang="de-DE" dirty="0"/>
+              <a:t> Apps</a:t>
+            </a:r>
+            <a:r>
+              <a:rPr dirty="0"/>
+              <a:t>, APIs</a:t>
+            </a:r>
+            <a:r>
+              <a:rPr lang="de-DE" dirty="0"/>
+              <a:t>,</a:t>
+            </a:r>
+            <a:r>
+              <a:rPr dirty="0"/>
+              <a:t> </a:t>
+            </a:r>
+            <a:r>
+              <a:rPr lang="en-GB" dirty="0"/>
+              <a:t>Backend, Mobile)</a:t>
             </a:r>
           </a:p>
           <a:p>
@@ -7346,49 +7963,30 @@
               </a:defRPr>
             </a:pPr>
             <a:r>
-              <a:rPr dirty="0"/>
-              <a:t>• API/Backend: REST Assured </a:t>
-            </a:r>
-            <a:r>
-              <a:rPr dirty="0" err="1"/>
-              <a:t>bei</a:t>
-            </a:r>
-            <a:r>
-              <a:rPr dirty="0"/>
-              <a:t> Java-</a:t>
-            </a:r>
-            <a:r>
-              <a:rPr dirty="0" err="1"/>
-              <a:t>Fokus</a:t>
-            </a:r>
-            <a:r>
-              <a:rPr dirty="0"/>
-              <a:t>; </a:t>
-            </a:r>
-            <a:r>
-              <a:rPr dirty="0" err="1"/>
-              <a:t>alternativ</a:t>
-            </a:r>
-            <a:r>
-              <a:rPr dirty="0"/>
-              <a:t> API-</a:t>
-            </a:r>
-            <a:r>
-              <a:rPr dirty="0" err="1"/>
-              <a:t>Funktionen</a:t>
-            </a:r>
-            <a:r>
-              <a:rPr dirty="0"/>
-              <a:t> </a:t>
-            </a:r>
-            <a:r>
-              <a:rPr dirty="0" err="1"/>
-              <a:t>eines</a:t>
-            </a:r>
-            <a:r>
-              <a:rPr dirty="0"/>
-              <a:t> E2E-Frameworks</a:t>
-            </a:r>
+              <a:rPr lang="en-GB" dirty="0"/>
+              <a:t>• </a:t>
+            </a:r>
+            <a:r>
+              <a:rPr lang="en-GB" dirty="0" err="1"/>
+              <a:t>Bedienbarkeit</a:t>
+            </a:r>
+            <a:r>
+              <a:rPr lang="en-GB" dirty="0"/>
+              <a:t>: </a:t>
+            </a:r>
+            <a:r>
+              <a:rPr lang="en-GB" dirty="0" err="1"/>
+              <a:t>Lernkurve</a:t>
+            </a:r>
+            <a:r>
+              <a:rPr lang="en-GB" dirty="0"/>
+              <a:t> für Junior/Senior Tester und </a:t>
+            </a:r>
+            <a:r>
+              <a:rPr lang="en-GB" dirty="0" err="1"/>
+              <a:t>Entwickler</a:t>
+            </a:r>
+            <a:endParaRPr lang="en-GB" dirty="0"/>
           </a:p>
           <a:p>
             <a:pPr>
@@ -7401,35 +7999,43 @@
             </a:pPr>
             <a:r>
               <a:rPr dirty="0"/>
-              <a:t>• Mobile: Appium; </a:t>
-            </a:r>
-            <a:r>
-              <a:rPr dirty="0" err="1"/>
-              <a:t>Geräte</a:t>
-            </a:r>
-            <a:r>
-              <a:rPr dirty="0"/>
-              <a:t>-/</a:t>
-            </a:r>
-            <a:r>
-              <a:rPr dirty="0" err="1"/>
-              <a:t>Simulatorstrategie</a:t>
-            </a:r>
-            <a:r>
-              <a:rPr dirty="0"/>
-              <a:t> und </a:t>
-            </a:r>
-            <a:r>
-              <a:rPr dirty="0" err="1"/>
-              <a:t>ggf</a:t>
-            </a:r>
-            <a:r>
-              <a:rPr dirty="0"/>
-              <a:t>. Device Cloud </a:t>
-            </a:r>
-            <a:r>
-              <a:rPr dirty="0" err="1"/>
-              <a:t>berücksichtigen</a:t>
+              <a:t>• </a:t>
+            </a:r>
+            <a:r>
+              <a:rPr dirty="0" err="1"/>
+              <a:t>Wartbarkeit</a:t>
+            </a:r>
+            <a:r>
+              <a:rPr dirty="0"/>
+              <a:t>: stabile </a:t>
+            </a:r>
+            <a:r>
+              <a:rPr dirty="0" err="1"/>
+              <a:t>Selektoren</a:t>
+            </a:r>
+            <a:r>
+              <a:rPr dirty="0"/>
+              <a:t>, </a:t>
+            </a:r>
+            <a:r>
+              <a:rPr dirty="0" err="1"/>
+              <a:t>Wiederverwendbarkeit</a:t>
+            </a:r>
+            <a:r>
+              <a:rPr dirty="0"/>
+              <a:t>, </a:t>
+            </a:r>
+            <a:r>
+              <a:rPr dirty="0" err="1"/>
+              <a:t>klare</a:t>
+            </a:r>
+            <a:r>
+              <a:rPr dirty="0"/>
+              <a:t> </a:t>
+            </a:r>
+            <a:r>
+              <a:rPr dirty="0" err="1"/>
+              <a:t>Architektur</a:t>
             </a:r>
             <a:endParaRPr dirty="0"/>
           </a:p>
@@ -7444,19 +8050,27 @@
             </a:pPr>
             <a:r>
               <a:rPr dirty="0"/>
-              <a:t>• Container: Docker für </a:t>
-            </a:r>
-            <a:r>
-              <a:rPr dirty="0" err="1"/>
-              <a:t>reproduzierbare</a:t>
-            </a:r>
-            <a:r>
-              <a:rPr dirty="0"/>
-              <a:t> </a:t>
-            </a:r>
-            <a:r>
-              <a:rPr dirty="0" err="1"/>
-              <a:t>Testumgebungen</a:t>
+              <a:t>• CI/CD-</a:t>
+            </a:r>
+            <a:r>
+              <a:rPr dirty="0" err="1"/>
+              <a:t>Fähigkeit</a:t>
+            </a:r>
+            <a:r>
+              <a:rPr dirty="0"/>
+              <a:t>: Headless-</a:t>
+            </a:r>
+            <a:r>
+              <a:rPr dirty="0" err="1"/>
+              <a:t>Ausführung</a:t>
+            </a:r>
+            <a:r>
+              <a:rPr dirty="0"/>
+              <a:t>, Reports, </a:t>
+            </a:r>
+            <a:r>
+              <a:rPr dirty="0" err="1"/>
+              <a:t>Parallelisierung</a:t>
             </a:r>
             <a:endParaRPr dirty="0"/>
           </a:p>
@@ -7471,19 +8085,57 @@
             </a:pPr>
             <a:r>
               <a:rPr dirty="0"/>
-              <a:t>• Wichtig: Too</a:t>
-            </a:r>
-            <a:r>
-              <a:rPr lang="de-DE" dirty="0"/>
-              <a:t>l- Auswahl </a:t>
-            </a:r>
-            <a:r>
-              <a:rPr dirty="0"/>
-              <a:t>– die </a:t>
-            </a:r>
-            <a:r>
-              <a:rPr dirty="0" err="1"/>
-              <a:t>fachliche</a:t>
+              <a:t>• Community &amp; Support: </a:t>
+            </a:r>
+            <a:r>
+              <a:rPr dirty="0" err="1"/>
+              <a:t>Dokumentation</a:t>
+            </a:r>
+            <a:r>
+              <a:rPr dirty="0"/>
+              <a:t>, </a:t>
+            </a:r>
+            <a:r>
+              <a:rPr dirty="0" err="1"/>
+              <a:t>Ökosystem</a:t>
+            </a:r>
+            <a:r>
+              <a:rPr dirty="0"/>
+              <a:t>, </a:t>
+            </a:r>
+            <a:r>
+              <a:rPr dirty="0" err="1"/>
+              <a:t>kommerzieller</a:t>
+            </a:r>
+            <a:r>
+              <a:rPr dirty="0"/>
+              <a:t> Support</a:t>
+            </a:r>
+          </a:p>
+          <a:p>
+            <a:pPr>
+              <a:spcAft>
+                <a:spcPts val="1200"/>
+              </a:spcAft>
+              <a:defRPr sz="1900">
+                <a:latin typeface="Aptos"/>
+              </a:defRPr>
+            </a:pPr>
+            <a:r>
+              <a:rPr dirty="0"/>
+              <a:t>• Kosten: </a:t>
+            </a:r>
+            <a:r>
+              <a:rPr dirty="0" err="1"/>
+              <a:t>Lizenz</a:t>
+            </a:r>
+            <a:r>
+              <a:rPr dirty="0"/>
+              <a:t>, </a:t>
+            </a:r>
+            <a:r>
+              <a:rPr dirty="0" err="1"/>
+              <a:t>Schulung</a:t>
             </a:r>
             <a:r>
               <a:rPr dirty="0"/>
@@ -7491,7 +8143,7 @@
             </a:r>
             <a:r>
               <a:rPr dirty="0" err="1"/>
-              <a:t>technische</a:t>
+              <a:t>vor</a:t>
             </a:r>
             <a:r>
               <a:rPr dirty="0"/>
@@ -7499,7 +8151,7 @@
             </a:r>
             <a:r>
               <a:rPr dirty="0" err="1"/>
-              <a:t>Eignung</a:t>
+              <a:t>allem</a:t>
             </a:r>
             <a:r>
               <a:rPr dirty="0"/>
@@ -7507,7 +8159,15 @@
             </a:r>
             <a:r>
               <a:rPr dirty="0" err="1"/>
-              <a:t>entscheidet</a:t>
+              <a:t>laufender</a:t>
+            </a:r>
+            <a:r>
+              <a:rPr dirty="0"/>
+              <a:t> </a:t>
+            </a:r>
+            <a:r>
+              <a:rPr dirty="0" err="1"/>
+              <a:t>Wartungsaufwand</a:t>
             </a:r>
             <a:endParaRPr dirty="0"/>
           </a:p>
@@ -7539,7 +8199,7 @@
               <a:defRPr sz="900"/>
             </a:pPr>
             <a:r>
-              <a:t>05</a:t>
+              <a:t>04</a:t>
             </a:r>
           </a:p>
         </p:txBody>
@@ -7586,7 +8246,7 @@
         <p:spPr>
           <a:xfrm>
             <a:off x="640080" y="411480"/>
-            <a:ext cx="10881360" cy="731520"/>
+            <a:ext cx="2710550" cy="507831"/>
           </a:xfrm>
           <a:prstGeom prst="rect">
             <a:avLst/>
@@ -7605,8 +8265,22 @@
               </a:defRPr>
             </a:pPr>
             <a:r>
-              <a:t>7. Wer automatisiert? Rollen und Verantwortlichkeiten</a:t>
-            </a:r>
+              <a:rPr dirty="0"/>
+              <a:t>4. </a:t>
+            </a:r>
+            <a:r>
+              <a:rPr dirty="0" err="1"/>
+              <a:t>Mögliche</a:t>
+            </a:r>
+            <a:r>
+              <a:rPr dirty="0"/>
+              <a:t> Tool</a:t>
+            </a:r>
+            <a:r>
+              <a:rPr lang="de-DE" dirty="0"/>
+              <a:t>s</a:t>
+            </a:r>
+            <a:endParaRPr dirty="0"/>
           </a:p>
         </p:txBody>
       </p:sp>
@@ -7686,37 +8360,24 @@
             </a:pPr>
             <a:r>
               <a:rPr dirty="0"/>
-              <a:t>• Test Engineer / QA: </a:t>
-            </a:r>
-            <a:r>
-              <a:rPr dirty="0" err="1"/>
-              <a:t>Testdesign</a:t>
-            </a:r>
-            <a:r>
-              <a:rPr dirty="0"/>
-              <a:t>, </a:t>
-            </a:r>
-            <a:r>
-              <a:rPr dirty="0" err="1"/>
-              <a:t>Automatisierung</a:t>
-            </a:r>
-            <a:r>
-              <a:rPr dirty="0"/>
-              <a:t>, </a:t>
-            </a:r>
-            <a:r>
-              <a:rPr dirty="0" err="1"/>
-              <a:t>Wartung</a:t>
-            </a:r>
-            <a:r>
-              <a:rPr dirty="0"/>
-              <a:t> und </a:t>
-            </a:r>
-            <a:r>
-              <a:rPr dirty="0" err="1"/>
-              <a:t>Analyse</a:t>
-            </a:r>
-            <a:endParaRPr dirty="0"/>
+              <a:t>• Web: Playwright </a:t>
+            </a:r>
+            <a:r>
+              <a:rPr dirty="0" err="1"/>
+              <a:t>oder</a:t>
+            </a:r>
+            <a:r>
+              <a:rPr dirty="0"/>
+              <a:t> Selenium – </a:t>
+            </a:r>
+            <a:r>
+              <a:rPr dirty="0" err="1"/>
+              <a:t>abhängig</a:t>
+            </a:r>
+            <a:r>
+              <a:rPr dirty="0"/>
+              <a:t> von Technologie, Team</a:t>
+            </a:r>
           </a:p>
           <a:p>
             <a:pPr>
@@ -7729,19 +8390,35 @@
             </a:pPr>
             <a:r>
               <a:rPr dirty="0"/>
-              <a:t>• </a:t>
-            </a:r>
-            <a:r>
-              <a:rPr lang="de-DE" dirty="0"/>
-              <a:t>Developer / QA</a:t>
-            </a:r>
-            <a:r>
-              <a:rPr dirty="0"/>
-              <a:t>: </a:t>
-            </a:r>
-            <a:r>
-              <a:rPr dirty="0" err="1"/>
-              <a:t>Unterstützung</a:t>
+              <a:t>• API/Backend: REST Assured </a:t>
+            </a:r>
+            <a:r>
+              <a:rPr dirty="0" err="1"/>
+              <a:t>bei</a:t>
+            </a:r>
+            <a:r>
+              <a:rPr dirty="0"/>
+              <a:t> Java-</a:t>
+            </a:r>
+            <a:r>
+              <a:rPr dirty="0" err="1"/>
+              <a:t>Fokus</a:t>
+            </a:r>
+            <a:r>
+              <a:rPr dirty="0"/>
+              <a:t>; </a:t>
+            </a:r>
+            <a:r>
+              <a:rPr dirty="0" err="1"/>
+              <a:t>alternativ</a:t>
+            </a:r>
+            <a:r>
+              <a:rPr dirty="0"/>
+              <a:t> API-</a:t>
+            </a:r>
+            <a:r>
+              <a:rPr dirty="0" err="1"/>
+              <a:t>Funktionen</a:t>
             </a:r>
             <a:r>
               <a:rPr dirty="0"/>
@@ -7749,25 +8426,12 @@
             </a:r>
             <a:r>
               <a:rPr dirty="0" err="1"/>
-              <a:t>bei</a:t>
-            </a:r>
-            <a:r>
-              <a:rPr dirty="0"/>
-              <a:t> </a:t>
-            </a:r>
-            <a:r>
-              <a:rPr dirty="0" err="1"/>
-              <a:t>Architektur</a:t>
-            </a:r>
-            <a:r>
-              <a:rPr dirty="0"/>
-              <a:t>, </a:t>
-            </a:r>
-            <a:r>
-              <a:rPr dirty="0" err="1"/>
-              <a:t>Codequalität</a:t>
-            </a:r>
-            <a:endParaRPr dirty="0"/>
+              <a:t>eines</a:t>
+            </a:r>
+            <a:r>
+              <a:rPr dirty="0"/>
+              <a:t> E2E-Frameworks</a:t>
+            </a:r>
           </a:p>
           <a:p>
             <a:pPr>
@@ -7780,19 +8444,19 @@
             </a:pPr>
             <a:r>
               <a:rPr dirty="0"/>
-              <a:t>• Product Owner / Business: </a:t>
-            </a:r>
-            <a:r>
-              <a:rPr dirty="0" err="1"/>
-              <a:t>fachliche</a:t>
-            </a:r>
-            <a:r>
-              <a:rPr dirty="0"/>
-              <a:t> </a:t>
-            </a:r>
-            <a:r>
-              <a:rPr dirty="0" err="1"/>
-              <a:t>Akzeptanzkriterien</a:t>
+              <a:t>• Mobile: Appium; </a:t>
+            </a:r>
+            <a:r>
+              <a:rPr dirty="0" err="1"/>
+              <a:t>Geräte</a:t>
+            </a:r>
+            <a:r>
+              <a:rPr dirty="0"/>
+              <a:t>-/</a:t>
+            </a:r>
+            <a:r>
+              <a:rPr dirty="0" err="1"/>
+              <a:t>Simulatorstrategie</a:t>
             </a:r>
             <a:r>
               <a:rPr dirty="0"/>
@@ -7800,7 +8464,15 @@
             </a:r>
             <a:r>
               <a:rPr dirty="0" err="1"/>
-              <a:t>Priorisierung</a:t>
+              <a:t>ggf</a:t>
+            </a:r>
+            <a:r>
+              <a:rPr dirty="0"/>
+              <a:t>. Device Cloud </a:t>
+            </a:r>
+            <a:r>
+              <a:rPr dirty="0" err="1"/>
+              <a:t>berücksichtigen</a:t>
             </a:r>
             <a:endParaRPr dirty="0"/>
           </a:p>
@@ -7815,15 +8487,15 @@
             </a:pPr>
             <a:r>
               <a:rPr dirty="0"/>
-              <a:t>• DevOps: CI/CD, </a:t>
-            </a:r>
-            <a:r>
-              <a:rPr dirty="0" err="1"/>
-              <a:t>Infrastruktur</a:t>
-            </a:r>
-            <a:r>
-              <a:rPr dirty="0"/>
-              <a:t>, Secrets und </a:t>
+              <a:t>• Container: Docker für </a:t>
+            </a:r>
+            <a:r>
+              <a:rPr dirty="0" err="1"/>
+              <a:t>reproduzierbare</a:t>
+            </a:r>
+            <a:r>
+              <a:rPr dirty="0"/>
+              <a:t> </a:t>
             </a:r>
             <a:r>
               <a:rPr dirty="0" err="1"/>
@@ -7842,19 +8514,27 @@
             </a:pPr>
             <a:r>
               <a:rPr dirty="0"/>
-              <a:t>• </a:t>
-            </a:r>
-            <a:r>
-              <a:rPr dirty="0" err="1"/>
-              <a:t>Empfehlung</a:t>
-            </a:r>
-            <a:r>
-              <a:rPr dirty="0"/>
-              <a:t>: </a:t>
-            </a:r>
-            <a:r>
-              <a:rPr dirty="0" err="1"/>
-              <a:t>Verantwortlichkeiten</a:t>
+              <a:t>• Wichtig: Too</a:t>
+            </a:r>
+            <a:r>
+              <a:rPr lang="de-DE" dirty="0"/>
+              <a:t>l- Auswahl </a:t>
+            </a:r>
+            <a:r>
+              <a:rPr dirty="0"/>
+              <a:t>– die </a:t>
+            </a:r>
+            <a:r>
+              <a:rPr dirty="0" err="1"/>
+              <a:t>fachliche</a:t>
+            </a:r>
+            <a:r>
+              <a:rPr dirty="0"/>
+              <a:t> und </a:t>
+            </a:r>
+            <a:r>
+              <a:rPr dirty="0" err="1"/>
+              <a:t>technische</a:t>
             </a:r>
             <a:r>
               <a:rPr dirty="0"/>
@@ -7862,7 +8542,7 @@
             </a:r>
             <a:r>
               <a:rPr dirty="0" err="1"/>
-              <a:t>früh</a:t>
+              <a:t>Eignung</a:t>
             </a:r>
             <a:r>
               <a:rPr dirty="0"/>
@@ -7870,39 +8550,7 @@
             </a:r>
             <a:r>
               <a:rPr dirty="0" err="1"/>
-              <a:t>klären</a:t>
-            </a:r>
-            <a:r>
-              <a:rPr dirty="0"/>
-              <a:t> und </a:t>
-            </a:r>
-            <a:r>
-              <a:rPr dirty="0" err="1"/>
-              <a:t>ein</a:t>
-            </a:r>
-            <a:r>
-              <a:rPr dirty="0"/>
-              <a:t> </a:t>
-            </a:r>
-            <a:r>
-              <a:rPr dirty="0" err="1"/>
-              <a:t>kleines</a:t>
-            </a:r>
-            <a:r>
-              <a:rPr dirty="0"/>
-              <a:t> </a:t>
-            </a:r>
-            <a:r>
-              <a:rPr dirty="0" err="1"/>
-              <a:t>Kernteam</a:t>
-            </a:r>
-            <a:r>
-              <a:rPr dirty="0"/>
-              <a:t> </a:t>
-            </a:r>
-            <a:r>
-              <a:rPr dirty="0" err="1"/>
-              <a:t>benennen</a:t>
+              <a:t>entscheidet</a:t>
             </a:r>
             <a:endParaRPr dirty="0"/>
           </a:p>
@@ -7934,7 +8582,7 @@
               <a:defRPr sz="900"/>
             </a:pPr>
             <a:r>
-              <a:t>08</a:t>
+              <a:t>05</a:t>
             </a:r>
           </a:p>
         </p:txBody>
@@ -7981,7 +8629,7 @@
         <p:spPr>
           <a:xfrm>
             <a:off x="640080" y="411480"/>
-            <a:ext cx="8513164" cy="507831"/>
+            <a:ext cx="10881360" cy="731520"/>
           </a:xfrm>
           <a:prstGeom prst="rect">
             <a:avLst/>
@@ -8000,54 +8648,8 @@
               </a:defRPr>
             </a:pPr>
             <a:r>
-              <a:rPr dirty="0"/>
-              <a:t>8. Budget: T</a:t>
-            </a:r>
-            <a:r>
-              <a:rPr lang="de-DE" dirty="0" err="1"/>
-              <a:t>otal</a:t>
-            </a:r>
-            <a:r>
-              <a:rPr lang="de-DE" dirty="0"/>
-              <a:t> </a:t>
-            </a:r>
-            <a:r>
-              <a:rPr dirty="0"/>
-              <a:t>C</a:t>
-            </a:r>
-            <a:r>
-              <a:rPr lang="de-DE" dirty="0" err="1"/>
-              <a:t>ost</a:t>
-            </a:r>
-            <a:r>
-              <a:rPr lang="de-DE" dirty="0"/>
-              <a:t> of Ownership</a:t>
-            </a:r>
-            <a:r>
-              <a:rPr dirty="0"/>
-              <a:t> </a:t>
-            </a:r>
-            <a:r>
-              <a:rPr dirty="0" err="1"/>
-              <a:t>statt</a:t>
-            </a:r>
-            <a:r>
-              <a:rPr dirty="0"/>
-              <a:t> </a:t>
-            </a:r>
-            <a:r>
-              <a:rPr dirty="0" err="1"/>
-              <a:t>nur</a:t>
-            </a:r>
-            <a:r>
-              <a:rPr dirty="0"/>
-              <a:t> </a:t>
-            </a:r>
-            <a:r>
-              <a:rPr dirty="0" err="1"/>
-              <a:t>Lizenzkosten</a:t>
-            </a:r>
-            <a:endParaRPr dirty="0"/>
+              <a:t>7. Wer automatisiert? Rollen und Verantwortlichkeiten</a:t>
+            </a:r>
           </a:p>
         </p:txBody>
       </p:sp>
@@ -8104,7 +8706,7 @@
         <p:spPr>
           <a:xfrm>
             <a:off x="822960" y="1508760"/>
-            <a:ext cx="10515600" cy="4754880"/>
+            <a:ext cx="10515600" cy="2169825"/>
           </a:xfrm>
           <a:prstGeom prst="rect">
             <a:avLst/>
@@ -8126,8 +8728,38 @@
               </a:defRPr>
             </a:pPr>
             <a:r>
-              <a:t>• Open Source kann Lizenzkosten reduzieren – ist aber nicht kostenlos</a:t>
-            </a:r>
+              <a:rPr dirty="0"/>
+              <a:t>• Test Engineer / QA: </a:t>
+            </a:r>
+            <a:r>
+              <a:rPr dirty="0" err="1"/>
+              <a:t>Testdesign</a:t>
+            </a:r>
+            <a:r>
+              <a:rPr dirty="0"/>
+              <a:t>, </a:t>
+            </a:r>
+            <a:r>
+              <a:rPr dirty="0" err="1"/>
+              <a:t>Automatisierung</a:t>
+            </a:r>
+            <a:r>
+              <a:rPr dirty="0"/>
+              <a:t>, </a:t>
+            </a:r>
+            <a:r>
+              <a:rPr dirty="0" err="1"/>
+              <a:t>Wartung</a:t>
+            </a:r>
+            <a:r>
+              <a:rPr dirty="0"/>
+              <a:t> und </a:t>
+            </a:r>
+            <a:r>
+              <a:rPr dirty="0" err="1"/>
+              <a:t>Analyse</a:t>
+            </a:r>
+            <a:endParaRPr dirty="0"/>
           </a:p>
           <a:p>
             <a:pPr>
@@ -8139,8 +8771,46 @@
               </a:defRPr>
             </a:pPr>
             <a:r>
-              <a:t>• Weitere Kosten: Schulung, Entwicklung, Wartung, CI-Infrastruktur, Testdaten und Geräte</a:t>
-            </a:r>
+              <a:rPr dirty="0"/>
+              <a:t>• </a:t>
+            </a:r>
+            <a:r>
+              <a:rPr lang="de-DE" dirty="0"/>
+              <a:t>Developer / QA</a:t>
+            </a:r>
+            <a:r>
+              <a:rPr dirty="0"/>
+              <a:t>: </a:t>
+            </a:r>
+            <a:r>
+              <a:rPr dirty="0" err="1"/>
+              <a:t>Unterstützung</a:t>
+            </a:r>
+            <a:r>
+              <a:rPr dirty="0"/>
+              <a:t> </a:t>
+            </a:r>
+            <a:r>
+              <a:rPr dirty="0" err="1"/>
+              <a:t>bei</a:t>
+            </a:r>
+            <a:r>
+              <a:rPr dirty="0"/>
+              <a:t> </a:t>
+            </a:r>
+            <a:r>
+              <a:rPr dirty="0" err="1"/>
+              <a:t>Architektur</a:t>
+            </a:r>
+            <a:r>
+              <a:rPr dirty="0"/>
+              <a:t>, </a:t>
+            </a:r>
+            <a:r>
+              <a:rPr dirty="0" err="1"/>
+              <a:t>Codequalität</a:t>
+            </a:r>
+            <a:endParaRPr dirty="0"/>
           </a:p>
           <a:p>
             <a:pPr>
@@ -8152,8 +8822,30 @@
               </a:defRPr>
             </a:pPr>
             <a:r>
-              <a:t>• Kommerzielle Tools können durch Support und geringeren Initialaufwand sinnvoll sein</a:t>
-            </a:r>
+              <a:rPr dirty="0"/>
+              <a:t>• Product Owner / Business: </a:t>
+            </a:r>
+            <a:r>
+              <a:rPr dirty="0" err="1"/>
+              <a:t>fachliche</a:t>
+            </a:r>
+            <a:r>
+              <a:rPr dirty="0"/>
+              <a:t> </a:t>
+            </a:r>
+            <a:r>
+              <a:rPr dirty="0" err="1"/>
+              <a:t>Akzeptanzkriterien</a:t>
+            </a:r>
+            <a:r>
+              <a:rPr dirty="0"/>
+              <a:t> und </a:t>
+            </a:r>
+            <a:r>
+              <a:rPr dirty="0" err="1"/>
+              <a:t>Priorisierung</a:t>
+            </a:r>
+            <a:endParaRPr dirty="0"/>
           </a:p>
           <a:p>
             <a:pPr>
@@ -8165,8 +8857,22 @@
               </a:defRPr>
             </a:pPr>
             <a:r>
-              <a:t>• Daher: Total Cost of Ownership über 2–3 Jahre betrachten</a:t>
-            </a:r>
+              <a:rPr dirty="0"/>
+              <a:t>• DevOps: CI/CD, </a:t>
+            </a:r>
+            <a:r>
+              <a:rPr dirty="0" err="1"/>
+              <a:t>Infrastruktur</a:t>
+            </a:r>
+            <a:r>
+              <a:rPr dirty="0"/>
+              <a:t>, Secrets und </a:t>
+            </a:r>
+            <a:r>
+              <a:rPr dirty="0" err="1"/>
+              <a:t>Testumgebungen</a:t>
+            </a:r>
+            <a:endParaRPr dirty="0"/>
           </a:p>
           <a:p>
             <a:pPr>
@@ -8178,8 +8884,70 @@
               </a:defRPr>
             </a:pPr>
             <a:r>
-              <a:t>• Budgetentscheidung anhand von Nutzen, Risiko und Aufwand treffen</a:t>
-            </a:r>
+              <a:rPr dirty="0"/>
+              <a:t>• </a:t>
+            </a:r>
+            <a:r>
+              <a:rPr dirty="0" err="1"/>
+              <a:t>Empfehlung</a:t>
+            </a:r>
+            <a:r>
+              <a:rPr dirty="0"/>
+              <a:t>: </a:t>
+            </a:r>
+            <a:r>
+              <a:rPr dirty="0" err="1"/>
+              <a:t>Verantwortlichkeiten</a:t>
+            </a:r>
+            <a:r>
+              <a:rPr dirty="0"/>
+              <a:t> </a:t>
+            </a:r>
+            <a:r>
+              <a:rPr dirty="0" err="1"/>
+              <a:t>früh</a:t>
+            </a:r>
+            <a:r>
+              <a:rPr dirty="0"/>
+              <a:t> </a:t>
+            </a:r>
+            <a:r>
+              <a:rPr dirty="0" err="1"/>
+              <a:t>klären</a:t>
+            </a:r>
+            <a:r>
+              <a:rPr dirty="0"/>
+              <a:t> und </a:t>
+            </a:r>
+            <a:r>
+              <a:rPr dirty="0" err="1"/>
+              <a:t>ein</a:t>
+            </a:r>
+            <a:r>
+              <a:rPr dirty="0"/>
+              <a:t> </a:t>
+            </a:r>
+            <a:r>
+              <a:rPr dirty="0" err="1"/>
+              <a:t>kleines</a:t>
+            </a:r>
+            <a:r>
+              <a:rPr dirty="0"/>
+              <a:t> </a:t>
+            </a:r>
+            <a:r>
+              <a:rPr dirty="0" err="1"/>
+              <a:t>Kernteam</a:t>
+            </a:r>
+            <a:r>
+              <a:rPr dirty="0"/>
+              <a:t> </a:t>
+            </a:r>
+            <a:r>
+              <a:rPr dirty="0" err="1"/>
+              <a:t>benennen</a:t>
+            </a:r>
+            <a:endParaRPr dirty="0"/>
           </a:p>
         </p:txBody>
       </p:sp>
@@ -8209,7 +8977,7 @@
               <a:defRPr sz="900"/>
             </a:pPr>
             <a:r>
-              <a:t>09</a:t>
+              <a:t>08</a:t>
             </a:r>
           </a:p>
         </p:txBody>
@@ -8256,7 +9024,7 @@
         <p:spPr>
           <a:xfrm>
             <a:off x="640080" y="411480"/>
-            <a:ext cx="10881360" cy="731520"/>
+            <a:ext cx="8513164" cy="507831"/>
           </a:xfrm>
           <a:prstGeom prst="rect">
             <a:avLst/>
@@ -8275,8 +9043,54 @@
               </a:defRPr>
             </a:pPr>
             <a:r>
-              <a:t>9. Mein Vorschlag: Proof of Concept</a:t>
-            </a:r>
+              <a:rPr dirty="0"/>
+              <a:t>8. Budget: T</a:t>
+            </a:r>
+            <a:r>
+              <a:rPr lang="de-DE" dirty="0" err="1"/>
+              <a:t>otal</a:t>
+            </a:r>
+            <a:r>
+              <a:rPr lang="de-DE" dirty="0"/>
+              <a:t> </a:t>
+            </a:r>
+            <a:r>
+              <a:rPr dirty="0"/>
+              <a:t>C</a:t>
+            </a:r>
+            <a:r>
+              <a:rPr lang="de-DE" dirty="0" err="1"/>
+              <a:t>ost</a:t>
+            </a:r>
+            <a:r>
+              <a:rPr lang="de-DE" dirty="0"/>
+              <a:t> of Ownership</a:t>
+            </a:r>
+            <a:r>
+              <a:rPr dirty="0"/>
+              <a:t> </a:t>
+            </a:r>
+            <a:r>
+              <a:rPr dirty="0" err="1"/>
+              <a:t>statt</a:t>
+            </a:r>
+            <a:r>
+              <a:rPr dirty="0"/>
+              <a:t> </a:t>
+            </a:r>
+            <a:r>
+              <a:rPr dirty="0" err="1"/>
+              <a:t>nur</a:t>
+            </a:r>
+            <a:r>
+              <a:rPr dirty="0"/>
+              <a:t> </a:t>
+            </a:r>
+            <a:r>
+              <a:rPr dirty="0" err="1"/>
+              <a:t>Lizenzkosten</a:t>
+            </a:r>
+            <a:endParaRPr dirty="0"/>
           </a:p>
         </p:txBody>
       </p:sp>
@@ -8355,7 +9169,7 @@
               </a:defRPr>
             </a:pPr>
             <a:r>
-              <a:t>• 1. Einen kritischen Business-Prozess auswählen</a:t>
+              <a:t>• Open Source kann Lizenzkosten reduzieren – ist aber nicht kostenlos</a:t>
             </a:r>
           </a:p>
           <a:p>
@@ -8368,7 +9182,7 @@
               </a:defRPr>
             </a:pPr>
             <a:r>
-              <a:t>• 2. Einen API-Test und/oder einen repräsentativen UI-Test automatisieren</a:t>
+              <a:t>• Weitere Kosten: Schulung, Entwicklung, Wartung, CI-Infrastruktur, Testdaten und Geräte</a:t>
             </a:r>
           </a:p>
           <a:p>
@@ -8381,7 +9195,7 @@
               </a:defRPr>
             </a:pPr>
             <a:r>
-              <a:t>• 3. Playwright/Selenium bzw. REST-Assured/Appium gegen Alternativen bewerten</a:t>
+              <a:t>• Kommerzielle Tools können durch Support und geringeren Initialaufwand sinnvoll sein</a:t>
             </a:r>
           </a:p>
           <a:p>
@@ -8394,7 +9208,7 @@
               </a:defRPr>
             </a:pPr>
             <a:r>
-              <a:t>• 4. CI/CD-Ausführung, Reporting und Wartbarkeit testen</a:t>
+              <a:t>• Daher: Total Cost of Ownership über 2–3 Jahre betrachten</a:t>
             </a:r>
           </a:p>
           <a:p>
@@ -8407,20 +9221,7 @@
               </a:defRPr>
             </a:pPr>
             <a:r>
-              <a:t>• 5. Aufwand, Stabilität und Nutzen messen</a:t>
-            </a:r>
-          </a:p>
-          <a:p>
-            <a:pPr>
-              <a:spcAft>
-                <a:spcPts val="1200"/>
-              </a:spcAft>
-              <a:defRPr sz="1900">
-                <a:latin typeface="Aptos"/>
-              </a:defRPr>
-            </a:pPr>
-            <a:r>
-              <a:t>• Ergebnis: belastbare Entscheidung statt Tool-Auswahl auf Basis von Marketing oder Bauchgefühl</a:t>
+              <a:t>• Budgetentscheidung anhand von Nutzen, Risiko und Aufwand treffen</a:t>
             </a:r>
           </a:p>
         </p:txBody>
@@ -8451,7 +9252,7 @@
               <a:defRPr sz="900"/>
             </a:pPr>
             <a:r>
-              <a:t>10</a:t>
+              <a:t>09</a:t>
             </a:r>
           </a:p>
         </p:txBody>
@@ -8517,7 +9318,7 @@
               </a:defRPr>
             </a:pPr>
             <a:r>
-              <a:t>10. Zielbild der Einführung</a:t>
+              <a:t>9. Mein Vorschlag: Proof of Concept</a:t>
             </a:r>
           </a:p>
         </p:txBody>
@@ -8597,7 +9398,7 @@
               </a:defRPr>
             </a:pPr>
             <a:r>
-              <a:t>• Phase 1: Discovery &amp; Tool-Kriterien</a:t>
+              <a:t>• 1. Einen kritischen Business-Prozess auswählen</a:t>
             </a:r>
           </a:p>
           <a:p>
@@ -8610,7 +9411,7 @@
               </a:defRPr>
             </a:pPr>
             <a:r>
-              <a:t>• Phase 2: Proof of Concept</a:t>
+              <a:t>• 2. Einen API-Test und/oder einen repräsentativen UI-Test automatisieren</a:t>
             </a:r>
           </a:p>
           <a:p>
@@ -8623,7 +9424,7 @@
               </a:defRPr>
             </a:pPr>
             <a:r>
-              <a:t>• Phase 3: Testautomatisierungs-Architektur und Coding Standards</a:t>
+              <a:t>• 3. Playwright/Selenium bzw. REST-Assured/Appium gegen Alternativen bewerten</a:t>
             </a:r>
           </a:p>
           <a:p>
@@ -8636,7 +9437,7 @@
               </a:defRPr>
             </a:pPr>
             <a:r>
-              <a:t>• Phase 4: Pilot mit wenigen kritischen Tests</a:t>
+              <a:t>• 4. CI/CD-Ausführung, Reporting und Wartbarkeit testen</a:t>
             </a:r>
           </a:p>
           <a:p>
@@ -8649,7 +9450,7 @@
               </a:defRPr>
             </a:pPr>
             <a:r>
-              <a:t>• Phase 5: Integration in CI/CD und Reporting</a:t>
+              <a:t>• 5. Aufwand, Stabilität und Nutzen messen</a:t>
             </a:r>
           </a:p>
           <a:p>
@@ -8662,7 +9463,7 @@
               </a:defRPr>
             </a:pPr>
             <a:r>
-              <a:t>• Phase 6: Skalierung, Monitoring und kontinuierliche Wartung</a:t>
+              <a:t>• Ergebnis: belastbare Entscheidung statt Tool-Auswahl auf Basis von Marketing oder Bauchgefühl</a:t>
             </a:r>
           </a:p>
         </p:txBody>
@@ -8693,7 +9494,7 @@
               <a:defRPr sz="900"/>
             </a:pPr>
             <a:r>
-              <a:t>11</a:t>
+              <a:t>10</a:t>
             </a:r>
           </a:p>
         </p:txBody>
